--- a/presentation/RIGOR_slide9_generate.pptx
+++ b/presentation/RIGOR_slide9_generate.pptx
@@ -8,10 +8,19 @@
     <p:notesMasterId r:id="rId4"/>
   </p:notesMasterIdLst>
   <p:sldIdLst>
-    <p:sldId id="264" r:id="rId13"/>
+    <p:sldId id="256" r:id="rId5"/>
   </p:sldIdLst>
   <p:sldSz cy="6858000" cx="12192000"/>
   <p:notesSz cx="6858000" cy="12192000"/>
+  <p:embeddedFontLst>
+    <p:embeddedFont>
+      <p:font typeface="IBM Plex Sans"/>
+      <p:regular r:id="rId6"/>
+      <p:bold r:id="rId7"/>
+      <p:italic r:id="rId8"/>
+      <p:boldItalic r:id="rId9"/>
+    </p:embeddedFont>
+  </p:embeddedFontLst>
   <p:defaultTextStyle>
     <a:defPPr lvl="0" marR="0" rtl="0" algn="l">
       <a:lnSpc>
@@ -243,7 +252,7 @@
   </p:defaultTextStyle>
   <p:extLst>
     <p:ext uri="GoogleSlidesCustomDataVersion2">
-      <go:slidesCustomData xmlns:go="http://customooxmlschemas.google.com/" r:id="rId36" roundtripDataSignature="AMtx7miSAKVMm4+QvifYUYUK20LMzWgfyA=="/>
+      <go:slidesCustomData xmlns:go="http://customooxmlschemas.google.com/" r:id="rId10" roundtripDataSignature="AMtx7midF0xlBtR0NSra8Nll/S3rz5mRmQ=="/>
     </p:ext>
   </p:extLst>
 </p:presentation>
@@ -300,13 +309,20 @@
           </a:bodyPr>
           <a:lstStyle>
             <a:lvl1pPr lvl="0" marR="0" rtl="0" algn="l">
-              <a:spcBef>
-                <a:spcPts val="0"/>
-              </a:spcBef>
-              <a:spcAft>
-                <a:spcPts val="0"/>
-              </a:spcAft>
+              <a:lnSpc>
+                <a:spcPct val="100000"/>
+              </a:lnSpc>
+              <a:spcBef>
+                <a:spcPts val="0"/>
+              </a:spcBef>
+              <a:spcAft>
+                <a:spcPts val="0"/>
+              </a:spcAft>
+              <a:buClr>
+                <a:srgbClr val="000000"/>
+              </a:buClr>
               <a:buSzPts val="1400"/>
+              <a:buFont typeface="Arial"/>
               <a:buNone/>
               <a:defRPr b="0" i="0" sz="1200" u="none" cap="none" strike="noStrike">
                 <a:solidFill>
@@ -319,13 +335,20 @@
               </a:defRPr>
             </a:lvl1pPr>
             <a:lvl2pPr lvl="1" marR="0" rtl="0" algn="l">
-              <a:spcBef>
-                <a:spcPts val="0"/>
-              </a:spcBef>
-              <a:spcAft>
-                <a:spcPts val="0"/>
-              </a:spcAft>
+              <a:lnSpc>
+                <a:spcPct val="100000"/>
+              </a:lnSpc>
+              <a:spcBef>
+                <a:spcPts val="0"/>
+              </a:spcBef>
+              <a:spcAft>
+                <a:spcPts val="0"/>
+              </a:spcAft>
+              <a:buClr>
+                <a:srgbClr val="000000"/>
+              </a:buClr>
               <a:buSzPts val="1400"/>
+              <a:buFont typeface="Arial"/>
               <a:buNone/>
               <a:defRPr b="0" i="0" sz="1800" u="none" cap="none" strike="noStrike">
                 <a:solidFill>
@@ -338,13 +361,20 @@
               </a:defRPr>
             </a:lvl2pPr>
             <a:lvl3pPr lvl="2" marR="0" rtl="0" algn="l">
-              <a:spcBef>
-                <a:spcPts val="0"/>
-              </a:spcBef>
-              <a:spcAft>
-                <a:spcPts val="0"/>
-              </a:spcAft>
+              <a:lnSpc>
+                <a:spcPct val="100000"/>
+              </a:lnSpc>
+              <a:spcBef>
+                <a:spcPts val="0"/>
+              </a:spcBef>
+              <a:spcAft>
+                <a:spcPts val="0"/>
+              </a:spcAft>
+              <a:buClr>
+                <a:srgbClr val="000000"/>
+              </a:buClr>
               <a:buSzPts val="1400"/>
+              <a:buFont typeface="Arial"/>
               <a:buNone/>
               <a:defRPr b="0" i="0" sz="1800" u="none" cap="none" strike="noStrike">
                 <a:solidFill>
@@ -357,13 +387,20 @@
               </a:defRPr>
             </a:lvl3pPr>
             <a:lvl4pPr lvl="3" marR="0" rtl="0" algn="l">
-              <a:spcBef>
-                <a:spcPts val="0"/>
-              </a:spcBef>
-              <a:spcAft>
-                <a:spcPts val="0"/>
-              </a:spcAft>
+              <a:lnSpc>
+                <a:spcPct val="100000"/>
+              </a:lnSpc>
+              <a:spcBef>
+                <a:spcPts val="0"/>
+              </a:spcBef>
+              <a:spcAft>
+                <a:spcPts val="0"/>
+              </a:spcAft>
+              <a:buClr>
+                <a:srgbClr val="000000"/>
+              </a:buClr>
               <a:buSzPts val="1400"/>
+              <a:buFont typeface="Arial"/>
               <a:buNone/>
               <a:defRPr b="0" i="0" sz="1800" u="none" cap="none" strike="noStrike">
                 <a:solidFill>
@@ -376,13 +413,20 @@
               </a:defRPr>
             </a:lvl4pPr>
             <a:lvl5pPr lvl="4" marR="0" rtl="0" algn="l">
-              <a:spcBef>
-                <a:spcPts val="0"/>
-              </a:spcBef>
-              <a:spcAft>
-                <a:spcPts val="0"/>
-              </a:spcAft>
+              <a:lnSpc>
+                <a:spcPct val="100000"/>
+              </a:lnSpc>
+              <a:spcBef>
+                <a:spcPts val="0"/>
+              </a:spcBef>
+              <a:spcAft>
+                <a:spcPts val="0"/>
+              </a:spcAft>
+              <a:buClr>
+                <a:srgbClr val="000000"/>
+              </a:buClr>
               <a:buSzPts val="1400"/>
+              <a:buFont typeface="Arial"/>
               <a:buNone/>
               <a:defRPr b="0" i="0" sz="1800" u="none" cap="none" strike="noStrike">
                 <a:solidFill>
@@ -395,13 +439,20 @@
               </a:defRPr>
             </a:lvl5pPr>
             <a:lvl6pPr lvl="5" marR="0" rtl="0" algn="l">
-              <a:spcBef>
-                <a:spcPts val="0"/>
-              </a:spcBef>
-              <a:spcAft>
-                <a:spcPts val="0"/>
-              </a:spcAft>
+              <a:lnSpc>
+                <a:spcPct val="100000"/>
+              </a:lnSpc>
+              <a:spcBef>
+                <a:spcPts val="0"/>
+              </a:spcBef>
+              <a:spcAft>
+                <a:spcPts val="0"/>
+              </a:spcAft>
+              <a:buClr>
+                <a:srgbClr val="000000"/>
+              </a:buClr>
               <a:buSzPts val="1400"/>
+              <a:buFont typeface="Arial"/>
               <a:buNone/>
               <a:defRPr b="0" i="0" sz="1800" u="none" cap="none" strike="noStrike">
                 <a:solidFill>
@@ -414,13 +465,20 @@
               </a:defRPr>
             </a:lvl6pPr>
             <a:lvl7pPr lvl="6" marR="0" rtl="0" algn="l">
-              <a:spcBef>
-                <a:spcPts val="0"/>
-              </a:spcBef>
-              <a:spcAft>
-                <a:spcPts val="0"/>
-              </a:spcAft>
+              <a:lnSpc>
+                <a:spcPct val="100000"/>
+              </a:lnSpc>
+              <a:spcBef>
+                <a:spcPts val="0"/>
+              </a:spcBef>
+              <a:spcAft>
+                <a:spcPts val="0"/>
+              </a:spcAft>
+              <a:buClr>
+                <a:srgbClr val="000000"/>
+              </a:buClr>
               <a:buSzPts val="1400"/>
+              <a:buFont typeface="Arial"/>
               <a:buNone/>
               <a:defRPr b="0" i="0" sz="1800" u="none" cap="none" strike="noStrike">
                 <a:solidFill>
@@ -433,13 +491,20 @@
               </a:defRPr>
             </a:lvl7pPr>
             <a:lvl8pPr lvl="7" marR="0" rtl="0" algn="l">
-              <a:spcBef>
-                <a:spcPts val="0"/>
-              </a:spcBef>
-              <a:spcAft>
-                <a:spcPts val="0"/>
-              </a:spcAft>
+              <a:lnSpc>
+                <a:spcPct val="100000"/>
+              </a:lnSpc>
+              <a:spcBef>
+                <a:spcPts val="0"/>
+              </a:spcBef>
+              <a:spcAft>
+                <a:spcPts val="0"/>
+              </a:spcAft>
+              <a:buClr>
+                <a:srgbClr val="000000"/>
+              </a:buClr>
               <a:buSzPts val="1400"/>
+              <a:buFont typeface="Arial"/>
               <a:buNone/>
               <a:defRPr b="0" i="0" sz="1800" u="none" cap="none" strike="noStrike">
                 <a:solidFill>
@@ -452,13 +517,20 @@
               </a:defRPr>
             </a:lvl8pPr>
             <a:lvl9pPr lvl="8" marR="0" rtl="0" algn="l">
-              <a:spcBef>
-                <a:spcPts val="0"/>
-              </a:spcBef>
-              <a:spcAft>
-                <a:spcPts val="0"/>
-              </a:spcAft>
+              <a:lnSpc>
+                <a:spcPct val="100000"/>
+              </a:lnSpc>
+              <a:spcBef>
+                <a:spcPts val="0"/>
+              </a:spcBef>
+              <a:spcAft>
+                <a:spcPts val="0"/>
+              </a:spcAft>
+              <a:buClr>
+                <a:srgbClr val="000000"/>
+              </a:buClr>
               <a:buSzPts val="1400"/>
+              <a:buFont typeface="Arial"/>
               <a:buNone/>
               <a:defRPr b="0" i="0" sz="1800" u="none" cap="none" strike="noStrike">
                 <a:solidFill>
@@ -501,13 +573,20 @@
           </a:bodyPr>
           <a:lstStyle>
             <a:lvl1pPr lvl="0" marR="0" rtl="0" algn="r">
-              <a:spcBef>
-                <a:spcPts val="0"/>
-              </a:spcBef>
-              <a:spcAft>
-                <a:spcPts val="0"/>
-              </a:spcAft>
+              <a:lnSpc>
+                <a:spcPct val="100000"/>
+              </a:lnSpc>
+              <a:spcBef>
+                <a:spcPts val="0"/>
+              </a:spcBef>
+              <a:spcAft>
+                <a:spcPts val="0"/>
+              </a:spcAft>
+              <a:buClr>
+                <a:srgbClr val="000000"/>
+              </a:buClr>
               <a:buSzPts val="1400"/>
+              <a:buFont typeface="Arial"/>
               <a:buNone/>
               <a:defRPr b="0" i="0" sz="1200" u="none" cap="none" strike="noStrike">
                 <a:solidFill>
@@ -520,13 +599,20 @@
               </a:defRPr>
             </a:lvl1pPr>
             <a:lvl2pPr lvl="1" marR="0" rtl="0" algn="l">
-              <a:spcBef>
-                <a:spcPts val="0"/>
-              </a:spcBef>
-              <a:spcAft>
-                <a:spcPts val="0"/>
-              </a:spcAft>
+              <a:lnSpc>
+                <a:spcPct val="100000"/>
+              </a:lnSpc>
+              <a:spcBef>
+                <a:spcPts val="0"/>
+              </a:spcBef>
+              <a:spcAft>
+                <a:spcPts val="0"/>
+              </a:spcAft>
+              <a:buClr>
+                <a:srgbClr val="000000"/>
+              </a:buClr>
               <a:buSzPts val="1400"/>
+              <a:buFont typeface="Arial"/>
               <a:buNone/>
               <a:defRPr b="0" i="0" sz="1800" u="none" cap="none" strike="noStrike">
                 <a:solidFill>
@@ -539,13 +625,20 @@
               </a:defRPr>
             </a:lvl2pPr>
             <a:lvl3pPr lvl="2" marR="0" rtl="0" algn="l">
-              <a:spcBef>
-                <a:spcPts val="0"/>
-              </a:spcBef>
-              <a:spcAft>
-                <a:spcPts val="0"/>
-              </a:spcAft>
+              <a:lnSpc>
+                <a:spcPct val="100000"/>
+              </a:lnSpc>
+              <a:spcBef>
+                <a:spcPts val="0"/>
+              </a:spcBef>
+              <a:spcAft>
+                <a:spcPts val="0"/>
+              </a:spcAft>
+              <a:buClr>
+                <a:srgbClr val="000000"/>
+              </a:buClr>
               <a:buSzPts val="1400"/>
+              <a:buFont typeface="Arial"/>
               <a:buNone/>
               <a:defRPr b="0" i="0" sz="1800" u="none" cap="none" strike="noStrike">
                 <a:solidFill>
@@ -558,13 +651,20 @@
               </a:defRPr>
             </a:lvl3pPr>
             <a:lvl4pPr lvl="3" marR="0" rtl="0" algn="l">
-              <a:spcBef>
-                <a:spcPts val="0"/>
-              </a:spcBef>
-              <a:spcAft>
-                <a:spcPts val="0"/>
-              </a:spcAft>
+              <a:lnSpc>
+                <a:spcPct val="100000"/>
+              </a:lnSpc>
+              <a:spcBef>
+                <a:spcPts val="0"/>
+              </a:spcBef>
+              <a:spcAft>
+                <a:spcPts val="0"/>
+              </a:spcAft>
+              <a:buClr>
+                <a:srgbClr val="000000"/>
+              </a:buClr>
               <a:buSzPts val="1400"/>
+              <a:buFont typeface="Arial"/>
               <a:buNone/>
               <a:defRPr b="0" i="0" sz="1800" u="none" cap="none" strike="noStrike">
                 <a:solidFill>
@@ -577,13 +677,20 @@
               </a:defRPr>
             </a:lvl4pPr>
             <a:lvl5pPr lvl="4" marR="0" rtl="0" algn="l">
-              <a:spcBef>
-                <a:spcPts val="0"/>
-              </a:spcBef>
-              <a:spcAft>
-                <a:spcPts val="0"/>
-              </a:spcAft>
+              <a:lnSpc>
+                <a:spcPct val="100000"/>
+              </a:lnSpc>
+              <a:spcBef>
+                <a:spcPts val="0"/>
+              </a:spcBef>
+              <a:spcAft>
+                <a:spcPts val="0"/>
+              </a:spcAft>
+              <a:buClr>
+                <a:srgbClr val="000000"/>
+              </a:buClr>
               <a:buSzPts val="1400"/>
+              <a:buFont typeface="Arial"/>
               <a:buNone/>
               <a:defRPr b="0" i="0" sz="1800" u="none" cap="none" strike="noStrike">
                 <a:solidFill>
@@ -596,13 +703,20 @@
               </a:defRPr>
             </a:lvl5pPr>
             <a:lvl6pPr lvl="5" marR="0" rtl="0" algn="l">
-              <a:spcBef>
-                <a:spcPts val="0"/>
-              </a:spcBef>
-              <a:spcAft>
-                <a:spcPts val="0"/>
-              </a:spcAft>
+              <a:lnSpc>
+                <a:spcPct val="100000"/>
+              </a:lnSpc>
+              <a:spcBef>
+                <a:spcPts val="0"/>
+              </a:spcBef>
+              <a:spcAft>
+                <a:spcPts val="0"/>
+              </a:spcAft>
+              <a:buClr>
+                <a:srgbClr val="000000"/>
+              </a:buClr>
               <a:buSzPts val="1400"/>
+              <a:buFont typeface="Arial"/>
               <a:buNone/>
               <a:defRPr b="0" i="0" sz="1800" u="none" cap="none" strike="noStrike">
                 <a:solidFill>
@@ -615,13 +729,20 @@
               </a:defRPr>
             </a:lvl6pPr>
             <a:lvl7pPr lvl="6" marR="0" rtl="0" algn="l">
-              <a:spcBef>
-                <a:spcPts val="0"/>
-              </a:spcBef>
-              <a:spcAft>
-                <a:spcPts val="0"/>
-              </a:spcAft>
+              <a:lnSpc>
+                <a:spcPct val="100000"/>
+              </a:lnSpc>
+              <a:spcBef>
+                <a:spcPts val="0"/>
+              </a:spcBef>
+              <a:spcAft>
+                <a:spcPts val="0"/>
+              </a:spcAft>
+              <a:buClr>
+                <a:srgbClr val="000000"/>
+              </a:buClr>
               <a:buSzPts val="1400"/>
+              <a:buFont typeface="Arial"/>
               <a:buNone/>
               <a:defRPr b="0" i="0" sz="1800" u="none" cap="none" strike="noStrike">
                 <a:solidFill>
@@ -634,13 +755,20 @@
               </a:defRPr>
             </a:lvl7pPr>
             <a:lvl8pPr lvl="7" marR="0" rtl="0" algn="l">
-              <a:spcBef>
-                <a:spcPts val="0"/>
-              </a:spcBef>
-              <a:spcAft>
-                <a:spcPts val="0"/>
-              </a:spcAft>
+              <a:lnSpc>
+                <a:spcPct val="100000"/>
+              </a:lnSpc>
+              <a:spcBef>
+                <a:spcPts val="0"/>
+              </a:spcBef>
+              <a:spcAft>
+                <a:spcPts val="0"/>
+              </a:spcAft>
+              <a:buClr>
+                <a:srgbClr val="000000"/>
+              </a:buClr>
               <a:buSzPts val="1400"/>
+              <a:buFont typeface="Arial"/>
               <a:buNone/>
               <a:defRPr b="0" i="0" sz="1800" u="none" cap="none" strike="noStrike">
                 <a:solidFill>
@@ -653,13 +781,20 @@
               </a:defRPr>
             </a:lvl8pPr>
             <a:lvl9pPr lvl="8" marR="0" rtl="0" algn="l">
-              <a:spcBef>
-                <a:spcPts val="0"/>
-              </a:spcBef>
-              <a:spcAft>
-                <a:spcPts val="0"/>
-              </a:spcAft>
+              <a:lnSpc>
+                <a:spcPct val="100000"/>
+              </a:lnSpc>
+              <a:spcBef>
+                <a:spcPts val="0"/>
+              </a:spcBef>
+              <a:spcAft>
+                <a:spcPts val="0"/>
+              </a:spcAft>
+              <a:buClr>
+                <a:srgbClr val="000000"/>
+              </a:buClr>
               <a:buSzPts val="1400"/>
+              <a:buFont typeface="Arial"/>
               <a:buNone/>
               <a:defRPr b="0" i="0" sz="1800" u="none" cap="none" strike="noStrike">
                 <a:solidFill>
@@ -747,13 +882,20 @@
           </a:bodyPr>
           <a:lstStyle>
             <a:lvl1pPr indent="-228600" lvl="0" marL="457200" marR="0" rtl="0" algn="l">
-              <a:spcBef>
-                <a:spcPts val="0"/>
-              </a:spcBef>
-              <a:spcAft>
-                <a:spcPts val="0"/>
-              </a:spcAft>
+              <a:lnSpc>
+                <a:spcPct val="100000"/>
+              </a:lnSpc>
+              <a:spcBef>
+                <a:spcPts val="0"/>
+              </a:spcBef>
+              <a:spcAft>
+                <a:spcPts val="0"/>
+              </a:spcAft>
+              <a:buClr>
+                <a:srgbClr val="000000"/>
+              </a:buClr>
               <a:buSzPts val="1400"/>
+              <a:buFont typeface="Arial"/>
               <a:buNone/>
               <a:defRPr b="0" i="0" sz="1200" u="none" cap="none" strike="noStrike">
                 <a:solidFill>
@@ -766,13 +908,20 @@
               </a:defRPr>
             </a:lvl1pPr>
             <a:lvl2pPr indent="-228600" lvl="1" marL="914400" marR="0" rtl="0" algn="l">
-              <a:spcBef>
-                <a:spcPts val="0"/>
-              </a:spcBef>
-              <a:spcAft>
-                <a:spcPts val="0"/>
-              </a:spcAft>
+              <a:lnSpc>
+                <a:spcPct val="100000"/>
+              </a:lnSpc>
+              <a:spcBef>
+                <a:spcPts val="0"/>
+              </a:spcBef>
+              <a:spcAft>
+                <a:spcPts val="0"/>
+              </a:spcAft>
+              <a:buClr>
+                <a:srgbClr val="000000"/>
+              </a:buClr>
               <a:buSzPts val="1400"/>
+              <a:buFont typeface="Arial"/>
               <a:buNone/>
               <a:defRPr b="0" i="0" sz="1200" u="none" cap="none" strike="noStrike">
                 <a:solidFill>
@@ -785,13 +934,20 @@
               </a:defRPr>
             </a:lvl2pPr>
             <a:lvl3pPr indent="-228600" lvl="2" marL="1371600" marR="0" rtl="0" algn="l">
-              <a:spcBef>
-                <a:spcPts val="0"/>
-              </a:spcBef>
-              <a:spcAft>
-                <a:spcPts val="0"/>
-              </a:spcAft>
+              <a:lnSpc>
+                <a:spcPct val="100000"/>
+              </a:lnSpc>
+              <a:spcBef>
+                <a:spcPts val="0"/>
+              </a:spcBef>
+              <a:spcAft>
+                <a:spcPts val="0"/>
+              </a:spcAft>
+              <a:buClr>
+                <a:srgbClr val="000000"/>
+              </a:buClr>
               <a:buSzPts val="1400"/>
+              <a:buFont typeface="Arial"/>
               <a:buNone/>
               <a:defRPr b="0" i="0" sz="1200" u="none" cap="none" strike="noStrike">
                 <a:solidFill>
@@ -804,13 +960,20 @@
               </a:defRPr>
             </a:lvl3pPr>
             <a:lvl4pPr indent="-228600" lvl="3" marL="1828800" marR="0" rtl="0" algn="l">
-              <a:spcBef>
-                <a:spcPts val="0"/>
-              </a:spcBef>
-              <a:spcAft>
-                <a:spcPts val="0"/>
-              </a:spcAft>
+              <a:lnSpc>
+                <a:spcPct val="100000"/>
+              </a:lnSpc>
+              <a:spcBef>
+                <a:spcPts val="0"/>
+              </a:spcBef>
+              <a:spcAft>
+                <a:spcPts val="0"/>
+              </a:spcAft>
+              <a:buClr>
+                <a:srgbClr val="000000"/>
+              </a:buClr>
               <a:buSzPts val="1400"/>
+              <a:buFont typeface="Arial"/>
               <a:buNone/>
               <a:defRPr b="0" i="0" sz="1200" u="none" cap="none" strike="noStrike">
                 <a:solidFill>
@@ -823,13 +986,20 @@
               </a:defRPr>
             </a:lvl4pPr>
             <a:lvl5pPr indent="-228600" lvl="4" marL="2286000" marR="0" rtl="0" algn="l">
-              <a:spcBef>
-                <a:spcPts val="0"/>
-              </a:spcBef>
-              <a:spcAft>
-                <a:spcPts val="0"/>
-              </a:spcAft>
+              <a:lnSpc>
+                <a:spcPct val="100000"/>
+              </a:lnSpc>
+              <a:spcBef>
+                <a:spcPts val="0"/>
+              </a:spcBef>
+              <a:spcAft>
+                <a:spcPts val="0"/>
+              </a:spcAft>
+              <a:buClr>
+                <a:srgbClr val="000000"/>
+              </a:buClr>
               <a:buSzPts val="1400"/>
+              <a:buFont typeface="Arial"/>
               <a:buNone/>
               <a:defRPr b="0" i="0" sz="1200" u="none" cap="none" strike="noStrike">
                 <a:solidFill>
@@ -842,13 +1012,20 @@
               </a:defRPr>
             </a:lvl5pPr>
             <a:lvl6pPr indent="-228600" lvl="5" marL="2743200" marR="0" rtl="0" algn="l">
-              <a:spcBef>
-                <a:spcPts val="0"/>
-              </a:spcBef>
-              <a:spcAft>
-                <a:spcPts val="0"/>
-              </a:spcAft>
+              <a:lnSpc>
+                <a:spcPct val="100000"/>
+              </a:lnSpc>
+              <a:spcBef>
+                <a:spcPts val="0"/>
+              </a:spcBef>
+              <a:spcAft>
+                <a:spcPts val="0"/>
+              </a:spcAft>
+              <a:buClr>
+                <a:srgbClr val="000000"/>
+              </a:buClr>
               <a:buSzPts val="1400"/>
+              <a:buFont typeface="Arial"/>
               <a:buNone/>
               <a:defRPr b="0" i="0" sz="1200" u="none" cap="none" strike="noStrike">
                 <a:solidFill>
@@ -861,13 +1038,20 @@
               </a:defRPr>
             </a:lvl6pPr>
             <a:lvl7pPr indent="-228600" lvl="6" marL="3200400" marR="0" rtl="0" algn="l">
-              <a:spcBef>
-                <a:spcPts val="0"/>
-              </a:spcBef>
-              <a:spcAft>
-                <a:spcPts val="0"/>
-              </a:spcAft>
+              <a:lnSpc>
+                <a:spcPct val="100000"/>
+              </a:lnSpc>
+              <a:spcBef>
+                <a:spcPts val="0"/>
+              </a:spcBef>
+              <a:spcAft>
+                <a:spcPts val="0"/>
+              </a:spcAft>
+              <a:buClr>
+                <a:srgbClr val="000000"/>
+              </a:buClr>
               <a:buSzPts val="1400"/>
+              <a:buFont typeface="Arial"/>
               <a:buNone/>
               <a:defRPr b="0" i="0" sz="1200" u="none" cap="none" strike="noStrike">
                 <a:solidFill>
@@ -880,13 +1064,20 @@
               </a:defRPr>
             </a:lvl7pPr>
             <a:lvl8pPr indent="-228600" lvl="7" marL="3657600" marR="0" rtl="0" algn="l">
-              <a:spcBef>
-                <a:spcPts val="0"/>
-              </a:spcBef>
-              <a:spcAft>
-                <a:spcPts val="0"/>
-              </a:spcAft>
+              <a:lnSpc>
+                <a:spcPct val="100000"/>
+              </a:lnSpc>
+              <a:spcBef>
+                <a:spcPts val="0"/>
+              </a:spcBef>
+              <a:spcAft>
+                <a:spcPts val="0"/>
+              </a:spcAft>
+              <a:buClr>
+                <a:srgbClr val="000000"/>
+              </a:buClr>
               <a:buSzPts val="1400"/>
+              <a:buFont typeface="Arial"/>
               <a:buNone/>
               <a:defRPr b="0" i="0" sz="1200" u="none" cap="none" strike="noStrike">
                 <a:solidFill>
@@ -899,13 +1090,20 @@
               </a:defRPr>
             </a:lvl8pPr>
             <a:lvl9pPr indent="-228600" lvl="8" marL="4114800" marR="0" rtl="0" algn="l">
-              <a:spcBef>
-                <a:spcPts val="0"/>
-              </a:spcBef>
-              <a:spcAft>
-                <a:spcPts val="0"/>
-              </a:spcAft>
+              <a:lnSpc>
+                <a:spcPct val="100000"/>
+              </a:lnSpc>
+              <a:spcBef>
+                <a:spcPts val="0"/>
+              </a:spcBef>
+              <a:spcAft>
+                <a:spcPts val="0"/>
+              </a:spcAft>
+              <a:buClr>
+                <a:srgbClr val="000000"/>
+              </a:buClr>
               <a:buSzPts val="1400"/>
+              <a:buFont typeface="Arial"/>
               <a:buNone/>
               <a:defRPr b="0" i="0" sz="1200" u="none" cap="none" strike="noStrike">
                 <a:solidFill>
@@ -948,13 +1146,20 @@
           </a:bodyPr>
           <a:lstStyle>
             <a:lvl1pPr lvl="0" marR="0" rtl="0" algn="l">
-              <a:spcBef>
-                <a:spcPts val="0"/>
-              </a:spcBef>
-              <a:spcAft>
-                <a:spcPts val="0"/>
-              </a:spcAft>
+              <a:lnSpc>
+                <a:spcPct val="100000"/>
+              </a:lnSpc>
+              <a:spcBef>
+                <a:spcPts val="0"/>
+              </a:spcBef>
+              <a:spcAft>
+                <a:spcPts val="0"/>
+              </a:spcAft>
+              <a:buClr>
+                <a:srgbClr val="000000"/>
+              </a:buClr>
               <a:buSzPts val="1400"/>
+              <a:buFont typeface="Arial"/>
               <a:buNone/>
               <a:defRPr b="0" i="0" sz="1200" u="none" cap="none" strike="noStrike">
                 <a:solidFill>
@@ -967,13 +1172,20 @@
               </a:defRPr>
             </a:lvl1pPr>
             <a:lvl2pPr lvl="1" marR="0" rtl="0" algn="l">
-              <a:spcBef>
-                <a:spcPts val="0"/>
-              </a:spcBef>
-              <a:spcAft>
-                <a:spcPts val="0"/>
-              </a:spcAft>
+              <a:lnSpc>
+                <a:spcPct val="100000"/>
+              </a:lnSpc>
+              <a:spcBef>
+                <a:spcPts val="0"/>
+              </a:spcBef>
+              <a:spcAft>
+                <a:spcPts val="0"/>
+              </a:spcAft>
+              <a:buClr>
+                <a:srgbClr val="000000"/>
+              </a:buClr>
               <a:buSzPts val="1400"/>
+              <a:buFont typeface="Arial"/>
               <a:buNone/>
               <a:defRPr b="0" i="0" sz="1800" u="none" cap="none" strike="noStrike">
                 <a:solidFill>
@@ -986,13 +1198,20 @@
               </a:defRPr>
             </a:lvl2pPr>
             <a:lvl3pPr lvl="2" marR="0" rtl="0" algn="l">
-              <a:spcBef>
-                <a:spcPts val="0"/>
-              </a:spcBef>
-              <a:spcAft>
-                <a:spcPts val="0"/>
-              </a:spcAft>
+              <a:lnSpc>
+                <a:spcPct val="100000"/>
+              </a:lnSpc>
+              <a:spcBef>
+                <a:spcPts val="0"/>
+              </a:spcBef>
+              <a:spcAft>
+                <a:spcPts val="0"/>
+              </a:spcAft>
+              <a:buClr>
+                <a:srgbClr val="000000"/>
+              </a:buClr>
               <a:buSzPts val="1400"/>
+              <a:buFont typeface="Arial"/>
               <a:buNone/>
               <a:defRPr b="0" i="0" sz="1800" u="none" cap="none" strike="noStrike">
                 <a:solidFill>
@@ -1005,13 +1224,20 @@
               </a:defRPr>
             </a:lvl3pPr>
             <a:lvl4pPr lvl="3" marR="0" rtl="0" algn="l">
-              <a:spcBef>
-                <a:spcPts val="0"/>
-              </a:spcBef>
-              <a:spcAft>
-                <a:spcPts val="0"/>
-              </a:spcAft>
+              <a:lnSpc>
+                <a:spcPct val="100000"/>
+              </a:lnSpc>
+              <a:spcBef>
+                <a:spcPts val="0"/>
+              </a:spcBef>
+              <a:spcAft>
+                <a:spcPts val="0"/>
+              </a:spcAft>
+              <a:buClr>
+                <a:srgbClr val="000000"/>
+              </a:buClr>
               <a:buSzPts val="1400"/>
+              <a:buFont typeface="Arial"/>
               <a:buNone/>
               <a:defRPr b="0" i="0" sz="1800" u="none" cap="none" strike="noStrike">
                 <a:solidFill>
@@ -1024,13 +1250,20 @@
               </a:defRPr>
             </a:lvl4pPr>
             <a:lvl5pPr lvl="4" marR="0" rtl="0" algn="l">
-              <a:spcBef>
-                <a:spcPts val="0"/>
-              </a:spcBef>
-              <a:spcAft>
-                <a:spcPts val="0"/>
-              </a:spcAft>
+              <a:lnSpc>
+                <a:spcPct val="100000"/>
+              </a:lnSpc>
+              <a:spcBef>
+                <a:spcPts val="0"/>
+              </a:spcBef>
+              <a:spcAft>
+                <a:spcPts val="0"/>
+              </a:spcAft>
+              <a:buClr>
+                <a:srgbClr val="000000"/>
+              </a:buClr>
               <a:buSzPts val="1400"/>
+              <a:buFont typeface="Arial"/>
               <a:buNone/>
               <a:defRPr b="0" i="0" sz="1800" u="none" cap="none" strike="noStrike">
                 <a:solidFill>
@@ -1043,13 +1276,20 @@
               </a:defRPr>
             </a:lvl5pPr>
             <a:lvl6pPr lvl="5" marR="0" rtl="0" algn="l">
-              <a:spcBef>
-                <a:spcPts val="0"/>
-              </a:spcBef>
-              <a:spcAft>
-                <a:spcPts val="0"/>
-              </a:spcAft>
+              <a:lnSpc>
+                <a:spcPct val="100000"/>
+              </a:lnSpc>
+              <a:spcBef>
+                <a:spcPts val="0"/>
+              </a:spcBef>
+              <a:spcAft>
+                <a:spcPts val="0"/>
+              </a:spcAft>
+              <a:buClr>
+                <a:srgbClr val="000000"/>
+              </a:buClr>
               <a:buSzPts val="1400"/>
+              <a:buFont typeface="Arial"/>
               <a:buNone/>
               <a:defRPr b="0" i="0" sz="1800" u="none" cap="none" strike="noStrike">
                 <a:solidFill>
@@ -1062,13 +1302,20 @@
               </a:defRPr>
             </a:lvl6pPr>
             <a:lvl7pPr lvl="6" marR="0" rtl="0" algn="l">
-              <a:spcBef>
-                <a:spcPts val="0"/>
-              </a:spcBef>
-              <a:spcAft>
-                <a:spcPts val="0"/>
-              </a:spcAft>
+              <a:lnSpc>
+                <a:spcPct val="100000"/>
+              </a:lnSpc>
+              <a:spcBef>
+                <a:spcPts val="0"/>
+              </a:spcBef>
+              <a:spcAft>
+                <a:spcPts val="0"/>
+              </a:spcAft>
+              <a:buClr>
+                <a:srgbClr val="000000"/>
+              </a:buClr>
               <a:buSzPts val="1400"/>
+              <a:buFont typeface="Arial"/>
               <a:buNone/>
               <a:defRPr b="0" i="0" sz="1800" u="none" cap="none" strike="noStrike">
                 <a:solidFill>
@@ -1081,13 +1328,20 @@
               </a:defRPr>
             </a:lvl7pPr>
             <a:lvl8pPr lvl="7" marR="0" rtl="0" algn="l">
-              <a:spcBef>
-                <a:spcPts val="0"/>
-              </a:spcBef>
-              <a:spcAft>
-                <a:spcPts val="0"/>
-              </a:spcAft>
+              <a:lnSpc>
+                <a:spcPct val="100000"/>
+              </a:lnSpc>
+              <a:spcBef>
+                <a:spcPts val="0"/>
+              </a:spcBef>
+              <a:spcAft>
+                <a:spcPts val="0"/>
+              </a:spcAft>
+              <a:buClr>
+                <a:srgbClr val="000000"/>
+              </a:buClr>
               <a:buSzPts val="1400"/>
+              <a:buFont typeface="Arial"/>
               <a:buNone/>
               <a:defRPr b="0" i="0" sz="1800" u="none" cap="none" strike="noStrike">
                 <a:solidFill>
@@ -1100,13 +1354,20 @@
               </a:defRPr>
             </a:lvl8pPr>
             <a:lvl9pPr lvl="8" marR="0" rtl="0" algn="l">
-              <a:spcBef>
-                <a:spcPts val="0"/>
-              </a:spcBef>
-              <a:spcAft>
-                <a:spcPts val="0"/>
-              </a:spcAft>
+              <a:lnSpc>
+                <a:spcPct val="100000"/>
+              </a:lnSpc>
+              <a:spcBef>
+                <a:spcPts val="0"/>
+              </a:spcBef>
+              <a:spcAft>
+                <a:spcPts val="0"/>
+              </a:spcAft>
+              <a:buClr>
+                <a:srgbClr val="000000"/>
+              </a:buClr>
               <a:buSzPts val="1400"/>
+              <a:buFont typeface="Arial"/>
               <a:buNone/>
               <a:defRPr b="0" i="0" sz="1800" u="none" cap="none" strike="noStrike">
                 <a:solidFill>
@@ -1150,12 +1411,20 @@
           <a:lstStyle/>
           <a:p>
             <a:pPr indent="0" lvl="0" marL="0" marR="0" rtl="0" algn="r">
-              <a:spcBef>
-                <a:spcPts val="0"/>
-              </a:spcBef>
-              <a:spcAft>
-                <a:spcPts val="0"/>
-              </a:spcAft>
+              <a:lnSpc>
+                <a:spcPct val="100000"/>
+              </a:lnSpc>
+              <a:spcBef>
+                <a:spcPts val="0"/>
+              </a:spcBef>
+              <a:spcAft>
+                <a:spcPts val="0"/>
+              </a:spcAft>
+              <a:buClr>
+                <a:srgbClr val="000000"/>
+              </a:buClr>
+              <a:buSzPts val="1200"/>
+              <a:buFont typeface="Arial"/>
               <a:buNone/>
             </a:pPr>
             <a:fld id="{00000000-1234-1234-1234-123412341234}" type="slidenum">
@@ -1417,12 +1686,12 @@
 </p:notesMaster>
 </file>
 
-<file path=ppt/notesSlides/notesSlide9.xml><?xml version="1.0" encoding="utf-8"?>
+<file path=ppt/notesSlides/notesSlide1.xml><?xml version="1.0" encoding="utf-8"?>
 <p:notes xmlns:a="http://schemas.openxmlformats.org/drawingml/2006/main" xmlns:r="http://schemas.openxmlformats.org/officeDocument/2006/relationships" xmlns:mc="http://schemas.openxmlformats.org/markup-compatibility/2006" xmlns:mv="urn:schemas-microsoft-com:mac:vml" xmlns:p="http://schemas.openxmlformats.org/presentationml/2006/main" xmlns:c="http://schemas.openxmlformats.org/drawingml/2006/chart" xmlns:dgm="http://schemas.openxmlformats.org/drawingml/2006/diagram" xmlns:o="urn:schemas-microsoft-com:office:office" xmlns:v="urn:schemas-microsoft-com:vml" xmlns:pvml="urn:schemas-microsoft-com:office:powerpoint" xmlns:com="http://schemas.openxmlformats.org/drawingml/2006/compatibility" xmlns:p14="http://schemas.microsoft.com/office/powerpoint/2010/main" xmlns:p15="http://schemas.microsoft.com/office/powerpoint/2012/main" xmlns:ahyp="http://schemas.microsoft.com/office/drawing/2018/hyperlinkcolor" showMasterPhAnim="0" showMasterSp="0">
   <p:cSld>
     <p:spTree>
       <p:nvGrpSpPr>
-        <p:cNvPr id="295" name="Shape 295"/>
+        <p:cNvPr id="16" name="Shape 16"/>
         <p:cNvGrpSpPr/>
         <p:nvPr/>
       </p:nvGrpSpPr>
@@ -1436,7 +1705,7 @@
       </p:grpSpPr>
       <p:sp>
         <p:nvSpPr>
-          <p:cNvPr id="296" name="Google Shape;296;p9:notes"/>
+          <p:cNvPr id="17" name="Google Shape;17;h3b1f15762288d989_1_0:notes"/>
           <p:cNvSpPr/>
           <p:nvPr>
             <p:ph idx="2" type="sldImg"/>
@@ -1478,14 +1747,10 @@
             <a:tailEnd len="sm" w="sm" type="none"/>
           </a:ln>
         </p:spPr>
-        <p:txBody>
-          <a:bodyPr/>
-          <a:p/>
-        </p:txBody>
-      </p:sp>
-      <p:sp>
-        <p:nvSpPr>
-          <p:cNvPr id="297" name="Google Shape;297;p9:notes"/>
+      </p:sp>
+      <p:sp>
+        <p:nvSpPr>
+          <p:cNvPr id="18" name="Google Shape;18;h3b1f15762288d989_1_0:notes"/>
           <p:cNvSpPr txBox="1"/>
           <p:nvPr>
             <p:ph idx="1" type="body"/>
@@ -1494,7 +1759,7 @@
         <p:spPr>
           <a:xfrm>
             <a:off x="685800" y="4400550"/>
-            <a:ext cx="5486400" cy="3600450"/>
+            <a:ext cx="5486400" cy="3600600"/>
           </a:xfrm>
           <a:prstGeom prst="rect">
             <a:avLst/>
@@ -1511,35 +1776,80 @@
           <a:lstStyle/>
           <a:p>
             <a:r>
-              <a:t>[4:52–5:39]  SPOKEN SCRIPT (83 words)</a:t>
+              <a:rPr b="0" i="0" lang="en-US" sz="1200" u="none" cap="none" strike="noStrike">
+                <a:solidFill>
+                  <a:schemeClr val="dk1"/>
+                </a:solidFill>
+                <a:latin typeface="IBM Plex Sans"/>
+                <a:ea typeface="IBM Plex Sans"/>
+                <a:cs typeface="IBM Plex Sans"/>
+                <a:sym typeface="IBM Plex Sans"/>
+              </a:rPr>
+              <a:t>[4:52–5:48]  SPOKEN SCRIPT (98 words)</a:t>
             </a:r>
           </a:p>
           <a:p>
             <a:r>
-              <a:t>Step four: generate. We prompt the Gen-LLM with the seed, the retrieved context and our enrichment instructions. What comes back is the fragment we set as our target on slide three. The tags on the right show where each part came from. The relation hasPatientData and the provenance links come from the schema. The labels come from the documentation. The link to bone marrow disease comes from the Disease Ontology. And the disjointness and the ECOG scale come from the model's own knowledge.</a:t>
+              <a:rPr b="0" i="0" lang="en-US" sz="1200" u="none" cap="none" strike="noStrike">
+                <a:solidFill>
+                  <a:schemeClr val="dk1"/>
+                </a:solidFill>
+                <a:latin typeface="IBM Plex Sans"/>
+                <a:ea typeface="IBM Plex Sans"/>
+                <a:cs typeface="IBM Plex Sans"/>
+                <a:sym typeface="IBM Plex Sans"/>
+              </a:rPr>
+              <a:t>Step four: generate. We prompt the Gen-LLM with the direct mapping from step two, the retrieved context and our enrichment instructions. What comes back is a delta ontology: the same lines as on the left, with new ones inserted into the gaps. The tags show where each change came from. The foreign key becomes the named relation hasPatientData, and provenance links each property to its column: both from the schema. The labels come from the documentation, the link to bone marrow disease from the Disease Ontology, and the disjointness and the ECOG scale from the model's own knowledge.</a:t>
             </a:r>
           </a:p>
           <a:p/>
           <a:p>
             <a:r>
-              <a:t>PRESENTER / POINTER: Point at the tags from top to bottom: schema, docs, ontology, LLM.</a:t>
+              <a:rPr b="0" i="0" lang="en-US" sz="1200" u="none" cap="none" strike="noStrike">
+                <a:solidFill>
+                  <a:schemeClr val="dk1"/>
+                </a:solidFill>
+                <a:latin typeface="IBM Plex Sans"/>
+                <a:ea typeface="IBM Plex Sans"/>
+                <a:cs typeface="IBM Plex Sans"/>
+                <a:sym typeface="IBM Plex Sans"/>
+              </a:rPr>
+              <a:t>PRESENTER / POINTER: Left to right on one row, then down the highlighted lines and their tags.</a:t>
             </a:r>
           </a:p>
           <a:p>
             <a:r>
+              <a:rPr b="0" i="0" lang="en-US" sz="1200" u="none" cap="none" strike="noStrike">
+                <a:solidFill>
+                  <a:schemeClr val="dk1"/>
+                </a:solidFill>
+                <a:latin typeface="IBM Plex Sans"/>
+                <a:ea typeface="IBM Plex Sans"/>
+                <a:cs typeface="IBM Plex Sans"/>
+                <a:sym typeface="IBM Plex Sans"/>
+              </a:rPr>
               <a:t>AUDIENCE TAKEAWAY: The LLM enriches a grounded draft, and every addition is traceable.</a:t>
             </a:r>
           </a:p>
           <a:p>
             <a:r>
-              <a:t>SOURCE AND SCOPE: Paper Sections 3.3-3.4. Same fragment as slide 3, verified with the OWL API.</a:t>
+              <a:rPr b="0" i="0" lang="en-US" sz="1200" u="none" cap="none" strike="noStrike">
+                <a:solidFill>
+                  <a:schemeClr val="dk1"/>
+                </a:solidFill>
+                <a:latin typeface="IBM Plex Sans"/>
+                <a:ea typeface="IBM Plex Sans"/>
+                <a:cs typeface="IBM Plex Sans"/>
+                <a:sym typeface="IBM Plex Sans"/>
+              </a:rPr>
+              <a:t>SOURCE AND SCOPE: Paper Sections 3.2-3.4. Row-aligned BEFORE/AFTER, both verified with the OWL API.</a:t>
             </a:r>
           </a:p>
         </p:txBody>
       </p:sp>
       <p:sp>
         <p:nvSpPr>
-          <p:cNvPr id="298" name="Google Shape;298;p9:notes"/>
+          <p:cNvPr id="19" name="Google Shape;19;h3b1f15762288d989_1_0:notes"/>
           <p:cNvSpPr txBox="1"/>
           <p:nvPr>
             <p:ph idx="12" type="sldNum"/>
@@ -1548,7 +1858,7 @@
         <p:spPr>
           <a:xfrm>
             <a:off x="3884613" y="8685213"/>
-            <a:ext cx="2971800" cy="458787"/>
+            <a:ext cx="2971800" cy="458700"/>
           </a:xfrm>
           <a:prstGeom prst="rect">
             <a:avLst/>
@@ -1565,12 +1875,16 @@
           <a:lstStyle/>
           <a:p>
             <a:pPr indent="0" lvl="0" marL="0" rtl="0" algn="r">
-              <a:spcBef>
-                <a:spcPts val="0"/>
-              </a:spcBef>
-              <a:spcAft>
-                <a:spcPts val="0"/>
-              </a:spcAft>
+              <a:lnSpc>
+                <a:spcPct val="100000"/>
+              </a:lnSpc>
+              <a:spcBef>
+                <a:spcPts val="0"/>
+              </a:spcBef>
+              <a:spcAft>
+                <a:spcPts val="0"/>
+              </a:spcAft>
+              <a:buSzPts val="1400"/>
               <a:buNone/>
             </a:pPr>
             <a:fld id="{00000000-1234-1234-1234-123412341234}" type="slidenum">
@@ -1665,7 +1979,10 @@
                 <a:sym typeface="Calibri"/>
               </a:defRPr>
             </a:lvl1pPr>
-            <a:lvl2pPr lvl="1">
+            <a:lvl2pPr lvl="1" algn="l">
+              <a:lnSpc>
+                <a:spcPct val="100000"/>
+              </a:lnSpc>
               <a:spcBef>
                 <a:spcPts val="0"/>
               </a:spcBef>
@@ -1676,7 +1993,10 @@
               <a:buNone/>
               <a:defRPr/>
             </a:lvl2pPr>
-            <a:lvl3pPr lvl="2">
+            <a:lvl3pPr lvl="2" algn="l">
+              <a:lnSpc>
+                <a:spcPct val="100000"/>
+              </a:lnSpc>
               <a:spcBef>
                 <a:spcPts val="0"/>
               </a:spcBef>
@@ -1687,7 +2007,10 @@
               <a:buNone/>
               <a:defRPr/>
             </a:lvl3pPr>
-            <a:lvl4pPr lvl="3">
+            <a:lvl4pPr lvl="3" algn="l">
+              <a:lnSpc>
+                <a:spcPct val="100000"/>
+              </a:lnSpc>
               <a:spcBef>
                 <a:spcPts val="0"/>
               </a:spcBef>
@@ -1698,7 +2021,10 @@
               <a:buNone/>
               <a:defRPr/>
             </a:lvl4pPr>
-            <a:lvl5pPr lvl="4">
+            <a:lvl5pPr lvl="4" algn="l">
+              <a:lnSpc>
+                <a:spcPct val="100000"/>
+              </a:lnSpc>
               <a:spcBef>
                 <a:spcPts val="0"/>
               </a:spcBef>
@@ -1709,7 +2035,10 @@
               <a:buNone/>
               <a:defRPr/>
             </a:lvl5pPr>
-            <a:lvl6pPr lvl="5">
+            <a:lvl6pPr lvl="5" algn="l">
+              <a:lnSpc>
+                <a:spcPct val="100000"/>
+              </a:lnSpc>
               <a:spcBef>
                 <a:spcPts val="0"/>
               </a:spcBef>
@@ -1720,7 +2049,10 @@
               <a:buNone/>
               <a:defRPr/>
             </a:lvl6pPr>
-            <a:lvl7pPr lvl="6">
+            <a:lvl7pPr lvl="6" algn="l">
+              <a:lnSpc>
+                <a:spcPct val="100000"/>
+              </a:lnSpc>
               <a:spcBef>
                 <a:spcPts val="0"/>
               </a:spcBef>
@@ -1731,7 +2063,10 @@
               <a:buNone/>
               <a:defRPr/>
             </a:lvl7pPr>
-            <a:lvl8pPr lvl="7">
+            <a:lvl8pPr lvl="7" algn="l">
+              <a:lnSpc>
+                <a:spcPct val="100000"/>
+              </a:lnSpc>
               <a:spcBef>
                 <a:spcPts val="0"/>
               </a:spcBef>
@@ -1742,7 +2077,10 @@
               <a:buNone/>
               <a:defRPr/>
             </a:lvl8pPr>
-            <a:lvl9pPr lvl="8">
+            <a:lvl9pPr lvl="8" algn="l">
+              <a:lnSpc>
+                <a:spcPct val="100000"/>
+              </a:lnSpc>
               <a:spcBef>
                 <a:spcPts val="0"/>
               </a:spcBef>
@@ -1809,6 +2147,9 @@
               </a:defRPr>
             </a:lvl1pPr>
             <a:lvl2pPr indent="-342900" lvl="1" marL="914400" algn="l">
+              <a:lnSpc>
+                <a:spcPct val="100000"/>
+              </a:lnSpc>
               <a:spcBef>
                 <a:spcPts val="360"/>
               </a:spcBef>
@@ -1823,6 +2164,9 @@
               <a:defRPr/>
             </a:lvl2pPr>
             <a:lvl3pPr indent="-342900" lvl="2" marL="1371600" algn="l">
+              <a:lnSpc>
+                <a:spcPct val="100000"/>
+              </a:lnSpc>
               <a:spcBef>
                 <a:spcPts val="360"/>
               </a:spcBef>
@@ -1837,6 +2181,9 @@
               <a:defRPr/>
             </a:lvl3pPr>
             <a:lvl4pPr indent="-342900" lvl="3" marL="1828800" algn="l">
+              <a:lnSpc>
+                <a:spcPct val="100000"/>
+              </a:lnSpc>
               <a:spcBef>
                 <a:spcPts val="360"/>
               </a:spcBef>
@@ -1851,6 +2198,9 @@
               <a:defRPr/>
             </a:lvl4pPr>
             <a:lvl5pPr indent="-342900" lvl="4" marL="2286000" algn="l">
+              <a:lnSpc>
+                <a:spcPct val="100000"/>
+              </a:lnSpc>
               <a:spcBef>
                 <a:spcPts val="360"/>
               </a:spcBef>
@@ -1865,6 +2215,9 @@
               <a:defRPr/>
             </a:lvl5pPr>
             <a:lvl6pPr indent="-342900" lvl="5" marL="2743200" algn="l">
+              <a:lnSpc>
+                <a:spcPct val="100000"/>
+              </a:lnSpc>
               <a:spcBef>
                 <a:spcPts val="360"/>
               </a:spcBef>
@@ -1879,6 +2232,9 @@
               <a:defRPr/>
             </a:lvl6pPr>
             <a:lvl7pPr indent="-342900" lvl="6" marL="3200400" algn="l">
+              <a:lnSpc>
+                <a:spcPct val="100000"/>
+              </a:lnSpc>
               <a:spcBef>
                 <a:spcPts val="360"/>
               </a:spcBef>
@@ -1893,6 +2249,9 @@
               <a:defRPr/>
             </a:lvl7pPr>
             <a:lvl8pPr indent="-342900" lvl="7" marL="3657600" algn="l">
+              <a:lnSpc>
+                <a:spcPct val="100000"/>
+              </a:lnSpc>
               <a:spcBef>
                 <a:spcPts val="360"/>
               </a:spcBef>
@@ -1907,6 +2266,9 @@
               <a:defRPr/>
             </a:lvl8pPr>
             <a:lvl9pPr indent="-342900" lvl="8" marL="4114800" algn="l">
+              <a:lnSpc>
+                <a:spcPct val="100000"/>
+              </a:lnSpc>
               <a:spcBef>
                 <a:spcPts val="360"/>
               </a:spcBef>
@@ -2040,93 +2402,213 @@
                 <a:sym typeface="Calibri"/>
               </a:defRPr>
             </a:lvl1pPr>
-            <a:lvl2pPr lvl="1">
-              <a:spcBef>
-                <a:spcPts val="0"/>
-              </a:spcBef>
-              <a:spcAft>
-                <a:spcPts val="0"/>
-              </a:spcAft>
+            <a:lvl2pPr lvl="1" marR="0" rtl="0" algn="l">
+              <a:lnSpc>
+                <a:spcPct val="100000"/>
+              </a:lnSpc>
+              <a:spcBef>
+                <a:spcPts val="0"/>
+              </a:spcBef>
+              <a:spcAft>
+                <a:spcPts val="0"/>
+              </a:spcAft>
+              <a:buClr>
+                <a:srgbClr val="000000"/>
+              </a:buClr>
               <a:buSzPts val="1400"/>
+              <a:buFont typeface="Calibri"/>
               <a:buNone/>
-              <a:defRPr sz="1800"/>
+              <a:defRPr b="0" i="0" sz="1800" u="none" cap="none" strike="noStrike">
+                <a:solidFill>
+                  <a:srgbClr val="000000"/>
+                </a:solidFill>
+                <a:latin typeface="Calibri"/>
+                <a:ea typeface="Calibri"/>
+                <a:cs typeface="Calibri"/>
+                <a:sym typeface="Calibri"/>
+              </a:defRPr>
             </a:lvl2pPr>
-            <a:lvl3pPr lvl="2">
-              <a:spcBef>
-                <a:spcPts val="0"/>
-              </a:spcBef>
-              <a:spcAft>
-                <a:spcPts val="0"/>
-              </a:spcAft>
+            <a:lvl3pPr lvl="2" marR="0" rtl="0" algn="l">
+              <a:lnSpc>
+                <a:spcPct val="100000"/>
+              </a:lnSpc>
+              <a:spcBef>
+                <a:spcPts val="0"/>
+              </a:spcBef>
+              <a:spcAft>
+                <a:spcPts val="0"/>
+              </a:spcAft>
+              <a:buClr>
+                <a:srgbClr val="000000"/>
+              </a:buClr>
               <a:buSzPts val="1400"/>
+              <a:buFont typeface="Calibri"/>
               <a:buNone/>
-              <a:defRPr sz="1800"/>
+              <a:defRPr b="0" i="0" sz="1800" u="none" cap="none" strike="noStrike">
+                <a:solidFill>
+                  <a:srgbClr val="000000"/>
+                </a:solidFill>
+                <a:latin typeface="Calibri"/>
+                <a:ea typeface="Calibri"/>
+                <a:cs typeface="Calibri"/>
+                <a:sym typeface="Calibri"/>
+              </a:defRPr>
             </a:lvl3pPr>
-            <a:lvl4pPr lvl="3">
-              <a:spcBef>
-                <a:spcPts val="0"/>
-              </a:spcBef>
-              <a:spcAft>
-                <a:spcPts val="0"/>
-              </a:spcAft>
+            <a:lvl4pPr lvl="3" marR="0" rtl="0" algn="l">
+              <a:lnSpc>
+                <a:spcPct val="100000"/>
+              </a:lnSpc>
+              <a:spcBef>
+                <a:spcPts val="0"/>
+              </a:spcBef>
+              <a:spcAft>
+                <a:spcPts val="0"/>
+              </a:spcAft>
+              <a:buClr>
+                <a:srgbClr val="000000"/>
+              </a:buClr>
               <a:buSzPts val="1400"/>
+              <a:buFont typeface="Calibri"/>
               <a:buNone/>
-              <a:defRPr sz="1800"/>
+              <a:defRPr b="0" i="0" sz="1800" u="none" cap="none" strike="noStrike">
+                <a:solidFill>
+                  <a:srgbClr val="000000"/>
+                </a:solidFill>
+                <a:latin typeface="Calibri"/>
+                <a:ea typeface="Calibri"/>
+                <a:cs typeface="Calibri"/>
+                <a:sym typeface="Calibri"/>
+              </a:defRPr>
             </a:lvl4pPr>
-            <a:lvl5pPr lvl="4">
-              <a:spcBef>
-                <a:spcPts val="0"/>
-              </a:spcBef>
-              <a:spcAft>
-                <a:spcPts val="0"/>
-              </a:spcAft>
+            <a:lvl5pPr lvl="4" marR="0" rtl="0" algn="l">
+              <a:lnSpc>
+                <a:spcPct val="100000"/>
+              </a:lnSpc>
+              <a:spcBef>
+                <a:spcPts val="0"/>
+              </a:spcBef>
+              <a:spcAft>
+                <a:spcPts val="0"/>
+              </a:spcAft>
+              <a:buClr>
+                <a:srgbClr val="000000"/>
+              </a:buClr>
               <a:buSzPts val="1400"/>
+              <a:buFont typeface="Calibri"/>
               <a:buNone/>
-              <a:defRPr sz="1800"/>
+              <a:defRPr b="0" i="0" sz="1800" u="none" cap="none" strike="noStrike">
+                <a:solidFill>
+                  <a:srgbClr val="000000"/>
+                </a:solidFill>
+                <a:latin typeface="Calibri"/>
+                <a:ea typeface="Calibri"/>
+                <a:cs typeface="Calibri"/>
+                <a:sym typeface="Calibri"/>
+              </a:defRPr>
             </a:lvl5pPr>
-            <a:lvl6pPr lvl="5">
-              <a:spcBef>
-                <a:spcPts val="0"/>
-              </a:spcBef>
-              <a:spcAft>
-                <a:spcPts val="0"/>
-              </a:spcAft>
+            <a:lvl6pPr lvl="5" marR="0" rtl="0" algn="l">
+              <a:lnSpc>
+                <a:spcPct val="100000"/>
+              </a:lnSpc>
+              <a:spcBef>
+                <a:spcPts val="0"/>
+              </a:spcBef>
+              <a:spcAft>
+                <a:spcPts val="0"/>
+              </a:spcAft>
+              <a:buClr>
+                <a:srgbClr val="000000"/>
+              </a:buClr>
               <a:buSzPts val="1400"/>
+              <a:buFont typeface="Calibri"/>
               <a:buNone/>
-              <a:defRPr sz="1800"/>
+              <a:defRPr b="0" i="0" sz="1800" u="none" cap="none" strike="noStrike">
+                <a:solidFill>
+                  <a:srgbClr val="000000"/>
+                </a:solidFill>
+                <a:latin typeface="Calibri"/>
+                <a:ea typeface="Calibri"/>
+                <a:cs typeface="Calibri"/>
+                <a:sym typeface="Calibri"/>
+              </a:defRPr>
             </a:lvl6pPr>
-            <a:lvl7pPr lvl="6">
-              <a:spcBef>
-                <a:spcPts val="0"/>
-              </a:spcBef>
-              <a:spcAft>
-                <a:spcPts val="0"/>
-              </a:spcAft>
+            <a:lvl7pPr lvl="6" marR="0" rtl="0" algn="l">
+              <a:lnSpc>
+                <a:spcPct val="100000"/>
+              </a:lnSpc>
+              <a:spcBef>
+                <a:spcPts val="0"/>
+              </a:spcBef>
+              <a:spcAft>
+                <a:spcPts val="0"/>
+              </a:spcAft>
+              <a:buClr>
+                <a:srgbClr val="000000"/>
+              </a:buClr>
               <a:buSzPts val="1400"/>
+              <a:buFont typeface="Calibri"/>
               <a:buNone/>
-              <a:defRPr sz="1800"/>
+              <a:defRPr b="0" i="0" sz="1800" u="none" cap="none" strike="noStrike">
+                <a:solidFill>
+                  <a:srgbClr val="000000"/>
+                </a:solidFill>
+                <a:latin typeface="Calibri"/>
+                <a:ea typeface="Calibri"/>
+                <a:cs typeface="Calibri"/>
+                <a:sym typeface="Calibri"/>
+              </a:defRPr>
             </a:lvl7pPr>
-            <a:lvl8pPr lvl="7">
-              <a:spcBef>
-                <a:spcPts val="0"/>
-              </a:spcBef>
-              <a:spcAft>
-                <a:spcPts val="0"/>
-              </a:spcAft>
+            <a:lvl8pPr lvl="7" marR="0" rtl="0" algn="l">
+              <a:lnSpc>
+                <a:spcPct val="100000"/>
+              </a:lnSpc>
+              <a:spcBef>
+                <a:spcPts val="0"/>
+              </a:spcBef>
+              <a:spcAft>
+                <a:spcPts val="0"/>
+              </a:spcAft>
+              <a:buClr>
+                <a:srgbClr val="000000"/>
+              </a:buClr>
               <a:buSzPts val="1400"/>
+              <a:buFont typeface="Calibri"/>
               <a:buNone/>
-              <a:defRPr sz="1800"/>
+              <a:defRPr b="0" i="0" sz="1800" u="none" cap="none" strike="noStrike">
+                <a:solidFill>
+                  <a:srgbClr val="000000"/>
+                </a:solidFill>
+                <a:latin typeface="Calibri"/>
+                <a:ea typeface="Calibri"/>
+                <a:cs typeface="Calibri"/>
+                <a:sym typeface="Calibri"/>
+              </a:defRPr>
             </a:lvl8pPr>
-            <a:lvl9pPr lvl="8">
-              <a:spcBef>
-                <a:spcPts val="0"/>
-              </a:spcBef>
-              <a:spcAft>
-                <a:spcPts val="0"/>
-              </a:spcAft>
+            <a:lvl9pPr lvl="8" marR="0" rtl="0" algn="l">
+              <a:lnSpc>
+                <a:spcPct val="100000"/>
+              </a:lnSpc>
+              <a:spcBef>
+                <a:spcPts val="0"/>
+              </a:spcBef>
+              <a:spcAft>
+                <a:spcPts val="0"/>
+              </a:spcAft>
+              <a:buClr>
+                <a:srgbClr val="000000"/>
+              </a:buClr>
               <a:buSzPts val="1400"/>
+              <a:buFont typeface="Calibri"/>
               <a:buNone/>
-              <a:defRPr sz="1800"/>
+              <a:defRPr b="0" i="0" sz="1800" u="none" cap="none" strike="noStrike">
+                <a:solidFill>
+                  <a:srgbClr val="000000"/>
+                </a:solidFill>
+                <a:latin typeface="Calibri"/>
+                <a:ea typeface="Calibri"/>
+                <a:cs typeface="Calibri"/>
+                <a:sym typeface="Calibri"/>
+              </a:defRPr>
             </a:lvl9pPr>
           </a:lstStyle>
           <a:p/>
@@ -2185,6 +2667,9 @@
               </a:defRPr>
             </a:lvl1pPr>
             <a:lvl2pPr indent="-406400" lvl="1" marL="914400" marR="0" rtl="0" algn="l">
+              <a:lnSpc>
+                <a:spcPct val="100000"/>
+              </a:lnSpc>
               <a:spcBef>
                 <a:spcPts val="560"/>
               </a:spcBef>
@@ -2208,6 +2693,9 @@
               </a:defRPr>
             </a:lvl2pPr>
             <a:lvl3pPr indent="-381000" lvl="2" marL="1371600" marR="0" rtl="0" algn="l">
+              <a:lnSpc>
+                <a:spcPct val="100000"/>
+              </a:lnSpc>
               <a:spcBef>
                 <a:spcPts val="480"/>
               </a:spcBef>
@@ -2231,6 +2719,9 @@
               </a:defRPr>
             </a:lvl3pPr>
             <a:lvl4pPr indent="-355600" lvl="3" marL="1828800" marR="0" rtl="0" algn="l">
+              <a:lnSpc>
+                <a:spcPct val="100000"/>
+              </a:lnSpc>
               <a:spcBef>
                 <a:spcPts val="400"/>
               </a:spcBef>
@@ -2254,6 +2745,9 @@
               </a:defRPr>
             </a:lvl4pPr>
             <a:lvl5pPr indent="-355600" lvl="4" marL="2286000" marR="0" rtl="0" algn="l">
+              <a:lnSpc>
+                <a:spcPct val="100000"/>
+              </a:lnSpc>
               <a:spcBef>
                 <a:spcPts val="400"/>
               </a:spcBef>
@@ -2277,6 +2771,9 @@
               </a:defRPr>
             </a:lvl5pPr>
             <a:lvl6pPr indent="-355600" lvl="5" marL="2743200" marR="0" rtl="0" algn="l">
+              <a:lnSpc>
+                <a:spcPct val="100000"/>
+              </a:lnSpc>
               <a:spcBef>
                 <a:spcPts val="400"/>
               </a:spcBef>
@@ -2300,6 +2797,9 @@
               </a:defRPr>
             </a:lvl6pPr>
             <a:lvl7pPr indent="-355600" lvl="6" marL="3200400" marR="0" rtl="0" algn="l">
+              <a:lnSpc>
+                <a:spcPct val="100000"/>
+              </a:lnSpc>
               <a:spcBef>
                 <a:spcPts val="400"/>
               </a:spcBef>
@@ -2323,6 +2823,9 @@
               </a:defRPr>
             </a:lvl7pPr>
             <a:lvl8pPr indent="-355600" lvl="7" marL="3657600" marR="0" rtl="0" algn="l">
+              <a:lnSpc>
+                <a:spcPct val="100000"/>
+              </a:lnSpc>
               <a:spcBef>
                 <a:spcPts val="400"/>
               </a:spcBef>
@@ -2346,6 +2849,9 @@
               </a:defRPr>
             </a:lvl8pPr>
             <a:lvl9pPr indent="-355600" lvl="8" marL="4114800" marR="0" rtl="0" algn="l">
+              <a:lnSpc>
+                <a:spcPct val="100000"/>
+              </a:lnSpc>
               <a:spcBef>
                 <a:spcPts val="400"/>
               </a:spcBef>
@@ -2406,15 +2912,15 @@
         <a:buClr>
           <a:srgbClr val="000000"/>
         </a:buClr>
-        <a:buFont typeface="Calibri"/>
+        <a:buFont typeface="Arial"/>
         <a:defRPr b="0" i="0" spc="0" sz="1400" u="none" cap="none" strike="noStrike">
           <a:solidFill>
             <a:srgbClr val="000000"/>
           </a:solidFill>
-          <a:latin typeface="Calibri"/>
-          <a:ea typeface="Calibri"/>
-          <a:cs typeface="Calibri"/>
-          <a:sym typeface="Calibri"/>
+          <a:latin typeface="Arial"/>
+          <a:ea typeface="Arial"/>
+          <a:cs typeface="Arial"/>
+          <a:sym typeface="Arial"/>
         </a:defRPr>
       </a:lvl1pPr>
       <a:lvl2pPr lvl="1" marR="0" rtl="0" algn="l">
@@ -2430,15 +2936,15 @@
         <a:buClr>
           <a:srgbClr val="000000"/>
         </a:buClr>
-        <a:buFont typeface="Calibri"/>
+        <a:buFont typeface="Arial"/>
         <a:defRPr b="0" i="0" spc="0" sz="1400" u="none" cap="none" strike="noStrike">
           <a:solidFill>
             <a:srgbClr val="000000"/>
           </a:solidFill>
-          <a:latin typeface="Calibri"/>
-          <a:ea typeface="Calibri"/>
-          <a:cs typeface="Calibri"/>
-          <a:sym typeface="Calibri"/>
+          <a:latin typeface="Arial"/>
+          <a:ea typeface="Arial"/>
+          <a:cs typeface="Arial"/>
+          <a:sym typeface="Arial"/>
         </a:defRPr>
       </a:lvl2pPr>
       <a:lvl3pPr lvl="2" marR="0" rtl="0" algn="l">
@@ -2454,15 +2960,15 @@
         <a:buClr>
           <a:srgbClr val="000000"/>
         </a:buClr>
-        <a:buFont typeface="Calibri"/>
+        <a:buFont typeface="Arial"/>
         <a:defRPr b="0" i="0" spc="0" sz="1400" u="none" cap="none" strike="noStrike">
           <a:solidFill>
             <a:srgbClr val="000000"/>
           </a:solidFill>
-          <a:latin typeface="Calibri"/>
-          <a:ea typeface="Calibri"/>
-          <a:cs typeface="Calibri"/>
-          <a:sym typeface="Calibri"/>
+          <a:latin typeface="Arial"/>
+          <a:ea typeface="Arial"/>
+          <a:cs typeface="Arial"/>
+          <a:sym typeface="Arial"/>
         </a:defRPr>
       </a:lvl3pPr>
       <a:lvl4pPr lvl="3" marR="0" rtl="0" algn="l">
@@ -2478,15 +2984,15 @@
         <a:buClr>
           <a:srgbClr val="000000"/>
         </a:buClr>
-        <a:buFont typeface="Calibri"/>
+        <a:buFont typeface="Arial"/>
         <a:defRPr b="0" i="0" spc="0" sz="1400" u="none" cap="none" strike="noStrike">
           <a:solidFill>
             <a:srgbClr val="000000"/>
           </a:solidFill>
-          <a:latin typeface="Calibri"/>
-          <a:ea typeface="Calibri"/>
-          <a:cs typeface="Calibri"/>
-          <a:sym typeface="Calibri"/>
+          <a:latin typeface="Arial"/>
+          <a:ea typeface="Arial"/>
+          <a:cs typeface="Arial"/>
+          <a:sym typeface="Arial"/>
         </a:defRPr>
       </a:lvl4pPr>
       <a:lvl5pPr lvl="4" marR="0" rtl="0" algn="l">
@@ -2502,15 +3008,15 @@
         <a:buClr>
           <a:srgbClr val="000000"/>
         </a:buClr>
-        <a:buFont typeface="Calibri"/>
+        <a:buFont typeface="Arial"/>
         <a:defRPr b="0" i="0" spc="0" sz="1400" u="none" cap="none" strike="noStrike">
           <a:solidFill>
             <a:srgbClr val="000000"/>
           </a:solidFill>
-          <a:latin typeface="Calibri"/>
-          <a:ea typeface="Calibri"/>
-          <a:cs typeface="Calibri"/>
-          <a:sym typeface="Calibri"/>
+          <a:latin typeface="Arial"/>
+          <a:ea typeface="Arial"/>
+          <a:cs typeface="Arial"/>
+          <a:sym typeface="Arial"/>
         </a:defRPr>
       </a:lvl5pPr>
       <a:lvl6pPr lvl="5" marR="0" rtl="0" algn="l">
@@ -2526,15 +3032,15 @@
         <a:buClr>
           <a:srgbClr val="000000"/>
         </a:buClr>
-        <a:buFont typeface="Calibri"/>
+        <a:buFont typeface="Arial"/>
         <a:defRPr b="0" i="0" spc="0" sz="1400" u="none" cap="none" strike="noStrike">
           <a:solidFill>
             <a:srgbClr val="000000"/>
           </a:solidFill>
-          <a:latin typeface="Calibri"/>
-          <a:ea typeface="Calibri"/>
-          <a:cs typeface="Calibri"/>
-          <a:sym typeface="Calibri"/>
+          <a:latin typeface="Arial"/>
+          <a:ea typeface="Arial"/>
+          <a:cs typeface="Arial"/>
+          <a:sym typeface="Arial"/>
         </a:defRPr>
       </a:lvl6pPr>
       <a:lvl7pPr lvl="6" marR="0" rtl="0" algn="l">
@@ -2550,15 +3056,15 @@
         <a:buClr>
           <a:srgbClr val="000000"/>
         </a:buClr>
-        <a:buFont typeface="Calibri"/>
+        <a:buFont typeface="Arial"/>
         <a:defRPr b="0" i="0" spc="0" sz="1400" u="none" cap="none" strike="noStrike">
           <a:solidFill>
             <a:srgbClr val="000000"/>
           </a:solidFill>
-          <a:latin typeface="Calibri"/>
-          <a:ea typeface="Calibri"/>
-          <a:cs typeface="Calibri"/>
-          <a:sym typeface="Calibri"/>
+          <a:latin typeface="Arial"/>
+          <a:ea typeface="Arial"/>
+          <a:cs typeface="Arial"/>
+          <a:sym typeface="Arial"/>
         </a:defRPr>
       </a:lvl7pPr>
       <a:lvl8pPr lvl="7" marR="0" rtl="0" algn="l">
@@ -2574,15 +3080,15 @@
         <a:buClr>
           <a:srgbClr val="000000"/>
         </a:buClr>
-        <a:buFont typeface="Calibri"/>
+        <a:buFont typeface="Arial"/>
         <a:defRPr b="0" i="0" spc="0" sz="1400" u="none" cap="none" strike="noStrike">
           <a:solidFill>
             <a:srgbClr val="000000"/>
           </a:solidFill>
-          <a:latin typeface="Calibri"/>
-          <a:ea typeface="Calibri"/>
-          <a:cs typeface="Calibri"/>
-          <a:sym typeface="Calibri"/>
+          <a:latin typeface="Arial"/>
+          <a:ea typeface="Arial"/>
+          <a:cs typeface="Arial"/>
+          <a:sym typeface="Arial"/>
         </a:defRPr>
       </a:lvl8pPr>
       <a:lvl9pPr lvl="8" marR="0" rtl="0" algn="l">
@@ -2598,15 +3104,15 @@
         <a:buClr>
           <a:srgbClr val="000000"/>
         </a:buClr>
-        <a:buFont typeface="Calibri"/>
+        <a:buFont typeface="Arial"/>
         <a:defRPr b="0" i="0" spc="0" sz="1400" u="none" cap="none" strike="noStrike">
           <a:solidFill>
             <a:srgbClr val="000000"/>
           </a:solidFill>
-          <a:latin typeface="Calibri"/>
-          <a:ea typeface="Calibri"/>
-          <a:cs typeface="Calibri"/>
-          <a:sym typeface="Calibri"/>
+          <a:latin typeface="Arial"/>
+          <a:ea typeface="Arial"/>
+          <a:cs typeface="Arial"/>
+          <a:sym typeface="Arial"/>
         </a:defRPr>
       </a:lvl9pPr>
     </p:titleStyle>
@@ -2635,15 +3141,15 @@
         <a:buClr>
           <a:srgbClr val="000000"/>
         </a:buClr>
-        <a:buFont typeface="Calibri"/>
+        <a:buFont typeface="Arial"/>
         <a:defRPr b="0" i="0" spc="0" sz="1400" u="none" cap="none" strike="noStrike">
           <a:solidFill>
             <a:srgbClr val="000000"/>
           </a:solidFill>
-          <a:latin typeface="Calibri"/>
-          <a:ea typeface="Calibri"/>
-          <a:cs typeface="Calibri"/>
-          <a:sym typeface="Calibri"/>
+          <a:latin typeface="Arial"/>
+          <a:ea typeface="Arial"/>
+          <a:cs typeface="Arial"/>
+          <a:sym typeface="Arial"/>
         </a:defRPr>
       </a:lvl1pPr>
       <a:lvl2pPr lvl="1" marR="0" rtl="0" algn="l">
@@ -2659,15 +3165,15 @@
         <a:buClr>
           <a:srgbClr val="000000"/>
         </a:buClr>
-        <a:buFont typeface="Calibri"/>
+        <a:buFont typeface="Arial"/>
         <a:defRPr b="0" i="0" spc="0" sz="1400" u="none" cap="none" strike="noStrike">
           <a:solidFill>
             <a:srgbClr val="000000"/>
           </a:solidFill>
-          <a:latin typeface="Calibri"/>
-          <a:ea typeface="Calibri"/>
-          <a:cs typeface="Calibri"/>
-          <a:sym typeface="Calibri"/>
+          <a:latin typeface="Arial"/>
+          <a:ea typeface="Arial"/>
+          <a:cs typeface="Arial"/>
+          <a:sym typeface="Arial"/>
         </a:defRPr>
       </a:lvl2pPr>
       <a:lvl3pPr lvl="2" marR="0" rtl="0" algn="l">
@@ -2683,15 +3189,15 @@
         <a:buClr>
           <a:srgbClr val="000000"/>
         </a:buClr>
-        <a:buFont typeface="Calibri"/>
+        <a:buFont typeface="Arial"/>
         <a:defRPr b="0" i="0" spc="0" sz="1400" u="none" cap="none" strike="noStrike">
           <a:solidFill>
             <a:srgbClr val="000000"/>
           </a:solidFill>
-          <a:latin typeface="Calibri"/>
-          <a:ea typeface="Calibri"/>
-          <a:cs typeface="Calibri"/>
-          <a:sym typeface="Calibri"/>
+          <a:latin typeface="Arial"/>
+          <a:ea typeface="Arial"/>
+          <a:cs typeface="Arial"/>
+          <a:sym typeface="Arial"/>
         </a:defRPr>
       </a:lvl3pPr>
       <a:lvl4pPr lvl="3" marR="0" rtl="0" algn="l">
@@ -2707,15 +3213,15 @@
         <a:buClr>
           <a:srgbClr val="000000"/>
         </a:buClr>
-        <a:buFont typeface="Calibri"/>
+        <a:buFont typeface="Arial"/>
         <a:defRPr b="0" i="0" spc="0" sz="1400" u="none" cap="none" strike="noStrike">
           <a:solidFill>
             <a:srgbClr val="000000"/>
           </a:solidFill>
-          <a:latin typeface="Calibri"/>
-          <a:ea typeface="Calibri"/>
-          <a:cs typeface="Calibri"/>
-          <a:sym typeface="Calibri"/>
+          <a:latin typeface="Arial"/>
+          <a:ea typeface="Arial"/>
+          <a:cs typeface="Arial"/>
+          <a:sym typeface="Arial"/>
         </a:defRPr>
       </a:lvl4pPr>
       <a:lvl5pPr lvl="4" marR="0" rtl="0" algn="l">
@@ -2731,15 +3237,15 @@
         <a:buClr>
           <a:srgbClr val="000000"/>
         </a:buClr>
-        <a:buFont typeface="Calibri"/>
+        <a:buFont typeface="Arial"/>
         <a:defRPr b="0" i="0" spc="0" sz="1400" u="none" cap="none" strike="noStrike">
           <a:solidFill>
             <a:srgbClr val="000000"/>
           </a:solidFill>
-          <a:latin typeface="Calibri"/>
-          <a:ea typeface="Calibri"/>
-          <a:cs typeface="Calibri"/>
-          <a:sym typeface="Calibri"/>
+          <a:latin typeface="Arial"/>
+          <a:ea typeface="Arial"/>
+          <a:cs typeface="Arial"/>
+          <a:sym typeface="Arial"/>
         </a:defRPr>
       </a:lvl5pPr>
       <a:lvl6pPr lvl="5" marR="0" rtl="0" algn="l">
@@ -2755,15 +3261,15 @@
         <a:buClr>
           <a:srgbClr val="000000"/>
         </a:buClr>
-        <a:buFont typeface="Calibri"/>
+        <a:buFont typeface="Arial"/>
         <a:defRPr b="0" i="0" spc="0" sz="1400" u="none" cap="none" strike="noStrike">
           <a:solidFill>
             <a:srgbClr val="000000"/>
           </a:solidFill>
-          <a:latin typeface="Calibri"/>
-          <a:ea typeface="Calibri"/>
-          <a:cs typeface="Calibri"/>
-          <a:sym typeface="Calibri"/>
+          <a:latin typeface="Arial"/>
+          <a:ea typeface="Arial"/>
+          <a:cs typeface="Arial"/>
+          <a:sym typeface="Arial"/>
         </a:defRPr>
       </a:lvl6pPr>
       <a:lvl7pPr lvl="6" marR="0" rtl="0" algn="l">
@@ -2779,15 +3285,15 @@
         <a:buClr>
           <a:srgbClr val="000000"/>
         </a:buClr>
-        <a:buFont typeface="Calibri"/>
+        <a:buFont typeface="Arial"/>
         <a:defRPr b="0" i="0" spc="0" sz="1400" u="none" cap="none" strike="noStrike">
           <a:solidFill>
             <a:srgbClr val="000000"/>
           </a:solidFill>
-          <a:latin typeface="Calibri"/>
-          <a:ea typeface="Calibri"/>
-          <a:cs typeface="Calibri"/>
-          <a:sym typeface="Calibri"/>
+          <a:latin typeface="Arial"/>
+          <a:ea typeface="Arial"/>
+          <a:cs typeface="Arial"/>
+          <a:sym typeface="Arial"/>
         </a:defRPr>
       </a:lvl7pPr>
       <a:lvl8pPr lvl="7" marR="0" rtl="0" algn="l">
@@ -2803,15 +3309,15 @@
         <a:buClr>
           <a:srgbClr val="000000"/>
         </a:buClr>
-        <a:buFont typeface="Calibri"/>
+        <a:buFont typeface="Arial"/>
         <a:defRPr b="0" i="0" spc="0" sz="1400" u="none" cap="none" strike="noStrike">
           <a:solidFill>
             <a:srgbClr val="000000"/>
           </a:solidFill>
-          <a:latin typeface="Calibri"/>
-          <a:ea typeface="Calibri"/>
-          <a:cs typeface="Calibri"/>
-          <a:sym typeface="Calibri"/>
+          <a:latin typeface="Arial"/>
+          <a:ea typeface="Arial"/>
+          <a:cs typeface="Arial"/>
+          <a:sym typeface="Arial"/>
         </a:defRPr>
       </a:lvl8pPr>
       <a:lvl9pPr lvl="8" marR="0" rtl="0" algn="l">
@@ -2827,15 +3333,15 @@
         <a:buClr>
           <a:srgbClr val="000000"/>
         </a:buClr>
-        <a:buFont typeface="Calibri"/>
+        <a:buFont typeface="Arial"/>
         <a:defRPr b="0" i="0" spc="0" sz="1400" u="none" cap="none" strike="noStrike">
           <a:solidFill>
             <a:srgbClr val="000000"/>
           </a:solidFill>
-          <a:latin typeface="Calibri"/>
-          <a:ea typeface="Calibri"/>
-          <a:cs typeface="Calibri"/>
-          <a:sym typeface="Calibri"/>
+          <a:latin typeface="Arial"/>
+          <a:ea typeface="Arial"/>
+          <a:cs typeface="Arial"/>
+          <a:sym typeface="Arial"/>
         </a:defRPr>
       </a:lvl9pPr>
     </p:bodyStyle>
@@ -2864,15 +3370,15 @@
         <a:buClr>
           <a:srgbClr val="000000"/>
         </a:buClr>
-        <a:buFont typeface="Calibri"/>
+        <a:buFont typeface="Arial"/>
         <a:defRPr b="0" i="0" spc="0" sz="1400" u="none" cap="none" strike="noStrike">
           <a:solidFill>
             <a:srgbClr val="000000"/>
           </a:solidFill>
-          <a:latin typeface="Calibri"/>
-          <a:ea typeface="Calibri"/>
-          <a:cs typeface="Calibri"/>
-          <a:sym typeface="Calibri"/>
+          <a:latin typeface="Arial"/>
+          <a:ea typeface="Arial"/>
+          <a:cs typeface="Arial"/>
+          <a:sym typeface="Arial"/>
         </a:defRPr>
       </a:lvl1pPr>
       <a:lvl2pPr lvl="1" marR="0" rtl="0" algn="l">
@@ -2888,15 +3394,15 @@
         <a:buClr>
           <a:srgbClr val="000000"/>
         </a:buClr>
-        <a:buFont typeface="Calibri"/>
+        <a:buFont typeface="Arial"/>
         <a:defRPr b="0" i="0" spc="0" sz="1400" u="none" cap="none" strike="noStrike">
           <a:solidFill>
             <a:srgbClr val="000000"/>
           </a:solidFill>
-          <a:latin typeface="Calibri"/>
-          <a:ea typeface="Calibri"/>
-          <a:cs typeface="Calibri"/>
-          <a:sym typeface="Calibri"/>
+          <a:latin typeface="Arial"/>
+          <a:ea typeface="Arial"/>
+          <a:cs typeface="Arial"/>
+          <a:sym typeface="Arial"/>
         </a:defRPr>
       </a:lvl2pPr>
       <a:lvl3pPr lvl="2" marR="0" rtl="0" algn="l">
@@ -2912,15 +3418,15 @@
         <a:buClr>
           <a:srgbClr val="000000"/>
         </a:buClr>
-        <a:buFont typeface="Calibri"/>
+        <a:buFont typeface="Arial"/>
         <a:defRPr b="0" i="0" spc="0" sz="1400" u="none" cap="none" strike="noStrike">
           <a:solidFill>
             <a:srgbClr val="000000"/>
           </a:solidFill>
-          <a:latin typeface="Calibri"/>
-          <a:ea typeface="Calibri"/>
-          <a:cs typeface="Calibri"/>
-          <a:sym typeface="Calibri"/>
+          <a:latin typeface="Arial"/>
+          <a:ea typeface="Arial"/>
+          <a:cs typeface="Arial"/>
+          <a:sym typeface="Arial"/>
         </a:defRPr>
       </a:lvl3pPr>
       <a:lvl4pPr lvl="3" marR="0" rtl="0" algn="l">
@@ -2936,15 +3442,15 @@
         <a:buClr>
           <a:srgbClr val="000000"/>
         </a:buClr>
-        <a:buFont typeface="Calibri"/>
+        <a:buFont typeface="Arial"/>
         <a:defRPr b="0" i="0" spc="0" sz="1400" u="none" cap="none" strike="noStrike">
           <a:solidFill>
             <a:srgbClr val="000000"/>
           </a:solidFill>
-          <a:latin typeface="Calibri"/>
-          <a:ea typeface="Calibri"/>
-          <a:cs typeface="Calibri"/>
-          <a:sym typeface="Calibri"/>
+          <a:latin typeface="Arial"/>
+          <a:ea typeface="Arial"/>
+          <a:cs typeface="Arial"/>
+          <a:sym typeface="Arial"/>
         </a:defRPr>
       </a:lvl4pPr>
       <a:lvl5pPr lvl="4" marR="0" rtl="0" algn="l">
@@ -2960,15 +3466,15 @@
         <a:buClr>
           <a:srgbClr val="000000"/>
         </a:buClr>
-        <a:buFont typeface="Calibri"/>
+        <a:buFont typeface="Arial"/>
         <a:defRPr b="0" i="0" spc="0" sz="1400" u="none" cap="none" strike="noStrike">
           <a:solidFill>
             <a:srgbClr val="000000"/>
           </a:solidFill>
-          <a:latin typeface="Calibri"/>
-          <a:ea typeface="Calibri"/>
-          <a:cs typeface="Calibri"/>
-          <a:sym typeface="Calibri"/>
+          <a:latin typeface="Arial"/>
+          <a:ea typeface="Arial"/>
+          <a:cs typeface="Arial"/>
+          <a:sym typeface="Arial"/>
         </a:defRPr>
       </a:lvl5pPr>
       <a:lvl6pPr lvl="5" marR="0" rtl="0" algn="l">
@@ -2984,15 +3490,15 @@
         <a:buClr>
           <a:srgbClr val="000000"/>
         </a:buClr>
-        <a:buFont typeface="Calibri"/>
+        <a:buFont typeface="Arial"/>
         <a:defRPr b="0" i="0" spc="0" sz="1400" u="none" cap="none" strike="noStrike">
           <a:solidFill>
             <a:srgbClr val="000000"/>
           </a:solidFill>
-          <a:latin typeface="Calibri"/>
-          <a:ea typeface="Calibri"/>
-          <a:cs typeface="Calibri"/>
-          <a:sym typeface="Calibri"/>
+          <a:latin typeface="Arial"/>
+          <a:ea typeface="Arial"/>
+          <a:cs typeface="Arial"/>
+          <a:sym typeface="Arial"/>
         </a:defRPr>
       </a:lvl6pPr>
       <a:lvl7pPr lvl="6" marR="0" rtl="0" algn="l">
@@ -3008,15 +3514,15 @@
         <a:buClr>
           <a:srgbClr val="000000"/>
         </a:buClr>
-        <a:buFont typeface="Calibri"/>
+        <a:buFont typeface="Arial"/>
         <a:defRPr b="0" i="0" spc="0" sz="1400" u="none" cap="none" strike="noStrike">
           <a:solidFill>
             <a:srgbClr val="000000"/>
           </a:solidFill>
-          <a:latin typeface="Calibri"/>
-          <a:ea typeface="Calibri"/>
-          <a:cs typeface="Calibri"/>
-          <a:sym typeface="Calibri"/>
+          <a:latin typeface="Arial"/>
+          <a:ea typeface="Arial"/>
+          <a:cs typeface="Arial"/>
+          <a:sym typeface="Arial"/>
         </a:defRPr>
       </a:lvl7pPr>
       <a:lvl8pPr lvl="7" marR="0" rtl="0" algn="l">
@@ -3032,15 +3538,15 @@
         <a:buClr>
           <a:srgbClr val="000000"/>
         </a:buClr>
-        <a:buFont typeface="Calibri"/>
+        <a:buFont typeface="Arial"/>
         <a:defRPr b="0" i="0" spc="0" sz="1400" u="none" cap="none" strike="noStrike">
           <a:solidFill>
             <a:srgbClr val="000000"/>
           </a:solidFill>
-          <a:latin typeface="Calibri"/>
-          <a:ea typeface="Calibri"/>
-          <a:cs typeface="Calibri"/>
-          <a:sym typeface="Calibri"/>
+          <a:latin typeface="Arial"/>
+          <a:ea typeface="Arial"/>
+          <a:cs typeface="Arial"/>
+          <a:sym typeface="Arial"/>
         </a:defRPr>
       </a:lvl8pPr>
       <a:lvl9pPr lvl="8" marR="0" rtl="0" algn="l">
@@ -3056,15 +3562,15 @@
         <a:buClr>
           <a:srgbClr val="000000"/>
         </a:buClr>
-        <a:buFont typeface="Calibri"/>
+        <a:buFont typeface="Arial"/>
         <a:defRPr b="0" i="0" spc="0" sz="1400" u="none" cap="none" strike="noStrike">
           <a:solidFill>
             <a:srgbClr val="000000"/>
           </a:solidFill>
-          <a:latin typeface="Calibri"/>
-          <a:ea typeface="Calibri"/>
-          <a:cs typeface="Calibri"/>
-          <a:sym typeface="Calibri"/>
+          <a:latin typeface="Arial"/>
+          <a:ea typeface="Arial"/>
+          <a:cs typeface="Arial"/>
+          <a:sym typeface="Arial"/>
         </a:defRPr>
       </a:lvl9pPr>
     </p:otherStyle>
@@ -3072,7 +3578,7 @@
 </p:sldMaster>
 </file>
 
-<file path=ppt/slides/slide9.xml><?xml version="1.0" encoding="utf-8"?>
+<file path=ppt/slides/slide1.xml><?xml version="1.0" encoding="utf-8"?>
 <p:sld xmlns:a="http://schemas.openxmlformats.org/drawingml/2006/main" xmlns:r="http://schemas.openxmlformats.org/officeDocument/2006/relationships" xmlns:mc="http://schemas.openxmlformats.org/markup-compatibility/2006" xmlns:mv="urn:schemas-microsoft-com:mac:vml" xmlns:p="http://schemas.openxmlformats.org/presentationml/2006/main" xmlns:c="http://schemas.openxmlformats.org/drawingml/2006/chart" xmlns:dgm="http://schemas.openxmlformats.org/drawingml/2006/diagram" xmlns:o="urn:schemas-microsoft-com:office:office" xmlns:v="urn:schemas-microsoft-com:vml" xmlns:pvml="urn:schemas-microsoft-com:office:powerpoint" xmlns:com="http://schemas.openxmlformats.org/drawingml/2006/compatibility" xmlns:p14="http://schemas.microsoft.com/office/powerpoint/2010/main" xmlns:p15="http://schemas.microsoft.com/office/powerpoint/2012/main" xmlns:ahyp="http://schemas.microsoft.com/office/drawing/2018/hyperlinkcolor">
   <p:cSld>
     <p:bg>
@@ -3084,7 +3590,7 @@
     </p:bg>
     <p:spTree>
       <p:nvGrpSpPr>
-        <p:cNvPr id="299" name="Shape 299"/>
+        <p:cNvPr id="20" name="Shape 20"/>
         <p:cNvGrpSpPr/>
         <p:nvPr/>
       </p:nvGrpSpPr>
@@ -3098,14 +3604,14 @@
       </p:grpSpPr>
       <p:sp>
         <p:nvSpPr>
-          <p:cNvPr id="300" name="Google Shape;300;p9"/>
+          <p:cNvPr id="21" name="Google Shape;21;h3b1f15762288d989_1_0"/>
           <p:cNvSpPr txBox="1"/>
           <p:nvPr/>
         </p:nvSpPr>
         <p:spPr>
           <a:xfrm>
             <a:off x="804672" y="448056"/>
-            <a:ext cx="10716768" cy="310896"/>
+            <a:ext cx="10716900" cy="215400"/>
           </a:xfrm>
           <a:prstGeom prst="rect">
             <a:avLst/>
@@ -3131,10 +3637,15 @@
               <a:spcAft>
                 <a:spcPts val="0"/>
               </a:spcAft>
+              <a:buClr>
+                <a:srgbClr val="000000"/>
+              </a:buClr>
+              <a:buSzPts val="1400"/>
+              <a:buFont typeface="Arial"/>
               <a:buNone/>
             </a:pPr>
             <a:r>
-              <a:rPr b="1" i="0" lang="en-US" sz="1400">
+              <a:rPr b="1" i="0" lang="en-US" sz="1400" u="none" cap="none" strike="noStrike">
                 <a:solidFill>
                   <a:srgbClr val="0B6E4F"/>
                 </a:solidFill>
@@ -3145,20 +3656,28 @@
               </a:rPr>
               <a:t>STEP 4 / GENERATE</a:t>
             </a:r>
-            <a:endParaRPr/>
+            <a:endParaRPr b="0" i="0" sz="1400" u="none" cap="none" strike="noStrike">
+              <a:solidFill>
+                <a:srgbClr val="000000"/>
+              </a:solidFill>
+              <a:latin typeface="Arial"/>
+              <a:ea typeface="Arial"/>
+              <a:cs typeface="Arial"/>
+              <a:sym typeface="Arial"/>
+            </a:endParaRPr>
           </a:p>
         </p:txBody>
       </p:sp>
       <p:sp>
         <p:nvSpPr>
-          <p:cNvPr id="301" name="Google Shape;301;p9"/>
+          <p:cNvPr id="22" name="Google Shape;22;h3b1f15762288d989_1_0"/>
           <p:cNvSpPr txBox="1"/>
           <p:nvPr/>
         </p:nvSpPr>
         <p:spPr>
           <a:xfrm>
             <a:off x="804672" y="859536"/>
-            <a:ext cx="10716768" cy="694944"/>
+            <a:ext cx="10716900" cy="431100"/>
           </a:xfrm>
           <a:prstGeom prst="rect">
             <a:avLst/>
@@ -3184,34 +3703,47 @@
               <a:spcAft>
                 <a:spcPts val="0"/>
               </a:spcAft>
+              <a:buClr>
+                <a:srgbClr val="000000"/>
+              </a:buClr>
+              <a:buSzPts val="2800"/>
+              <a:buFont typeface="Arial"/>
               <a:buNone/>
             </a:pPr>
             <a:r>
-              <a:rPr b="1" i="0" lang="en-US" sz="2800">
+              <a:rPr b="1" i="0" lang="en-US" sz="2800" u="none" cap="none" strike="noStrike">
                 <a:solidFill>
                   <a:srgbClr val="1F2328"/>
                 </a:solidFill>
                 <a:latin typeface="Cambria"/>
-                <a:ea typeface="Calibri"/>
-                <a:cs typeface="Calibri"/>
-                <a:sym typeface="Calibri"/>
+                <a:ea typeface="Cambria"/>
+                <a:cs typeface="Cambria"/>
+                <a:sym typeface="Cambria"/>
               </a:rPr>
               <a:t>The LLM enriches a schema-grounded draft.</a:t>
             </a:r>
-            <a:endParaRPr/>
+            <a:endParaRPr b="0" i="0" sz="1400" u="none" cap="none" strike="noStrike">
+              <a:solidFill>
+                <a:srgbClr val="000000"/>
+              </a:solidFill>
+              <a:latin typeface="Arial"/>
+              <a:ea typeface="Arial"/>
+              <a:cs typeface="Arial"/>
+              <a:sym typeface="Arial"/>
+            </a:endParaRPr>
           </a:p>
         </p:txBody>
       </p:sp>
       <p:sp>
         <p:nvSpPr>
-          <p:cNvPr id="302" name="Google Shape;302;p9"/>
+          <p:cNvPr id="23" name="Google Shape;23;h3b1f15762288d989_1_0"/>
           <p:cNvSpPr txBox="1"/>
           <p:nvPr/>
         </p:nvSpPr>
         <p:spPr>
           <a:xfrm>
-            <a:off x="804672" y="1609344"/>
-            <a:ext cx="10607040" cy="320040"/>
+            <a:off x="804672" y="1481328"/>
+            <a:ext cx="10607100" cy="246300"/>
           </a:xfrm>
           <a:prstGeom prst="rect">
             <a:avLst/>
@@ -3237,112 +3769,143 @@
               <a:spcAft>
                 <a:spcPts val="0"/>
               </a:spcAft>
+              <a:buClr>
+                <a:srgbClr val="000000"/>
+              </a:buClr>
+              <a:buSzPts val="1600"/>
+              <a:buFont typeface="Arial"/>
               <a:buNone/>
             </a:pPr>
             <a:r>
-              <a:rPr lang="en-US" sz="1600" b="0" i="0" dirty="0">
+              <a:rPr b="0" i="0" lang="en-US" sz="1600" u="none" cap="none" strike="noStrike">
                 <a:solidFill>
                   <a:srgbClr val="3A434C"/>
                 </a:solidFill>
                 <a:latin typeface="Calibri"/>
+                <a:ea typeface="Calibri"/>
                 <a:cs typeface="Calibri"/>
-              </a:rPr>
-              <a:t xml:space="preserve">We prompt the </a:t>
-            </a:r>
-            <a:r>
-              <a:rPr lang="en-US" sz="1600" b="1" i="1" dirty="0">
+                <a:sym typeface="Calibri"/>
+              </a:rPr>
+              <a:t>We prompt the </a:t>
+            </a:r>
+            <a:r>
+              <a:rPr b="1" i="1" lang="en-US" sz="1600" u="none" cap="none" strike="noStrike">
                 <a:solidFill>
                   <a:srgbClr val="3A434C"/>
                 </a:solidFill>
                 <a:latin typeface="Calibri"/>
+                <a:ea typeface="Calibri"/>
                 <a:cs typeface="Calibri"/>
-              </a:rPr>
-              <a:t xml:space="preserve">Gen-LLM</a:t>
-            </a:r>
-            <a:r>
-              <a:rPr lang="en-US" sz="1600" b="0" i="0" dirty="0">
+                <a:sym typeface="Calibri"/>
+              </a:rPr>
+              <a:t>Gen-LLM</a:t>
+            </a:r>
+            <a:r>
+              <a:rPr b="0" i="0" lang="en-US" sz="1600" u="none" cap="none" strike="noStrike">
                 <a:solidFill>
                   <a:srgbClr val="3A434C"/>
                 </a:solidFill>
                 <a:latin typeface="Calibri"/>
+                <a:ea typeface="Calibri"/>
                 <a:cs typeface="Calibri"/>
-              </a:rPr>
-              <a:t xml:space="preserve"> with the </a:t>
-            </a:r>
-            <a:r>
-              <a:rPr lang="en-US" sz="1600" b="1" i="0" dirty="0">
+                <a:sym typeface="Calibri"/>
+              </a:rPr>
+              <a:t> with the </a:t>
+            </a:r>
+            <a:r>
+              <a:rPr b="1" i="0" lang="en-US" sz="1600" u="none" cap="none" strike="noStrike">
                 <a:solidFill>
                   <a:srgbClr val="3A434C"/>
                 </a:solidFill>
                 <a:latin typeface="Calibri"/>
+                <a:ea typeface="Calibri"/>
                 <a:cs typeface="Calibri"/>
-              </a:rPr>
-              <a:t xml:space="preserve">direct mapping</a:t>
-            </a:r>
-            <a:r>
-              <a:rPr lang="en-US" sz="1600" b="0" i="0" dirty="0">
+                <a:sym typeface="Calibri"/>
+              </a:rPr>
+              <a:t>direct mapping</a:t>
+            </a:r>
+            <a:r>
+              <a:rPr b="0" i="0" lang="en-US" sz="1600" u="none" cap="none" strike="noStrike">
                 <a:solidFill>
                   <a:srgbClr val="3A434C"/>
                 </a:solidFill>
                 <a:latin typeface="Calibri"/>
+                <a:ea typeface="Calibri"/>
                 <a:cs typeface="Calibri"/>
-              </a:rPr>
-              <a:t xml:space="preserve">, the </a:t>
-            </a:r>
-            <a:r>
-              <a:rPr lang="en-US" sz="1600" b="1" i="0" dirty="0">
+                <a:sym typeface="Calibri"/>
+              </a:rPr>
+              <a:t>, the </a:t>
+            </a:r>
+            <a:r>
+              <a:rPr b="1" i="0" lang="en-US" sz="1600" u="none" cap="none" strike="noStrike">
                 <a:solidFill>
                   <a:srgbClr val="3A434C"/>
                 </a:solidFill>
                 <a:latin typeface="Calibri"/>
+                <a:ea typeface="Calibri"/>
                 <a:cs typeface="Calibri"/>
-              </a:rPr>
-              <a:t xml:space="preserve">retrieved context</a:t>
-            </a:r>
-            <a:r>
-              <a:rPr lang="en-US" sz="1600" b="0" i="0" dirty="0">
+                <a:sym typeface="Calibri"/>
+              </a:rPr>
+              <a:t>retrieved context</a:t>
+            </a:r>
+            <a:r>
+              <a:rPr b="0" i="0" lang="en-US" sz="1600" u="none" cap="none" strike="noStrike">
                 <a:solidFill>
                   <a:srgbClr val="3A434C"/>
                 </a:solidFill>
                 <a:latin typeface="Calibri"/>
+                <a:ea typeface="Calibri"/>
                 <a:cs typeface="Calibri"/>
-              </a:rPr>
-              <a:t xml:space="preserve">, and </a:t>
-            </a:r>
-            <a:r>
-              <a:rPr lang="en-US" sz="1600" b="1" i="0" dirty="0">
+                <a:sym typeface="Calibri"/>
+              </a:rPr>
+              <a:t>, and </a:t>
+            </a:r>
+            <a:r>
+              <a:rPr b="1" i="0" lang="en-US" sz="1600" u="none" cap="none" strike="noStrike">
                 <a:solidFill>
                   <a:srgbClr val="3A434C"/>
                 </a:solidFill>
                 <a:latin typeface="Calibri"/>
+                <a:ea typeface="Calibri"/>
                 <a:cs typeface="Calibri"/>
-              </a:rPr>
-              <a:t xml:space="preserve">semantic enrichment instructions</a:t>
-            </a:r>
-            <a:r>
-              <a:rPr lang="en-US" sz="1600" b="0" i="0" dirty="0">
+                <a:sym typeface="Calibri"/>
+              </a:rPr>
+              <a:t>semantic enrichment instructions</a:t>
+            </a:r>
+            <a:r>
+              <a:rPr b="0" i="0" lang="en-US" sz="1600" u="none" cap="none" strike="noStrike">
                 <a:solidFill>
                   <a:srgbClr val="3A434C"/>
                 </a:solidFill>
                 <a:latin typeface="Calibri"/>
+                <a:ea typeface="Calibri"/>
                 <a:cs typeface="Calibri"/>
-              </a:rPr>
-              <a:t xml:space="preserve">.</a:t>
-            </a:r>
-            <a:endParaRPr/>
+                <a:sym typeface="Calibri"/>
+              </a:rPr>
+              <a:t>.</a:t>
+            </a:r>
+            <a:endParaRPr b="0" i="0" sz="1400" u="none" cap="none" strike="noStrike">
+              <a:solidFill>
+                <a:srgbClr val="000000"/>
+              </a:solidFill>
+              <a:latin typeface="Arial"/>
+              <a:ea typeface="Arial"/>
+              <a:cs typeface="Arial"/>
+              <a:sym typeface="Arial"/>
+            </a:endParaRPr>
           </a:p>
         </p:txBody>
       </p:sp>
       <p:sp>
         <p:nvSpPr>
-          <p:cNvPr id="322" name="Google Shape;322;p9"/>
+          <p:cNvPr id="24" name="Google Shape;24;h3b1f15762288d989_1_0"/>
           <p:cNvSpPr/>
           <p:nvPr/>
         </p:nvSpPr>
         <p:spPr>
           <a:xfrm>
             <a:off x="804672" y="5797296"/>
-            <a:ext cx="1645920" cy="310896"/>
+            <a:ext cx="1645800" cy="310800"/>
           </a:xfrm>
           <a:prstGeom prst="roundRect">
             <a:avLst>
@@ -3357,7 +3920,7 @@
               <a:srgbClr val="E6F2EC"/>
             </a:solidFill>
             <a:prstDash val="solid"/>
-            <a:miter lim="8000"/>
+            <a:miter lim="80"/>
             <a:headEnd len="sm" w="sm" type="none"/>
             <a:tailEnd len="sm" w="sm" type="none"/>
           </a:ln>
@@ -3369,18 +3932,26 @@
           <a:lstStyle/>
           <a:p>
             <a:pPr indent="0" lvl="0" marL="0" marR="0" rtl="0" algn="ctr">
-              <a:spcBef>
-                <a:spcPts val="0"/>
-              </a:spcBef>
-              <a:spcAft>
-                <a:spcPts val="0"/>
-              </a:spcAft>
+              <a:lnSpc>
+                <a:spcPct val="100000"/>
+              </a:lnSpc>
+              <a:spcBef>
+                <a:spcPts val="0"/>
+              </a:spcBef>
+              <a:spcAft>
+                <a:spcPts val="0"/>
+              </a:spcAft>
+              <a:buClr>
+                <a:srgbClr val="000000"/>
+              </a:buClr>
+              <a:buSzPts val="1800"/>
+              <a:buFont typeface="Arial"/>
               <a:buNone/>
             </a:pPr>
             <a:r>
               <a:t/>
             </a:r>
-            <a:endParaRPr sz="1800">
+            <a:endParaRPr b="0" i="0" sz="1800" u="none" cap="none" strike="noStrike">
               <a:solidFill>
                 <a:schemeClr val="dk1"/>
               </a:solidFill>
@@ -3394,14 +3965,14 @@
       </p:sp>
       <p:sp>
         <p:nvSpPr>
-          <p:cNvPr id="323" name="Google Shape;323;p9"/>
+          <p:cNvPr id="25" name="Google Shape;25;h3b1f15762288d989_1_0"/>
           <p:cNvSpPr txBox="1"/>
           <p:nvPr/>
         </p:nvSpPr>
         <p:spPr>
           <a:xfrm>
             <a:off x="859536" y="5833872"/>
-            <a:ext cx="1527048" cy="246888"/>
+            <a:ext cx="1527000" cy="215400"/>
           </a:xfrm>
           <a:prstGeom prst="rect">
             <a:avLst/>
@@ -3427,10 +3998,15 @@
               <a:spcAft>
                 <a:spcPts val="0"/>
               </a:spcAft>
+              <a:buClr>
+                <a:srgbClr val="000000"/>
+              </a:buClr>
+              <a:buSzPts val="1400"/>
+              <a:buFont typeface="Arial"/>
               <a:buNone/>
             </a:pPr>
             <a:r>
-              <a:rPr b="1" i="0" lang="en-US" sz="1400">
+              <a:rPr b="1" i="0" lang="en-US" sz="1400" u="none" cap="none" strike="noStrike">
                 <a:solidFill>
                   <a:srgbClr val="0B6E4F"/>
                 </a:solidFill>
@@ -3441,20 +4017,28 @@
               </a:rPr>
               <a:t>1  ORDER</a:t>
             </a:r>
-            <a:endParaRPr/>
+            <a:endParaRPr b="0" i="0" sz="1400" u="none" cap="none" strike="noStrike">
+              <a:solidFill>
+                <a:srgbClr val="000000"/>
+              </a:solidFill>
+              <a:latin typeface="Arial"/>
+              <a:ea typeface="Arial"/>
+              <a:cs typeface="Arial"/>
+              <a:sym typeface="Arial"/>
+            </a:endParaRPr>
           </a:p>
         </p:txBody>
       </p:sp>
       <p:sp>
         <p:nvSpPr>
-          <p:cNvPr id="324" name="Google Shape;324;p9"/>
+          <p:cNvPr id="26" name="Google Shape;26;h3b1f15762288d989_1_0"/>
           <p:cNvSpPr/>
           <p:nvPr/>
         </p:nvSpPr>
         <p:spPr>
           <a:xfrm>
             <a:off x="2642615" y="5797296"/>
-            <a:ext cx="1645920" cy="310896"/>
+            <a:ext cx="1645800" cy="310800"/>
           </a:xfrm>
           <a:prstGeom prst="roundRect">
             <a:avLst>
@@ -3469,7 +4053,7 @@
               <a:srgbClr val="E6F2EC"/>
             </a:solidFill>
             <a:prstDash val="solid"/>
-            <a:miter lim="8000"/>
+            <a:miter lim="80"/>
             <a:headEnd len="sm" w="sm" type="none"/>
             <a:tailEnd len="sm" w="sm" type="none"/>
           </a:ln>
@@ -3481,18 +4065,26 @@
           <a:lstStyle/>
           <a:p>
             <a:pPr indent="0" lvl="0" marL="0" marR="0" rtl="0" algn="ctr">
-              <a:spcBef>
-                <a:spcPts val="0"/>
-              </a:spcBef>
-              <a:spcAft>
-                <a:spcPts val="0"/>
-              </a:spcAft>
+              <a:lnSpc>
+                <a:spcPct val="100000"/>
+              </a:lnSpc>
+              <a:spcBef>
+                <a:spcPts val="0"/>
+              </a:spcBef>
+              <a:spcAft>
+                <a:spcPts val="0"/>
+              </a:spcAft>
+              <a:buClr>
+                <a:srgbClr val="000000"/>
+              </a:buClr>
+              <a:buSzPts val="1800"/>
+              <a:buFont typeface="Arial"/>
               <a:buNone/>
             </a:pPr>
             <a:r>
               <a:t/>
             </a:r>
-            <a:endParaRPr sz="1800">
+            <a:endParaRPr b="0" i="0" sz="1800" u="none" cap="none" strike="noStrike">
               <a:solidFill>
                 <a:schemeClr val="dk1"/>
               </a:solidFill>
@@ -3506,14 +4098,14 @@
       </p:sp>
       <p:sp>
         <p:nvSpPr>
-          <p:cNvPr id="325" name="Google Shape;325;p9"/>
+          <p:cNvPr id="27" name="Google Shape;27;h3b1f15762288d989_1_0"/>
           <p:cNvSpPr txBox="1"/>
           <p:nvPr/>
         </p:nvSpPr>
         <p:spPr>
           <a:xfrm>
             <a:off x="2697479" y="5833872"/>
-            <a:ext cx="1527048" cy="246888"/>
+            <a:ext cx="1527000" cy="215400"/>
           </a:xfrm>
           <a:prstGeom prst="rect">
             <a:avLst/>
@@ -3539,10 +4131,15 @@
               <a:spcAft>
                 <a:spcPts val="0"/>
               </a:spcAft>
+              <a:buClr>
+                <a:srgbClr val="000000"/>
+              </a:buClr>
+              <a:buSzPts val="1400"/>
+              <a:buFont typeface="Arial"/>
               <a:buNone/>
             </a:pPr>
             <a:r>
-              <a:rPr b="1" i="0" lang="en-US" sz="1400">
+              <a:rPr b="1" i="0" lang="en-US" sz="1400" u="none" cap="none" strike="noStrike">
                 <a:solidFill>
                   <a:srgbClr val="0B6E4F"/>
                 </a:solidFill>
@@ -3553,20 +4150,28 @@
               </a:rPr>
               <a:t>2  SEED</a:t>
             </a:r>
-            <a:endParaRPr/>
+            <a:endParaRPr b="0" i="0" sz="1400" u="none" cap="none" strike="noStrike">
+              <a:solidFill>
+                <a:srgbClr val="000000"/>
+              </a:solidFill>
+              <a:latin typeface="Arial"/>
+              <a:ea typeface="Arial"/>
+              <a:cs typeface="Arial"/>
+              <a:sym typeface="Arial"/>
+            </a:endParaRPr>
           </a:p>
         </p:txBody>
       </p:sp>
       <p:sp>
         <p:nvSpPr>
-          <p:cNvPr id="326" name="Google Shape;326;p9"/>
+          <p:cNvPr id="28" name="Google Shape;28;h3b1f15762288d989_1_0"/>
           <p:cNvSpPr/>
           <p:nvPr/>
         </p:nvSpPr>
         <p:spPr>
           <a:xfrm>
             <a:off x="4480559" y="5797296"/>
-            <a:ext cx="1645920" cy="310896"/>
+            <a:ext cx="1645800" cy="310800"/>
           </a:xfrm>
           <a:prstGeom prst="roundRect">
             <a:avLst>
@@ -3581,7 +4186,7 @@
               <a:srgbClr val="E6F2EC"/>
             </a:solidFill>
             <a:prstDash val="solid"/>
-            <a:miter lim="8000"/>
+            <a:miter lim="80"/>
             <a:headEnd len="sm" w="sm" type="none"/>
             <a:tailEnd len="sm" w="sm" type="none"/>
           </a:ln>
@@ -3593,18 +4198,26 @@
           <a:lstStyle/>
           <a:p>
             <a:pPr indent="0" lvl="0" marL="0" marR="0" rtl="0" algn="ctr">
-              <a:spcBef>
-                <a:spcPts val="0"/>
-              </a:spcBef>
-              <a:spcAft>
-                <a:spcPts val="0"/>
-              </a:spcAft>
+              <a:lnSpc>
+                <a:spcPct val="100000"/>
+              </a:lnSpc>
+              <a:spcBef>
+                <a:spcPts val="0"/>
+              </a:spcBef>
+              <a:spcAft>
+                <a:spcPts val="0"/>
+              </a:spcAft>
+              <a:buClr>
+                <a:srgbClr val="000000"/>
+              </a:buClr>
+              <a:buSzPts val="1800"/>
+              <a:buFont typeface="Arial"/>
               <a:buNone/>
             </a:pPr>
             <a:r>
               <a:t/>
             </a:r>
-            <a:endParaRPr sz="1800">
+            <a:endParaRPr b="0" i="0" sz="1800" u="none" cap="none" strike="noStrike">
               <a:solidFill>
                 <a:schemeClr val="dk1"/>
               </a:solidFill>
@@ -3618,14 +4231,14 @@
       </p:sp>
       <p:sp>
         <p:nvSpPr>
-          <p:cNvPr id="327" name="Google Shape;327;p9"/>
+          <p:cNvPr id="29" name="Google Shape;29;h3b1f15762288d989_1_0"/>
           <p:cNvSpPr txBox="1"/>
           <p:nvPr/>
         </p:nvSpPr>
         <p:spPr>
           <a:xfrm>
             <a:off x="4535423" y="5833872"/>
-            <a:ext cx="1527048" cy="246888"/>
+            <a:ext cx="1527000" cy="215400"/>
           </a:xfrm>
           <a:prstGeom prst="rect">
             <a:avLst/>
@@ -3651,10 +4264,15 @@
               <a:spcAft>
                 <a:spcPts val="0"/>
               </a:spcAft>
+              <a:buClr>
+                <a:srgbClr val="000000"/>
+              </a:buClr>
+              <a:buSzPts val="1400"/>
+              <a:buFont typeface="Arial"/>
               <a:buNone/>
             </a:pPr>
             <a:r>
-              <a:rPr b="1" i="0" lang="en-US" sz="1400">
+              <a:rPr b="1" i="0" lang="en-US" sz="1400" u="none" cap="none" strike="noStrike">
                 <a:solidFill>
                   <a:srgbClr val="0B6E4F"/>
                 </a:solidFill>
@@ -3665,20 +4283,28 @@
               </a:rPr>
               <a:t>3  RETRIEVE</a:t>
             </a:r>
-            <a:endParaRPr/>
+            <a:endParaRPr b="0" i="0" sz="1400" u="none" cap="none" strike="noStrike">
+              <a:solidFill>
+                <a:srgbClr val="000000"/>
+              </a:solidFill>
+              <a:latin typeface="Arial"/>
+              <a:ea typeface="Arial"/>
+              <a:cs typeface="Arial"/>
+              <a:sym typeface="Arial"/>
+            </a:endParaRPr>
           </a:p>
         </p:txBody>
       </p:sp>
       <p:sp>
         <p:nvSpPr>
-          <p:cNvPr id="328" name="Google Shape;328;p9"/>
+          <p:cNvPr id="30" name="Google Shape;30;h3b1f15762288d989_1_0"/>
           <p:cNvSpPr/>
           <p:nvPr/>
         </p:nvSpPr>
         <p:spPr>
           <a:xfrm>
             <a:off x="6318503" y="5797296"/>
-            <a:ext cx="1645920" cy="310896"/>
+            <a:ext cx="1645800" cy="310800"/>
           </a:xfrm>
           <a:prstGeom prst="roundRect">
             <a:avLst>
@@ -3693,7 +4319,7 @@
               <a:srgbClr val="0B6E4F"/>
             </a:solidFill>
             <a:prstDash val="solid"/>
-            <a:miter lim="8000"/>
+            <a:miter lim="80"/>
             <a:headEnd len="sm" w="sm" type="none"/>
             <a:tailEnd len="sm" w="sm" type="none"/>
           </a:ln>
@@ -3705,18 +4331,26 @@
           <a:lstStyle/>
           <a:p>
             <a:pPr indent="0" lvl="0" marL="0" marR="0" rtl="0" algn="ctr">
-              <a:spcBef>
-                <a:spcPts val="0"/>
-              </a:spcBef>
-              <a:spcAft>
-                <a:spcPts val="0"/>
-              </a:spcAft>
+              <a:lnSpc>
+                <a:spcPct val="100000"/>
+              </a:lnSpc>
+              <a:spcBef>
+                <a:spcPts val="0"/>
+              </a:spcBef>
+              <a:spcAft>
+                <a:spcPts val="0"/>
+              </a:spcAft>
+              <a:buClr>
+                <a:srgbClr val="000000"/>
+              </a:buClr>
+              <a:buSzPts val="1800"/>
+              <a:buFont typeface="Arial"/>
               <a:buNone/>
             </a:pPr>
             <a:r>
               <a:t/>
             </a:r>
-            <a:endParaRPr sz="1800">
+            <a:endParaRPr b="0" i="0" sz="1800" u="none" cap="none" strike="noStrike">
               <a:solidFill>
                 <a:schemeClr val="dk1"/>
               </a:solidFill>
@@ -3730,14 +4364,14 @@
       </p:sp>
       <p:sp>
         <p:nvSpPr>
-          <p:cNvPr id="329" name="Google Shape;329;p9"/>
+          <p:cNvPr id="31" name="Google Shape;31;h3b1f15762288d989_1_0"/>
           <p:cNvSpPr txBox="1"/>
           <p:nvPr/>
         </p:nvSpPr>
         <p:spPr>
           <a:xfrm>
             <a:off x="6373367" y="5833872"/>
-            <a:ext cx="1527048" cy="246888"/>
+            <a:ext cx="1527000" cy="215400"/>
           </a:xfrm>
           <a:prstGeom prst="rect">
             <a:avLst/>
@@ -3763,10 +4397,15 @@
               <a:spcAft>
                 <a:spcPts val="0"/>
               </a:spcAft>
+              <a:buClr>
+                <a:srgbClr val="000000"/>
+              </a:buClr>
+              <a:buSzPts val="1400"/>
+              <a:buFont typeface="Arial"/>
               <a:buNone/>
             </a:pPr>
             <a:r>
-              <a:rPr b="1" i="0" lang="en-US" sz="1400">
+              <a:rPr b="1" i="0" lang="en-US" sz="1400" u="none" cap="none" strike="noStrike">
                 <a:solidFill>
                   <a:srgbClr val="FFFFFF"/>
                 </a:solidFill>
@@ -3777,20 +4416,28 @@
               </a:rPr>
               <a:t>4  GENERATE</a:t>
             </a:r>
-            <a:endParaRPr/>
+            <a:endParaRPr b="0" i="0" sz="1400" u="none" cap="none" strike="noStrike">
+              <a:solidFill>
+                <a:srgbClr val="000000"/>
+              </a:solidFill>
+              <a:latin typeface="Arial"/>
+              <a:ea typeface="Arial"/>
+              <a:cs typeface="Arial"/>
+              <a:sym typeface="Arial"/>
+            </a:endParaRPr>
           </a:p>
         </p:txBody>
       </p:sp>
       <p:sp>
         <p:nvSpPr>
-          <p:cNvPr id="330" name="Google Shape;330;p9"/>
+          <p:cNvPr id="32" name="Google Shape;32;h3b1f15762288d989_1_0"/>
           <p:cNvSpPr/>
           <p:nvPr/>
         </p:nvSpPr>
         <p:spPr>
           <a:xfrm>
             <a:off x="8156448" y="5797296"/>
-            <a:ext cx="1645920" cy="310896"/>
+            <a:ext cx="1645800" cy="310800"/>
           </a:xfrm>
           <a:prstGeom prst="roundRect">
             <a:avLst>
@@ -3805,7 +4452,7 @@
               <a:srgbClr val="D9DEDB"/>
             </a:solidFill>
             <a:prstDash val="solid"/>
-            <a:miter lim="8000"/>
+            <a:miter lim="80"/>
             <a:headEnd len="sm" w="sm" type="none"/>
             <a:tailEnd len="sm" w="sm" type="none"/>
           </a:ln>
@@ -3817,18 +4464,26 @@
           <a:lstStyle/>
           <a:p>
             <a:pPr indent="0" lvl="0" marL="0" marR="0" rtl="0" algn="ctr">
-              <a:spcBef>
-                <a:spcPts val="0"/>
-              </a:spcBef>
-              <a:spcAft>
-                <a:spcPts val="0"/>
-              </a:spcAft>
+              <a:lnSpc>
+                <a:spcPct val="100000"/>
+              </a:lnSpc>
+              <a:spcBef>
+                <a:spcPts val="0"/>
+              </a:spcBef>
+              <a:spcAft>
+                <a:spcPts val="0"/>
+              </a:spcAft>
+              <a:buClr>
+                <a:srgbClr val="000000"/>
+              </a:buClr>
+              <a:buSzPts val="1800"/>
+              <a:buFont typeface="Arial"/>
               <a:buNone/>
             </a:pPr>
             <a:r>
               <a:t/>
             </a:r>
-            <a:endParaRPr sz="1800">
+            <a:endParaRPr b="0" i="0" sz="1800" u="none" cap="none" strike="noStrike">
               <a:solidFill>
                 <a:schemeClr val="dk1"/>
               </a:solidFill>
@@ -3842,14 +4497,14 @@
       </p:sp>
       <p:sp>
         <p:nvSpPr>
-          <p:cNvPr id="331" name="Google Shape;331;p9"/>
+          <p:cNvPr id="33" name="Google Shape;33;h3b1f15762288d989_1_0"/>
           <p:cNvSpPr txBox="1"/>
           <p:nvPr/>
         </p:nvSpPr>
         <p:spPr>
           <a:xfrm>
             <a:off x="8211312" y="5833872"/>
-            <a:ext cx="1527048" cy="246888"/>
+            <a:ext cx="1527000" cy="215400"/>
           </a:xfrm>
           <a:prstGeom prst="rect">
             <a:avLst/>
@@ -3875,10 +4530,15 @@
               <a:spcAft>
                 <a:spcPts val="0"/>
               </a:spcAft>
+              <a:buClr>
+                <a:srgbClr val="000000"/>
+              </a:buClr>
+              <a:buSzPts val="1400"/>
+              <a:buFont typeface="Arial"/>
               <a:buNone/>
             </a:pPr>
             <a:r>
-              <a:rPr b="1" i="0" lang="en-US" sz="1400">
+              <a:rPr b="1" i="0" lang="en-US" sz="1400" u="none" cap="none" strike="noStrike">
                 <a:solidFill>
                   <a:srgbClr val="6B747B"/>
                 </a:solidFill>
@@ -3889,20 +4549,28 @@
               </a:rPr>
               <a:t>5  VALIDATE</a:t>
             </a:r>
-            <a:endParaRPr/>
+            <a:endParaRPr b="0" i="0" sz="1400" u="none" cap="none" strike="noStrike">
+              <a:solidFill>
+                <a:srgbClr val="000000"/>
+              </a:solidFill>
+              <a:latin typeface="Arial"/>
+              <a:ea typeface="Arial"/>
+              <a:cs typeface="Arial"/>
+              <a:sym typeface="Arial"/>
+            </a:endParaRPr>
           </a:p>
         </p:txBody>
       </p:sp>
       <p:sp>
         <p:nvSpPr>
-          <p:cNvPr id="332" name="Google Shape;332;p9"/>
+          <p:cNvPr id="34" name="Google Shape;34;h3b1f15762288d989_1_0"/>
           <p:cNvSpPr/>
           <p:nvPr/>
         </p:nvSpPr>
         <p:spPr>
           <a:xfrm>
             <a:off x="9994392" y="5797296"/>
-            <a:ext cx="1645920" cy="310896"/>
+            <a:ext cx="1645800" cy="310800"/>
           </a:xfrm>
           <a:prstGeom prst="roundRect">
             <a:avLst>
@@ -3917,7 +4585,7 @@
               <a:srgbClr val="D9DEDB"/>
             </a:solidFill>
             <a:prstDash val="solid"/>
-            <a:miter lim="8000"/>
+            <a:miter lim="80"/>
             <a:headEnd len="sm" w="sm" type="none"/>
             <a:tailEnd len="sm" w="sm" type="none"/>
           </a:ln>
@@ -3929,18 +4597,26 @@
           <a:lstStyle/>
           <a:p>
             <a:pPr indent="0" lvl="0" marL="0" marR="0" rtl="0" algn="ctr">
-              <a:spcBef>
-                <a:spcPts val="0"/>
-              </a:spcBef>
-              <a:spcAft>
-                <a:spcPts val="0"/>
-              </a:spcAft>
+              <a:lnSpc>
+                <a:spcPct val="100000"/>
+              </a:lnSpc>
+              <a:spcBef>
+                <a:spcPts val="0"/>
+              </a:spcBef>
+              <a:spcAft>
+                <a:spcPts val="0"/>
+              </a:spcAft>
+              <a:buClr>
+                <a:srgbClr val="000000"/>
+              </a:buClr>
+              <a:buSzPts val="1800"/>
+              <a:buFont typeface="Arial"/>
               <a:buNone/>
             </a:pPr>
             <a:r>
               <a:t/>
             </a:r>
-            <a:endParaRPr sz="1800">
+            <a:endParaRPr b="0" i="0" sz="1800" u="none" cap="none" strike="noStrike">
               <a:solidFill>
                 <a:schemeClr val="dk1"/>
               </a:solidFill>
@@ -3954,14 +4630,14 @@
       </p:sp>
       <p:sp>
         <p:nvSpPr>
-          <p:cNvPr id="333" name="Google Shape;333;p9"/>
+          <p:cNvPr id="35" name="Google Shape;35;h3b1f15762288d989_1_0"/>
           <p:cNvSpPr txBox="1"/>
           <p:nvPr/>
         </p:nvSpPr>
         <p:spPr>
           <a:xfrm>
             <a:off x="10049256" y="5833872"/>
-            <a:ext cx="1527048" cy="246888"/>
+            <a:ext cx="1527000" cy="215400"/>
           </a:xfrm>
           <a:prstGeom prst="rect">
             <a:avLst/>
@@ -3987,10 +4663,15 @@
               <a:spcAft>
                 <a:spcPts val="0"/>
               </a:spcAft>
+              <a:buClr>
+                <a:srgbClr val="000000"/>
+              </a:buClr>
+              <a:buSzPts val="1400"/>
+              <a:buFont typeface="Arial"/>
               <a:buNone/>
             </a:pPr>
             <a:r>
-              <a:rPr b="1" i="0" lang="en-US" sz="1400">
+              <a:rPr b="1" i="0" lang="en-US" sz="1400" u="none" cap="none" strike="noStrike">
                 <a:solidFill>
                   <a:srgbClr val="6B747B"/>
                 </a:solidFill>
@@ -4001,137 +4682,331 @@
               </a:rPr>
               <a:t>6  MERGE</a:t>
             </a:r>
-            <a:endParaRPr/>
+            <a:endParaRPr b="0" i="0" sz="1400" u="none" cap="none" strike="noStrike">
+              <a:solidFill>
+                <a:srgbClr val="000000"/>
+              </a:solidFill>
+              <a:latin typeface="Arial"/>
+              <a:ea typeface="Arial"/>
+              <a:cs typeface="Arial"/>
+              <a:sym typeface="Arial"/>
+            </a:endParaRPr>
           </a:p>
         </p:txBody>
       </p:sp>
       <p:sp>
         <p:nvSpPr>
-          <p:cNvPr id="334" name="Rounded Rectangle 333"/>
+          <p:cNvPr id="36" name="Google Shape;36;h3b1f15762288d989_1_0"/>
           <p:cNvSpPr/>
           <p:nvPr/>
         </p:nvSpPr>
         <p:spPr>
           <a:xfrm>
-            <a:off x="795528" y="2148840"/>
-            <a:ext cx="2971800" cy="3465576"/>
+            <a:off x="505750" y="1847088"/>
+            <a:ext cx="3241800" cy="3749039"/>
           </a:xfrm>
           <a:prstGeom prst="roundRect">
-            <a:avLst/>
+            <a:avLst>
+              <a:gd fmla="val 9800" name="adj"/>
+            </a:avLst>
           </a:prstGeom>
           <a:solidFill>
             <a:srgbClr val="FFFFFF"/>
           </a:solidFill>
-          <a:ln w="13970">
+          <a:ln cap="flat" cmpd="sng" w="13950">
             <a:solidFill>
               <a:srgbClr val="D9DEDB"/>
             </a:solidFill>
+            <a:prstDash val="solid"/>
+            <a:round/>
+            <a:headEnd len="sm" w="sm" type="none"/>
+            <a:tailEnd len="sm" w="sm" type="none"/>
           </a:ln>
-        </p:spPr>
-        <p:style>
-          <a:lnRef idx="1">
-            <a:schemeClr val="accent1"/>
-          </a:lnRef>
-          <a:fillRef idx="3">
-            <a:schemeClr val="accent1"/>
-          </a:fillRef>
-          <a:effectRef idx="2">
-            <a:schemeClr val="accent1"/>
-          </a:effectRef>
-          <a:fontRef idx="minor">
-            <a:schemeClr val="lt1"/>
-          </a:fontRef>
-        </p:style>
-        <p:txBody>
-          <a:bodyPr rtlCol="0" anchor="ctr"/>
+          <a:effectLst>
+            <a:outerShdw blurRad="40000" rotWithShape="0" dir="5400000" dist="23000">
+              <a:srgbClr val="000000">
+                <a:alpha val="34900"/>
+              </a:srgbClr>
+            </a:outerShdw>
+          </a:effectLst>
+        </p:spPr>
+        <p:txBody>
+          <a:bodyPr anchorCtr="0" anchor="ctr" bIns="45700" lIns="91425" spcFirstLastPara="1" rIns="91425" wrap="square" tIns="45700">
+            <a:noAutofit/>
+          </a:bodyPr>
           <a:lstStyle/>
           <a:p>
-            <a:pPr algn="ctr"/>
+            <a:pPr indent="0" lvl="0" marL="0" marR="0" rtl="0" algn="ctr">
+              <a:lnSpc>
+                <a:spcPct val="100000"/>
+              </a:lnSpc>
+              <a:spcBef>
+                <a:spcPts val="0"/>
+              </a:spcBef>
+              <a:spcAft>
+                <a:spcPts val="0"/>
+              </a:spcAft>
+              <a:buNone/>
+            </a:pPr>
+            <a:r>
+              <a:t/>
+            </a:r>
+            <a:endParaRPr b="0" i="0" sz="1400" u="none" cap="none" strike="noStrike">
+              <a:solidFill>
+                <a:srgbClr val="000000"/>
+              </a:solidFill>
+              <a:latin typeface="Arial"/>
+              <a:ea typeface="Arial"/>
+              <a:cs typeface="Arial"/>
+              <a:sym typeface="Arial"/>
+            </a:endParaRPr>
           </a:p>
         </p:txBody>
       </p:sp>
       <p:sp>
         <p:nvSpPr>
-          <p:cNvPr id="335" name="TextBox 334"/>
+          <p:cNvPr id="37" name="Google Shape;37;h3b1f15762288d989_1_0"/>
           <p:cNvSpPr txBox="1"/>
           <p:nvPr/>
         </p:nvSpPr>
         <p:spPr>
           <a:xfrm>
-            <a:off x="1005840" y="2313432"/>
-            <a:ext cx="2468880" cy="310896"/>
+            <a:off x="716065" y="1965960"/>
+            <a:ext cx="2876040" cy="231000"/>
           </a:xfrm>
           <a:prstGeom prst="rect">
             <a:avLst/>
           </a:prstGeom>
           <a:noFill/>
-        </p:spPr>
-        <p:txBody>
-          <a:bodyPr wrap="square" lIns="0" rIns="0" tIns="0" bIns="0" anchor="ctr">
+          <a:ln>
+            <a:noFill/>
+          </a:ln>
+        </p:spPr>
+        <p:txBody>
+          <a:bodyPr anchorCtr="0" anchor="ctr" bIns="0" lIns="0" spcFirstLastPara="1" rIns="0" wrap="square" tIns="0">
             <a:spAutoFit/>
           </a:bodyPr>
           <a:lstStyle/>
           <a:p>
-            <a:r>
-              <a:rPr sz="1500" b="1">
+            <a:pPr indent="0" lvl="0" marL="0" marR="0" rtl="0" algn="l">
+              <a:lnSpc>
+                <a:spcPct val="100000"/>
+              </a:lnSpc>
+              <a:spcBef>
+                <a:spcPts val="0"/>
+              </a:spcBef>
+              <a:spcAft>
+                <a:spcPts val="0"/>
+              </a:spcAft>
+              <a:buNone/>
+            </a:pPr>
+            <a:r>
+              <a:rPr b="1" i="0" lang="en-US" sz="1500" u="none" cap="none" strike="noStrike">
                 <a:solidFill>
                   <a:srgbClr val="3A434C"/>
                 </a:solidFill>
                 <a:latin typeface="Consolas"/>
-              </a:rPr>
-              <a:t>BEFORE</a:t>
-            </a:r>
+                <a:ea typeface="Consolas"/>
+                <a:cs typeface="Consolas"/>
+                <a:sym typeface="Consolas"/>
+              </a:rPr>
+              <a:t>BEFORE  /  DIRECT MAPPING</a:t>
+            </a:r>
+            <a:endParaRPr/>
           </a:p>
         </p:txBody>
       </p:sp>
       <p:sp>
         <p:nvSpPr>
-          <p:cNvPr id="340" name="TextBox 339"/>
+          <p:cNvPr id="38" name="Google Shape;38;h3b1f15762288d989_1_0"/>
           <p:cNvSpPr txBox="1"/>
           <p:nvPr/>
         </p:nvSpPr>
         <p:spPr>
           <a:xfrm>
-            <a:off x="1005840" y="4315968"/>
-            <a:ext cx="2560320" cy="393192"/>
+            <a:off x="3858768" y="3831336"/>
+            <a:ext cx="832200" cy="184800"/>
           </a:xfrm>
           <a:prstGeom prst="rect">
             <a:avLst/>
           </a:prstGeom>
           <a:noFill/>
-        </p:spPr>
-        <p:txBody>
-          <a:bodyPr wrap="square" lIns="0" rIns="0" tIns="0" bIns="0" anchor="ctr">
+          <a:ln>
+            <a:noFill/>
+          </a:ln>
+        </p:spPr>
+        <p:txBody>
+          <a:bodyPr anchorCtr="0" anchor="ctr" bIns="0" lIns="0" spcFirstLastPara="1" rIns="0" wrap="square" tIns="0">
             <a:spAutoFit/>
           </a:bodyPr>
           <a:lstStyle/>
           <a:p>
-            <a:r>
-              <a:rPr sz="1300" b="0">
-                <a:solidFill>
-                  <a:srgbClr val="3A434C"/>
-                </a:solidFill>
-                <a:latin typeface="Calibri"/>
-              </a:rPr>
-              <a:t>Structure only.
-Meaning remains implicit.</a:t>
-            </a:r>
+            <a:pPr indent="0" lvl="0" marL="0" marR="0" rtl="0" algn="ctr">
+              <a:lnSpc>
+                <a:spcPct val="100000"/>
+              </a:lnSpc>
+              <a:spcBef>
+                <a:spcPts val="0"/>
+              </a:spcBef>
+              <a:spcAft>
+                <a:spcPts val="0"/>
+              </a:spcAft>
+              <a:buNone/>
+            </a:pPr>
+            <a:r>
+              <a:rPr b="1" i="0" lang="en-US" sz="1200" u="none" cap="none" strike="noStrike">
+                <a:solidFill>
+                  <a:srgbClr val="0B6E4F"/>
+                </a:solidFill>
+                <a:latin typeface="Consolas"/>
+                <a:ea typeface="Consolas"/>
+                <a:cs typeface="Consolas"/>
+                <a:sym typeface="Consolas"/>
+              </a:rPr>
+              <a:t>Gen-LLM</a:t>
+            </a:r>
+            <a:endParaRPr/>
           </a:p>
         </p:txBody>
       </p:sp>
       <p:sp>
         <p:nvSpPr>
-          <p:cNvPr id="341" name="Chevron 340"/>
+          <p:cNvPr id="39" name="Google Shape;39;h3b1f15762288d989_1_0"/>
           <p:cNvSpPr/>
           <p:nvPr/>
         </p:nvSpPr>
         <p:spPr>
           <a:xfrm>
-            <a:off x="3968496" y="3447288"/>
-            <a:ext cx="603504" cy="429768"/>
-          </a:xfrm>
-          <a:prstGeom prst="chevron">
+            <a:off x="4736600" y="1847088"/>
+            <a:ext cx="6785100" cy="3749039"/>
+          </a:xfrm>
+          <a:prstGeom prst="roundRect">
+            <a:avLst>
+              <a:gd fmla="val 7282" name="adj"/>
+            </a:avLst>
+          </a:prstGeom>
+          <a:solidFill>
+            <a:srgbClr val="F3F5F4"/>
+          </a:solidFill>
+          <a:ln cap="flat" cmpd="sng" w="13950">
+            <a:solidFill>
+              <a:srgbClr val="3A7D8C"/>
+            </a:solidFill>
+            <a:prstDash val="solid"/>
+            <a:round/>
+            <a:headEnd len="sm" w="sm" type="none"/>
+            <a:tailEnd len="sm" w="sm" type="none"/>
+          </a:ln>
+          <a:effectLst>
+            <a:outerShdw blurRad="40000" rotWithShape="0" dir="5400000" dist="23000">
+              <a:srgbClr val="000000">
+                <a:alpha val="34900"/>
+              </a:srgbClr>
+            </a:outerShdw>
+          </a:effectLst>
+        </p:spPr>
+        <p:txBody>
+          <a:bodyPr anchorCtr="0" anchor="ctr" bIns="45700" lIns="91425" spcFirstLastPara="1" rIns="91425" wrap="square" tIns="45700">
+            <a:noAutofit/>
+          </a:bodyPr>
+          <a:lstStyle/>
+          <a:p>
+            <a:pPr indent="0" lvl="0" marL="0" marR="0" rtl="0" algn="ctr">
+              <a:lnSpc>
+                <a:spcPct val="100000"/>
+              </a:lnSpc>
+              <a:spcBef>
+                <a:spcPts val="0"/>
+              </a:spcBef>
+              <a:spcAft>
+                <a:spcPts val="0"/>
+              </a:spcAft>
+              <a:buNone/>
+            </a:pPr>
+            <a:r>
+              <a:t/>
+            </a:r>
+            <a:endParaRPr b="0" i="0" sz="1400" u="none" cap="none" strike="noStrike">
+              <a:solidFill>
+                <a:srgbClr val="000000"/>
+              </a:solidFill>
+              <a:latin typeface="Arial"/>
+              <a:ea typeface="Arial"/>
+              <a:cs typeface="Arial"/>
+              <a:sym typeface="Arial"/>
+            </a:endParaRPr>
+          </a:p>
+        </p:txBody>
+      </p:sp>
+      <p:sp>
+        <p:nvSpPr>
+          <p:cNvPr id="40" name="Google Shape;40;h3b1f15762288d989_1_0"/>
+          <p:cNvSpPr txBox="1"/>
+          <p:nvPr/>
+        </p:nvSpPr>
+        <p:spPr>
+          <a:xfrm>
+            <a:off x="5079717" y="1965960"/>
+            <a:ext cx="6016800" cy="223200"/>
+          </a:xfrm>
+          <a:prstGeom prst="rect">
             <a:avLst/>
+          </a:prstGeom>
+          <a:noFill/>
+          <a:ln>
+            <a:noFill/>
+          </a:ln>
+        </p:spPr>
+        <p:txBody>
+          <a:bodyPr anchorCtr="0" anchor="ctr" bIns="0" lIns="0" spcFirstLastPara="1" rIns="0" wrap="square" tIns="0">
+            <a:spAutoFit/>
+          </a:bodyPr>
+          <a:lstStyle/>
+          <a:p>
+            <a:pPr indent="0" lvl="0" marL="0" marR="0" rtl="0" algn="l">
+              <a:lnSpc>
+                <a:spcPct val="100000"/>
+              </a:lnSpc>
+              <a:spcBef>
+                <a:spcPts val="0"/>
+              </a:spcBef>
+              <a:spcAft>
+                <a:spcPts val="0"/>
+              </a:spcAft>
+              <a:buNone/>
+            </a:pPr>
+            <a:r>
+              <a:rPr b="1" i="0" lang="en-US" sz="1450" u="none" cap="none" strike="noStrike">
+                <a:solidFill>
+                  <a:srgbClr val="2F6B78"/>
+                </a:solidFill>
+                <a:latin typeface="Consolas"/>
+                <a:ea typeface="Consolas"/>
+                <a:cs typeface="Consolas"/>
+                <a:sym typeface="Consolas"/>
+              </a:rPr>
+              <a:t>AFTER  /  ENRICHED ΔOᵣ (delta ontology)</a:t>
+            </a:r>
+            <a:endParaRPr/>
+          </a:p>
+        </p:txBody>
+      </p:sp>
+      <p:sp>
+        <p:nvSpPr>
+          <p:cNvPr id="61" name="Google Shape;61;h3b1f15762288d989_1_0"/>
+          <p:cNvSpPr/>
+          <p:nvPr/>
+        </p:nvSpPr>
+        <p:spPr>
+          <a:xfrm>
+            <a:off x="4037163" y="3419856"/>
+            <a:ext cx="429600" cy="384000"/>
+          </a:xfrm>
+          <a:prstGeom prst="rightArrow">
+            <a:avLst>
+              <a:gd fmla="val 50000" name="adj1"/>
+              <a:gd fmla="val 50000" name="adj2"/>
+            </a:avLst>
           </a:prstGeom>
           <a:solidFill>
             <a:srgbClr val="0B6E4F"/>
@@ -4140,164 +5015,53 @@
             <a:noFill/>
           </a:ln>
         </p:spPr>
-        <p:style>
-          <a:lnRef idx="1">
-            <a:schemeClr val="accent1"/>
-          </a:lnRef>
-          <a:fillRef idx="3">
-            <a:schemeClr val="accent1"/>
-          </a:fillRef>
-          <a:effectRef idx="2">
-            <a:schemeClr val="accent1"/>
-          </a:effectRef>
-          <a:fontRef idx="minor">
-            <a:schemeClr val="lt1"/>
-          </a:fontRef>
-        </p:style>
-        <p:txBody>
-          <a:bodyPr rtlCol="0" anchor="ctr"/>
+        <p:txBody>
+          <a:bodyPr anchorCtr="0" anchor="t" bIns="0" lIns="0" spcFirstLastPara="1" rIns="0" wrap="square" tIns="0">
+            <a:noAutofit/>
+          </a:bodyPr>
           <a:lstStyle/>
           <a:p>
-            <a:pPr algn="ctr"/>
+            <a:pPr indent="0" lvl="0" marL="0" marR="0" rtl="0" algn="l">
+              <a:lnSpc>
+                <a:spcPct val="100000"/>
+              </a:lnSpc>
+              <a:spcBef>
+                <a:spcPts val="0"/>
+              </a:spcBef>
+              <a:spcAft>
+                <a:spcPts val="0"/>
+              </a:spcAft>
+              <a:buNone/>
+            </a:pPr>
+            <a:r>
+              <a:t/>
+            </a:r>
+            <a:endParaRPr b="0" i="0" sz="1400" u="none" cap="none" strike="noStrike">
+              <a:solidFill>
+                <a:srgbClr val="000000"/>
+              </a:solidFill>
+              <a:latin typeface="Arial"/>
+              <a:ea typeface="Arial"/>
+              <a:cs typeface="Arial"/>
+              <a:sym typeface="Arial"/>
+            </a:endParaRPr>
           </a:p>
         </p:txBody>
       </p:sp>
       <p:sp>
         <p:nvSpPr>
-          <p:cNvPr id="342" name="TextBox 341"/>
-          <p:cNvSpPr txBox="1"/>
-          <p:nvPr/>
-        </p:nvSpPr>
-        <p:spPr>
-          <a:xfrm>
-            <a:off x="3858768" y="3913632"/>
-            <a:ext cx="832104" cy="320040"/>
-          </a:xfrm>
-          <a:prstGeom prst="rect">
-            <a:avLst/>
-          </a:prstGeom>
-          <a:noFill/>
-        </p:spPr>
-        <p:txBody>
-          <a:bodyPr wrap="square" lIns="0" rIns="0" tIns="0" bIns="0" anchor="ctr">
-            <a:spAutoFit/>
-          </a:bodyPr>
-          <a:lstStyle/>
-          <a:p>
-            <a:pPr algn="ctr"/>
-            <a:r>
-              <a:rPr sz="1200" b="1">
-                <a:solidFill>
-                  <a:srgbClr val="0B6E4F"/>
-                </a:solidFill>
-                <a:latin typeface="Consolas"/>
-              </a:rPr>
-              <a:t>Gen-LLM</a:t>
-            </a:r>
-          </a:p>
-        </p:txBody>
-      </p:sp>
-      <p:sp>
-        <p:nvSpPr>
-          <p:cNvPr id="343" name="Rounded Rectangle 342"/>
+          <p:cNvPr id="62" name="Code panel"/>
           <p:cNvSpPr/>
           <p:nvPr/>
         </p:nvSpPr>
         <p:spPr>
           <a:xfrm>
-            <a:off x="4736592" y="2148840"/>
-            <a:ext cx="6565392" cy="3465576"/>
-          </a:xfrm>
-          <a:prstGeom prst="roundRect">
-            <a:avLst/>
-          </a:prstGeom>
-          <a:solidFill>
-            <a:srgbClr val="F3F5F4"/>
-          </a:solidFill>
-          <a:ln w="13970">
-            <a:solidFill>
-              <a:srgbClr val="3A7D8C"/>
-            </a:solidFill>
-          </a:ln>
-        </p:spPr>
-        <p:style>
-          <a:lnRef idx="1">
-            <a:schemeClr val="accent1"/>
-          </a:lnRef>
-          <a:fillRef idx="3">
-            <a:schemeClr val="accent1"/>
-          </a:fillRef>
-          <a:effectRef idx="2">
-            <a:schemeClr val="accent1"/>
-          </a:effectRef>
-          <a:fontRef idx="minor">
-            <a:schemeClr val="lt1"/>
-          </a:fontRef>
-        </p:style>
-        <p:txBody>
-          <a:bodyPr rtlCol="0" anchor="ctr"/>
-          <a:lstStyle/>
-          <a:p>
-            <a:pPr algn="ctr"/>
-          </a:p>
-        </p:txBody>
-      </p:sp>
-      <p:sp>
-        <p:nvSpPr>
-          <p:cNvPr id="364" name="TextBox 363"/>
-          <p:cNvSpPr txBox="1"/>
-          <p:nvPr/>
-        </p:nvSpPr>
-        <p:spPr>
-          <a:xfrm>
-            <a:off x="4946904" y="2313432"/>
-            <a:ext cx="6016752" cy="274320"/>
-          </a:xfrm>
-          <a:prstGeom prst="rect">
-            <a:avLst/>
-          </a:prstGeom>
-          <a:noFill/>
-        </p:spPr>
-        <p:txBody>
-          <a:bodyPr wrap="square" lIns="0" rIns="0" tIns="0" bIns="0" anchor="ctr">
-            <a:spAutoFit/>
-          </a:bodyPr>
-          <a:lstStyle/>
-          <a:p>
-            <a:pPr algn="l">
-              <a:spcBef>
-                <a:spcPts val="0"/>
-              </a:spcBef>
-              <a:spcAft>
-                <a:spcPts val="0"/>
-              </a:spcAft>
-            </a:pPr>
-            <a:r>
-              <a:rPr sz="1450" b="1">
-                <a:solidFill>
-                  <a:srgbClr val="2F6B78"/>
-                </a:solidFill>
-                <a:latin typeface="Consolas"/>
-              </a:rPr>
-              <a:t>AFTER  /  ENRICHED ΔOᵣ</a:t>
-            </a:r>
-          </a:p>
-        </p:txBody>
-      </p:sp>
-      <p:sp>
-        <p:nvSpPr>
-          <p:cNvPr id="385" name="Code 385" descr="OWL Manchester Syntax excerpt"/>
-          <p:cNvSpPr txBox="1"/>
-          <p:nvPr/>
-        </p:nvSpPr>
-        <p:spPr>
-          <a:xfrm>
-            <a:off x="950976" y="3017520"/>
-            <a:ext cx="2670048" cy="1097280"/>
+            <a:off x="652054" y="2249424"/>
+            <a:ext cx="2949192" cy="3236976"/>
           </a:xfrm>
           <a:prstGeom prst="roundRect">
             <a:avLst>
-              <a:gd name="adj" fmla="val 5000"/>
+              <a:gd name="adj" fmla="val 9000"/>
             </a:avLst>
           </a:prstGeom>
           <a:solidFill>
@@ -4310,327 +5074,25 @@
           </a:ln>
         </p:spPr>
         <p:txBody>
-          <a:bodyPr wrap="none" lIns="73152" tIns="73152" rIns="73152" bIns="54864" anchor="t">
+          <a:bodyPr wrap="square" lIns="0" tIns="0" rIns="0" bIns="0" anchor="ctr">
             <a:noAutofit/>
           </a:bodyPr>
           <a:lstStyle/>
           <a:p>
-            <a:pPr>
-              <a:lnSpc>
-                <a:spcPts val="1350"/>
-              </a:lnSpc>
-              <a:spcBef>
-                <a:spcPts val="0"/>
-              </a:spcBef>
-            </a:pPr>
-            <a:r>
-              <a:rPr lang="en-US" sz="1100" b="1" i="0" dirty="0">
-                <a:solidFill>
-                  <a:srgbClr val="0B6E4F"/>
-                </a:solidFill>
-                <a:latin typeface="Consolas"/>
-                <a:cs typeface="Consolas"/>
-              </a:rPr>
-              <a:t xml:space="preserve">Class:</a:t>
-            </a:r>
-            <a:r>
-              <a:rPr lang="en-US" sz="1100" b="0" i="0" dirty="0">
-                <a:solidFill>
-                  <a:srgbClr val="1F2328"/>
-                </a:solidFill>
-                <a:latin typeface="Consolas"/>
-                <a:cs typeface="Consolas"/>
-              </a:rPr>
-              <a:t xml:space="preserve"> </a:t>
-            </a:r>
-            <a:r>
-              <a:rPr lang="en-US" sz="1100" b="0" i="0" dirty="0">
-                <a:solidFill>
-                  <a:srgbClr val="1F2328"/>
-                </a:solidFill>
-                <a:latin typeface="Consolas"/>
-                <a:cs typeface="Consolas"/>
-              </a:rPr>
-              <a:t xml:space="preserve">Admission</a:t>
-            </a:r>
-            <a:endParaRPr lang="en-US" sz="1100"/>
+            <a:endParaRPr lang="en-US"/>
           </a:p>
-          <a:p>
-            <a:pPr>
-              <a:lnSpc>
-                <a:spcPts val="1350"/>
-              </a:lnSpc>
-              <a:spcBef>
-                <a:spcPts val="0"/>
-              </a:spcBef>
-            </a:pPr>
-            <a:r>
-              <a:rPr lang="en-US" sz="1100" b="0" i="0" dirty="0">
-                <a:solidFill>
-                  <a:srgbClr val="1F2328"/>
-                </a:solidFill>
-                <a:latin typeface="Consolas"/>
-                <a:cs typeface="Consolas"/>
-              </a:rPr>
-              <a:t xml:space="preserve">  </a:t>
-            </a:r>
-            <a:r>
-              <a:rPr lang="en-US" sz="1100" b="1" i="0" dirty="0">
-                <a:solidFill>
-                  <a:srgbClr val="0B6E4F"/>
-                </a:solidFill>
-                <a:latin typeface="Consolas"/>
-                <a:cs typeface="Consolas"/>
-              </a:rPr>
-              <a:t xml:space="preserve">SubClassOf:</a:t>
-            </a:r>
-            <a:endParaRPr lang="en-US" sz="1100"/>
-          </a:p>
-          <a:p>
-            <a:pPr>
-              <a:lnSpc>
-                <a:spcPts val="1350"/>
-              </a:lnSpc>
-              <a:spcBef>
-                <a:spcPts val="0"/>
-              </a:spcBef>
-            </a:pPr>
-            <a:r>
-              <a:rPr lang="en-US" sz="1100" b="0" i="0" dirty="0">
-                <a:solidFill>
-                  <a:srgbClr val="1F2328"/>
-                </a:solidFill>
-                <a:latin typeface="Consolas"/>
-                <a:cs typeface="Consolas"/>
-              </a:rPr>
-              <a:t xml:space="preserve">    </a:t>
-            </a:r>
-            <a:r>
-              <a:rPr lang="en-US" sz="1100" b="0" i="0" dirty="0">
-                <a:solidFill>
-                  <a:srgbClr val="1F2328"/>
-                </a:solidFill>
-                <a:latin typeface="Consolas"/>
-                <a:cs typeface="Consolas"/>
-              </a:rPr>
-              <a:t xml:space="preserve">patient_id</a:t>
-            </a:r>
-            <a:r>
-              <a:rPr lang="en-US" sz="1100" b="0" i="0" dirty="0">
-                <a:solidFill>
-                  <a:srgbClr val="1F2328"/>
-                </a:solidFill>
-                <a:latin typeface="Consolas"/>
-                <a:cs typeface="Consolas"/>
-              </a:rPr>
-              <a:t xml:space="preserve"> </a:t>
-            </a:r>
-            <a:r>
-              <a:rPr lang="en-US" sz="1100" b="1" i="0" dirty="0">
-                <a:solidFill>
-                  <a:srgbClr val="0B6E4F"/>
-                </a:solidFill>
-                <a:latin typeface="Consolas"/>
-                <a:cs typeface="Consolas"/>
-              </a:rPr>
-              <a:t xml:space="preserve">some</a:t>
-            </a:r>
-            <a:r>
-              <a:rPr lang="en-US" sz="1100" b="0" i="0" dirty="0">
-                <a:solidFill>
-                  <a:srgbClr val="1F2328"/>
-                </a:solidFill>
-                <a:latin typeface="Consolas"/>
-                <a:cs typeface="Consolas"/>
-              </a:rPr>
-              <a:t xml:space="preserve"> </a:t>
-            </a:r>
-            <a:r>
-              <a:rPr lang="en-US" sz="1100" b="0" i="0" dirty="0">
-                <a:solidFill>
-                  <a:srgbClr val="1F2328"/>
-                </a:solidFill>
-                <a:latin typeface="Consolas"/>
-                <a:cs typeface="Consolas"/>
-              </a:rPr>
-              <a:t xml:space="preserve">PatientData</a:t>
-            </a:r>
-            <a:r>
-              <a:rPr lang="en-US" sz="1100" b="0" i="0" dirty="0">
-                <a:solidFill>
-                  <a:srgbClr val="1F2328"/>
-                </a:solidFill>
-                <a:latin typeface="Consolas"/>
-                <a:cs typeface="Consolas"/>
-              </a:rPr>
-              <a:t xml:space="preserve">,</a:t>
-            </a:r>
-            <a:endParaRPr lang="en-US" sz="1100"/>
-          </a:p>
-          <a:p>
-            <a:pPr>
-              <a:lnSpc>
-                <a:spcPts val="1350"/>
-              </a:lnSpc>
-              <a:spcBef>
-                <a:spcPts val="0"/>
-              </a:spcBef>
-            </a:pPr>
-            <a:r>
-              <a:rPr lang="en-US" sz="1100" b="0" i="0" dirty="0">
-                <a:solidFill>
-                  <a:srgbClr val="1F2328"/>
-                </a:solidFill>
-                <a:latin typeface="Consolas"/>
-                <a:cs typeface="Consolas"/>
-              </a:rPr>
-              <a:t xml:space="preserve">    </a:t>
-            </a:r>
-            <a:r>
-              <a:rPr lang="en-US" sz="1100" b="0" i="0" dirty="0">
-                <a:solidFill>
-                  <a:srgbClr val="1F2328"/>
-                </a:solidFill>
-                <a:latin typeface="Consolas"/>
-                <a:cs typeface="Consolas"/>
-              </a:rPr>
-              <a:t xml:space="preserve">BM_DEP</a:t>
-            </a:r>
-            <a:r>
-              <a:rPr lang="en-US" sz="1100" b="0" i="0" dirty="0">
-                <a:solidFill>
-                  <a:srgbClr val="1F2328"/>
-                </a:solidFill>
-                <a:latin typeface="Consolas"/>
-                <a:cs typeface="Consolas"/>
-              </a:rPr>
-              <a:t xml:space="preserve"> </a:t>
-            </a:r>
-            <a:r>
-              <a:rPr lang="en-US" sz="1100" b="1" i="0" dirty="0">
-                <a:solidFill>
-                  <a:srgbClr val="0B6E4F"/>
-                </a:solidFill>
-                <a:latin typeface="Consolas"/>
-                <a:cs typeface="Consolas"/>
-              </a:rPr>
-              <a:t xml:space="preserve">only</a:t>
-            </a:r>
-            <a:r>
-              <a:rPr lang="en-US" sz="1100" b="0" i="0" dirty="0">
-                <a:solidFill>
-                  <a:srgbClr val="1F2328"/>
-                </a:solidFill>
-                <a:latin typeface="Consolas"/>
-                <a:cs typeface="Consolas"/>
-              </a:rPr>
-              <a:t xml:space="preserve"> </a:t>
-            </a:r>
-            <a:r>
-              <a:rPr lang="en-US" sz="1100" b="0" i="0" dirty="0">
-                <a:solidFill>
-                  <a:srgbClr val="6F42C1"/>
-                </a:solidFill>
-                <a:latin typeface="Consolas"/>
-                <a:cs typeface="Consolas"/>
-              </a:rPr>
-              <a:t xml:space="preserve">xsd:integer</a:t>
-            </a:r>
-            <a:r>
-              <a:rPr lang="en-US" sz="1100" b="0" i="0" dirty="0">
-                <a:solidFill>
-                  <a:srgbClr val="1F2328"/>
-                </a:solidFill>
-                <a:latin typeface="Consolas"/>
-                <a:cs typeface="Consolas"/>
-              </a:rPr>
-              <a:t xml:space="preserve">,</a:t>
-            </a:r>
-            <a:endParaRPr lang="en-US" sz="1100"/>
-          </a:p>
-          <a:p>
-            <a:pPr>
-              <a:lnSpc>
-                <a:spcPts val="1350"/>
-              </a:lnSpc>
-              <a:spcBef>
-                <a:spcPts val="0"/>
-              </a:spcBef>
-            </a:pPr>
-            <a:r>
-              <a:rPr lang="en-US" sz="1100" b="0" i="0" dirty="0">
-                <a:solidFill>
-                  <a:srgbClr val="1F2328"/>
-                </a:solidFill>
-                <a:latin typeface="Consolas"/>
-                <a:cs typeface="Consolas"/>
-              </a:rPr>
-              <a:t xml:space="preserve">    </a:t>
-            </a:r>
-            <a:r>
-              <a:rPr lang="en-US" sz="1100" b="0" i="0" dirty="0">
-                <a:solidFill>
-                  <a:srgbClr val="1F2328"/>
-                </a:solidFill>
-                <a:latin typeface="Consolas"/>
-                <a:cs typeface="Consolas"/>
-              </a:rPr>
-              <a:t xml:space="preserve">ecog_stage</a:t>
-            </a:r>
-            <a:r>
-              <a:rPr lang="en-US" sz="1100" b="0" i="0" dirty="0">
-                <a:solidFill>
-                  <a:srgbClr val="1F2328"/>
-                </a:solidFill>
-                <a:latin typeface="Consolas"/>
-                <a:cs typeface="Consolas"/>
-              </a:rPr>
-              <a:t xml:space="preserve"> </a:t>
-            </a:r>
-            <a:r>
-              <a:rPr lang="en-US" sz="1100" b="1" i="0" dirty="0">
-                <a:solidFill>
-                  <a:srgbClr val="0B6E4F"/>
-                </a:solidFill>
-                <a:latin typeface="Consolas"/>
-                <a:cs typeface="Consolas"/>
-              </a:rPr>
-              <a:t xml:space="preserve">only</a:t>
-            </a:r>
-            <a:r>
-              <a:rPr lang="en-US" sz="1100" b="0" i="0" dirty="0">
-                <a:solidFill>
-                  <a:srgbClr val="1F2328"/>
-                </a:solidFill>
-                <a:latin typeface="Consolas"/>
-                <a:cs typeface="Consolas"/>
-              </a:rPr>
-              <a:t xml:space="preserve"> </a:t>
-            </a:r>
-            <a:r>
-              <a:rPr lang="en-US" sz="1100" b="0" i="0" dirty="0">
-                <a:solidFill>
-                  <a:srgbClr val="6F42C1"/>
-                </a:solidFill>
-                <a:latin typeface="Consolas"/>
-                <a:cs typeface="Consolas"/>
-              </a:rPr>
-              <a:t xml:space="preserve">xsd:integer</a:t>
-            </a:r>
-            <a:endParaRPr lang="en-US" sz="1100"/>
-          </a:p>
-        </p:txBody>
-      </p:sp>
-      <p:sp>
-        <p:nvSpPr>
-          <p:cNvPr id="386" name="Code panel"/>
+        </p:txBody>
+      </p:sp>
+      <p:sp>
+        <p:nvSpPr>
+          <p:cNvPr id="63" name="Code panel"/>
           <p:cNvSpPr/>
           <p:nvPr/>
         </p:nvSpPr>
         <p:spPr>
           <a:xfrm>
-            <a:off x="4937760" y="2670048"/>
-            <a:ext cx="6172200" cy="2834640"/>
+            <a:off x="5038352" y="2249424"/>
+            <a:ext cx="6236460" cy="3236976"/>
           </a:xfrm>
           <a:prstGeom prst="roundRect">
             <a:avLst>
@@ -4658,14 +5120,14 @@
       </p:sp>
       <p:sp>
         <p:nvSpPr>
-          <p:cNvPr id="387" name="Code line 387"/>
+          <p:cNvPr id="64" name="Code line 64"/>
           <p:cNvSpPr txBox="1"/>
           <p:nvPr/>
         </p:nvSpPr>
         <p:spPr>
           <a:xfrm>
-            <a:off x="4937760" y="2779776"/>
-            <a:ext cx="4983480" cy="187100"/>
+            <a:off x="652054" y="2322576"/>
+            <a:ext cx="2903472" cy="162666"/>
           </a:xfrm>
           <a:prstGeom prst="rect">
             <a:avLst/>
@@ -4684,7 +5146,7 @@
               </a:tabLst>
             </a:pPr>
             <a:r>
-              <a:rPr lang="en-US" sz="1150" b="1" i="0" dirty="0">
+              <a:rPr lang="en-US" sz="1100" b="1" i="0" dirty="0">
                 <a:solidFill>
                   <a:srgbClr val="0B6E4F"/>
                 </a:solidFill>
@@ -4694,7 +5156,7 @@
               <a:t xml:space="preserve">Class:</a:t>
             </a:r>
             <a:r>
-              <a:rPr lang="en-US" sz="1150" b="0" i="0" dirty="0">
+              <a:rPr lang="en-US" sz="1100" b="0" i="0" dirty="0">
                 <a:solidFill>
                   <a:srgbClr val="1F2328"/>
                 </a:solidFill>
@@ -4704,7 +5166,7 @@
               <a:t xml:space="preserve"> </a:t>
             </a:r>
             <a:r>
-              <a:rPr lang="en-US" sz="1150" b="0" i="0" dirty="0">
+              <a:rPr lang="en-US" sz="1100" b="0" i="0" dirty="0">
                 <a:solidFill>
                   <a:srgbClr val="1F2328"/>
                 </a:solidFill>
@@ -4713,20 +5175,20 @@
               </a:rPr>
               <a:t xml:space="preserve">Admission</a:t>
             </a:r>
-            <a:endParaRPr lang="en-US" sz="1150"/>
+            <a:endParaRPr lang="en-US" sz="1100"/>
           </a:p>
         </p:txBody>
       </p:sp>
       <p:sp>
         <p:nvSpPr>
-          <p:cNvPr id="388" name="Code line 388"/>
+          <p:cNvPr id="65" name="Code line 65"/>
           <p:cNvSpPr txBox="1"/>
           <p:nvPr/>
         </p:nvSpPr>
         <p:spPr>
           <a:xfrm>
-            <a:off x="4937760" y="2966876"/>
-            <a:ext cx="4983480" cy="187100"/>
+            <a:off x="5038352" y="2322576"/>
+            <a:ext cx="5093460" cy="162666"/>
           </a:xfrm>
           <a:prstGeom prst="rect">
             <a:avLst/>
@@ -4745,17 +5207,78 @@
               </a:tabLst>
             </a:pPr>
             <a:r>
-              <a:rPr lang="en-US" sz="1150" b="0" i="0" dirty="0">
+              <a:rPr lang="en-US" sz="1100" b="1" i="0" dirty="0">
+                <a:solidFill>
+                  <a:srgbClr val="0B6E4F"/>
+                </a:solidFill>
+                <a:latin typeface="Consolas"/>
+                <a:cs typeface="Consolas"/>
+              </a:rPr>
+              <a:t xml:space="preserve">Class:</a:t>
+            </a:r>
+            <a:r>
+              <a:rPr lang="en-US" sz="1100" b="0" i="0" dirty="0">
                 <a:solidFill>
                   <a:srgbClr val="1F2328"/>
                 </a:solidFill>
                 <a:latin typeface="Consolas"/>
                 <a:cs typeface="Consolas"/>
               </a:rPr>
+              <a:t xml:space="preserve"> </a:t>
+            </a:r>
+            <a:r>
+              <a:rPr lang="en-US" sz="1100" b="0" i="0" dirty="0">
+                <a:solidFill>
+                  <a:srgbClr val="1F2328"/>
+                </a:solidFill>
+                <a:latin typeface="Consolas"/>
+                <a:cs typeface="Consolas"/>
+              </a:rPr>
+              <a:t xml:space="preserve">Admission</a:t>
+            </a:r>
+            <a:endParaRPr lang="en-US" sz="1100"/>
+          </a:p>
+        </p:txBody>
+      </p:sp>
+      <p:sp>
+        <p:nvSpPr>
+          <p:cNvPr id="66" name="Code line 66"/>
+          <p:cNvSpPr txBox="1"/>
+          <p:nvPr/>
+        </p:nvSpPr>
+        <p:spPr>
+          <a:xfrm>
+            <a:off x="652054" y="2485242"/>
+            <a:ext cx="2903472" cy="162666"/>
+          </a:xfrm>
+          <a:prstGeom prst="rect">
+            <a:avLst/>
+          </a:prstGeom>
+          <a:noFill/>
+        </p:spPr>
+        <p:txBody>
+          <a:bodyPr wrap="none" lIns="146304" tIns="0" rIns="0" bIns="0" anchor="ctr">
+            <a:noAutofit/>
+          </a:bodyPr>
+          <a:lstStyle/>
+          <a:p>
+            <a:pPr>
+              <a:tabLst>
+                <a:tab pos="4224528" algn="l"/>
+              </a:tabLst>
+            </a:pPr>
+            <a:r>
+              <a:rPr lang="en-US" sz="1100" b="0" i="0" dirty="0">
+                <a:solidFill>
+                  <a:srgbClr val="1F2328"/>
+                </a:solidFill>
+                <a:latin typeface="Consolas"/>
+                <a:cs typeface="Consolas"/>
+              </a:rPr>
               <a:t xml:space="preserve">  </a:t>
             </a:r>
             <a:r>
-              <a:rPr lang="en-US" sz="1150" b="1" i="0" dirty="0">
+              <a:rPr lang="en-US" sz="1100" b="1" i="0" dirty="0">
                 <a:solidFill>
                   <a:srgbClr val="0B6E4F"/>
                 </a:solidFill>
@@ -4764,38 +5287,221 @@
               </a:rPr>
               <a:t xml:space="preserve">SubClassOf:</a:t>
             </a:r>
-            <a:r>
-              <a:rPr lang="en-US" sz="1150" b="0" i="0" dirty="0">
+            <a:endParaRPr lang="en-US" sz="1100"/>
+          </a:p>
+        </p:txBody>
+      </p:sp>
+      <p:sp>
+        <p:nvSpPr>
+          <p:cNvPr id="67" name="Code line 67"/>
+          <p:cNvSpPr txBox="1"/>
+          <p:nvPr/>
+        </p:nvSpPr>
+        <p:spPr>
+          <a:xfrm>
+            <a:off x="5038352" y="2485242"/>
+            <a:ext cx="5093460" cy="162666"/>
+          </a:xfrm>
+          <a:prstGeom prst="rect">
+            <a:avLst/>
+          </a:prstGeom>
+          <a:noFill/>
+        </p:spPr>
+        <p:txBody>
+          <a:bodyPr wrap="none" lIns="146304" tIns="0" rIns="0" bIns="0" anchor="ctr">
+            <a:noAutofit/>
+          </a:bodyPr>
+          <a:lstStyle/>
+          <a:p>
+            <a:pPr>
+              <a:tabLst>
+                <a:tab pos="4224528" algn="l"/>
+              </a:tabLst>
+            </a:pPr>
+            <a:r>
+              <a:rPr lang="en-US" sz="1100" b="0" i="0" dirty="0">
                 <a:solidFill>
                   <a:srgbClr val="1F2328"/>
                 </a:solidFill>
                 <a:latin typeface="Consolas"/>
                 <a:cs typeface="Consolas"/>
               </a:rPr>
+              <a:t xml:space="preserve">  </a:t>
+            </a:r>
+            <a:r>
+              <a:rPr lang="en-US" sz="1100" b="1" i="0" dirty="0">
+                <a:solidFill>
+                  <a:srgbClr val="0B6E4F"/>
+                </a:solidFill>
+                <a:latin typeface="Consolas"/>
+                <a:cs typeface="Consolas"/>
+              </a:rPr>
+              <a:t xml:space="preserve">SubClassOf:</a:t>
+            </a:r>
+            <a:endParaRPr lang="en-US" sz="1100"/>
+          </a:p>
+        </p:txBody>
+      </p:sp>
+      <p:sp>
+        <p:nvSpPr>
+          <p:cNvPr id="68" name="Code line 68"/>
+          <p:cNvSpPr txBox="1"/>
+          <p:nvPr/>
+        </p:nvSpPr>
+        <p:spPr>
+          <a:xfrm>
+            <a:off x="652054" y="2647909"/>
+            <a:ext cx="2903472" cy="162666"/>
+          </a:xfrm>
+          <a:prstGeom prst="rect">
+            <a:avLst/>
+          </a:prstGeom>
+          <a:noFill/>
+        </p:spPr>
+        <p:txBody>
+          <a:bodyPr wrap="none" lIns="146304" tIns="0" rIns="0" bIns="0" anchor="ctr">
+            <a:noAutofit/>
+          </a:bodyPr>
+          <a:lstStyle/>
+          <a:p>
+            <a:pPr>
+              <a:tabLst>
+                <a:tab pos="4224528" algn="l"/>
+              </a:tabLst>
+            </a:pPr>
+            <a:r>
+              <a:rPr lang="en-US" sz="1100" b="0" i="0" dirty="0">
+                <a:solidFill>
+                  <a:srgbClr val="1F2328"/>
+                </a:solidFill>
+                <a:latin typeface="Consolas"/>
+                <a:cs typeface="Consolas"/>
+              </a:rPr>
+              <a:t xml:space="preserve">    </a:t>
+            </a:r>
+            <a:r>
+              <a:rPr lang="en-US" sz="1100" b="0" i="0" dirty="0">
+                <a:solidFill>
+                  <a:srgbClr val="1F2328"/>
+                </a:solidFill>
+                <a:latin typeface="Consolas"/>
+                <a:cs typeface="Consolas"/>
+              </a:rPr>
+              <a:t xml:space="preserve">admission_id</a:t>
+            </a:r>
+            <a:r>
+              <a:rPr lang="en-US" sz="1100" b="0" i="0" dirty="0">
+                <a:solidFill>
+                  <a:srgbClr val="1F2328"/>
+                </a:solidFill>
+                <a:latin typeface="Consolas"/>
+                <a:cs typeface="Consolas"/>
+              </a:rPr>
               <a:t xml:space="preserve"> </a:t>
             </a:r>
             <a:r>
-              <a:rPr lang="en-US" sz="1150" b="0" i="0" dirty="0">
+              <a:rPr lang="en-US" sz="1100" b="1" i="0" dirty="0">
+                <a:solidFill>
+                  <a:srgbClr val="0B6E4F"/>
+                </a:solidFill>
+                <a:latin typeface="Consolas"/>
+                <a:cs typeface="Consolas"/>
+              </a:rPr>
+              <a:t xml:space="preserve">some</a:t>
+            </a:r>
+            <a:r>
+              <a:rPr lang="en-US" sz="1100" b="0" i="0" dirty="0">
                 <a:solidFill>
                   <a:srgbClr val="1F2328"/>
                 </a:solidFill>
                 <a:latin typeface="Consolas"/>
                 <a:cs typeface="Consolas"/>
               </a:rPr>
-              <a:t xml:space="preserve">hasPatientData</a:t>
-            </a:r>
-            <a:r>
-              <a:rPr lang="en-US" sz="1150" b="0" i="0" dirty="0">
+              <a:t xml:space="preserve"> </a:t>
+            </a:r>
+            <a:r>
+              <a:rPr lang="en-US" sz="1100" b="0" i="0" dirty="0">
+                <a:solidFill>
+                  <a:srgbClr val="6F42C1"/>
+                </a:solidFill>
+                <a:latin typeface="Consolas"/>
+                <a:cs typeface="Consolas"/>
+              </a:rPr>
+              <a:t xml:space="preserve">xsd:integer</a:t>
+            </a:r>
+            <a:r>
+              <a:rPr lang="en-US" sz="1100" b="0" i="0" dirty="0">
                 <a:solidFill>
                   <a:srgbClr val="1F2328"/>
                 </a:solidFill>
                 <a:latin typeface="Consolas"/>
                 <a:cs typeface="Consolas"/>
               </a:rPr>
+              <a:t xml:space="preserve">,</a:t>
+            </a:r>
+            <a:endParaRPr lang="en-US" sz="1100"/>
+          </a:p>
+        </p:txBody>
+      </p:sp>
+      <p:sp>
+        <p:nvSpPr>
+          <p:cNvPr id="69" name="Code line 69"/>
+          <p:cNvSpPr txBox="1"/>
+          <p:nvPr/>
+        </p:nvSpPr>
+        <p:spPr>
+          <a:xfrm>
+            <a:off x="5038352" y="2647909"/>
+            <a:ext cx="5093460" cy="162666"/>
+          </a:xfrm>
+          <a:prstGeom prst="rect">
+            <a:avLst/>
+          </a:prstGeom>
+          <a:noFill/>
+        </p:spPr>
+        <p:txBody>
+          <a:bodyPr wrap="none" lIns="146304" tIns="0" rIns="0" bIns="0" anchor="ctr">
+            <a:noAutofit/>
+          </a:bodyPr>
+          <a:lstStyle/>
+          <a:p>
+            <a:pPr>
+              <a:tabLst>
+                <a:tab pos="4224528" algn="l"/>
+              </a:tabLst>
+            </a:pPr>
+            <a:r>
+              <a:rPr lang="en-US" sz="1100" b="0" i="0" dirty="0">
+                <a:solidFill>
+                  <a:srgbClr val="1F2328"/>
+                </a:solidFill>
+                <a:latin typeface="Consolas"/>
+                <a:cs typeface="Consolas"/>
+              </a:rPr>
+              <a:t xml:space="preserve">    </a:t>
+            </a:r>
+            <a:r>
+              <a:rPr lang="en-US" sz="1100" b="0" i="0" dirty="0">
+                <a:solidFill>
+                  <a:srgbClr val="1F2328"/>
+                </a:solidFill>
+                <a:latin typeface="Consolas"/>
+                <a:cs typeface="Consolas"/>
+              </a:rPr>
+              <a:t xml:space="preserve">admission_id</a:t>
+            </a:r>
+            <a:r>
+              <a:rPr lang="en-US" sz="1100" b="0" i="0" dirty="0">
+                <a:solidFill>
+                  <a:srgbClr val="1F2328"/>
+                </a:solidFill>
+                <a:latin typeface="Consolas"/>
+                <a:cs typeface="Consolas"/>
+              </a:rPr>
               <a:t xml:space="preserve"> </a:t>
             </a:r>
             <a:r>
-              <a:rPr lang="en-US" sz="1150" b="1" i="0" dirty="0">
+              <a:rPr lang="en-US" sz="1100" b="1" i="0" dirty="0">
                 <a:solidFill>
                   <a:srgbClr val="0B6E4F"/>
                 </a:solidFill>
@@ -4805,7 +5511,7 @@
               <a:t xml:space="preserve">some</a:t>
             </a:r>
             <a:r>
-              <a:rPr lang="en-US" sz="1150" b="0" i="0" dirty="0">
+              <a:rPr lang="en-US" sz="1100" b="0" i="0" dirty="0">
                 <a:solidFill>
                   <a:srgbClr val="1F2328"/>
                 </a:solidFill>
@@ -4815,29 +5521,272 @@
               <a:t xml:space="preserve"> </a:t>
             </a:r>
             <a:r>
-              <a:rPr lang="en-US" sz="1150" b="0" i="0" dirty="0">
+              <a:rPr lang="en-US" sz="1100" b="0" i="0" dirty="0">
+                <a:solidFill>
+                  <a:srgbClr val="6F42C1"/>
+                </a:solidFill>
+                <a:latin typeface="Consolas"/>
+                <a:cs typeface="Consolas"/>
+              </a:rPr>
+              <a:t xml:space="preserve">xsd:integer</a:t>
+            </a:r>
+            <a:r>
+              <a:rPr lang="en-US" sz="1100" b="0" i="0" dirty="0">
                 <a:solidFill>
                   <a:srgbClr val="1F2328"/>
                 </a:solidFill>
                 <a:latin typeface="Consolas"/>
                 <a:cs typeface="Consolas"/>
               </a:rPr>
+              <a:t xml:space="preserve">,</a:t>
+            </a:r>
+            <a:endParaRPr lang="en-US" sz="1100"/>
+          </a:p>
+        </p:txBody>
+      </p:sp>
+      <p:sp>
+        <p:nvSpPr>
+          <p:cNvPr id="70" name="Code line 70"/>
+          <p:cNvSpPr txBox="1"/>
+          <p:nvPr/>
+        </p:nvSpPr>
+        <p:spPr>
+          <a:xfrm>
+            <a:off x="652054" y="2810576"/>
+            <a:ext cx="2903472" cy="162666"/>
+          </a:xfrm>
+          <a:prstGeom prst="rect">
+            <a:avLst/>
+          </a:prstGeom>
+          <a:noFill/>
+        </p:spPr>
+        <p:txBody>
+          <a:bodyPr wrap="none" lIns="146304" tIns="0" rIns="0" bIns="0" anchor="ctr">
+            <a:noAutofit/>
+          </a:bodyPr>
+          <a:lstStyle/>
+          <a:p>
+            <a:pPr>
+              <a:tabLst>
+                <a:tab pos="4224528" algn="l"/>
+              </a:tabLst>
+            </a:pPr>
+            <a:r>
+              <a:rPr lang="en-US" sz="1100" b="0" i="0" dirty="0">
+                <a:solidFill>
+                  <a:srgbClr val="1F2328"/>
+                </a:solidFill>
+                <a:latin typeface="Consolas"/>
+                <a:cs typeface="Consolas"/>
+              </a:rPr>
+              <a:t xml:space="preserve">    </a:t>
+            </a:r>
+            <a:r>
+              <a:rPr lang="en-US" sz="1100" b="0" i="0" dirty="0">
+                <a:solidFill>
+                  <a:srgbClr val="1F2328"/>
+                </a:solidFill>
+                <a:latin typeface="Consolas"/>
+                <a:cs typeface="Consolas"/>
+              </a:rPr>
+              <a:t xml:space="preserve">patient_id</a:t>
+            </a:r>
+            <a:r>
+              <a:rPr lang="en-US" sz="1100" b="0" i="0" dirty="0">
+                <a:solidFill>
+                  <a:srgbClr val="1F2328"/>
+                </a:solidFill>
+                <a:latin typeface="Consolas"/>
+                <a:cs typeface="Consolas"/>
+              </a:rPr>
+              <a:t xml:space="preserve"> </a:t>
+            </a:r>
+            <a:r>
+              <a:rPr lang="en-US" sz="1100" b="1" i="0" dirty="0">
+                <a:solidFill>
+                  <a:srgbClr val="0B6E4F"/>
+                </a:solidFill>
+                <a:latin typeface="Consolas"/>
+                <a:cs typeface="Consolas"/>
+              </a:rPr>
+              <a:t xml:space="preserve">some</a:t>
+            </a:r>
+            <a:r>
+              <a:rPr lang="en-US" sz="1100" b="0" i="0" dirty="0">
+                <a:solidFill>
+                  <a:srgbClr val="1F2328"/>
+                </a:solidFill>
+                <a:latin typeface="Consolas"/>
+                <a:cs typeface="Consolas"/>
+              </a:rPr>
+              <a:t xml:space="preserve"> </a:t>
+            </a:r>
+            <a:r>
+              <a:rPr lang="en-US" sz="1100" b="0" i="0" dirty="0">
+                <a:solidFill>
+                  <a:srgbClr val="1F2328"/>
+                </a:solidFill>
+                <a:latin typeface="Consolas"/>
+                <a:cs typeface="Consolas"/>
+              </a:rPr>
               <a:t xml:space="preserve">PatientData</a:t>
             </a:r>
-            <a:endParaRPr lang="en-US" sz="1150"/>
+            <a:r>
+              <a:rPr lang="en-US" sz="1100" b="0" i="0" dirty="0">
+                <a:solidFill>
+                  <a:srgbClr val="1F2328"/>
+                </a:solidFill>
+                <a:latin typeface="Consolas"/>
+                <a:cs typeface="Consolas"/>
+              </a:rPr>
+              <a:t xml:space="preserve">,</a:t>
+            </a:r>
+            <a:endParaRPr lang="en-US" sz="1100"/>
           </a:p>
         </p:txBody>
       </p:sp>
       <p:sp>
         <p:nvSpPr>
-          <p:cNvPr id="389" name="Evidence tag"/>
+          <p:cNvPr id="71" name="Renamed name"/>
           <p:cNvSpPr/>
           <p:nvPr/>
         </p:nvSpPr>
         <p:spPr>
           <a:xfrm>
-            <a:off x="10040112" y="2973558"/>
-            <a:ext cx="987552" cy="173736"/>
+            <a:off x="5464452" y="2815148"/>
+            <a:ext cx="1130162" cy="153522"/>
+          </a:xfrm>
+          <a:prstGeom prst="rect">
+            <a:avLst/>
+          </a:prstGeom>
+          <a:solidFill>
+            <a:srgbClr val="DCF2E6"/>
+          </a:solidFill>
+          <a:ln>
+            <a:noFill/>
+          </a:ln>
+        </p:spPr>
+        <p:txBody>
+          <a:bodyPr wrap="square" lIns="0" tIns="0" rIns="0" bIns="0" anchor="ctr">
+            <a:noAutofit/>
+          </a:bodyPr>
+          <a:lstStyle/>
+          <a:p>
+            <a:endParaRPr lang="en-US"/>
+          </a:p>
+        </p:txBody>
+      </p:sp>
+      <p:sp>
+        <p:nvSpPr>
+          <p:cNvPr id="72" name="Code line 72"/>
+          <p:cNvSpPr txBox="1"/>
+          <p:nvPr/>
+        </p:nvSpPr>
+        <p:spPr>
+          <a:xfrm>
+            <a:off x="5038352" y="2810576"/>
+            <a:ext cx="5093460" cy="162666"/>
+          </a:xfrm>
+          <a:prstGeom prst="rect">
+            <a:avLst/>
+          </a:prstGeom>
+          <a:noFill/>
+        </p:spPr>
+        <p:txBody>
+          <a:bodyPr wrap="none" lIns="146304" tIns="0" rIns="0" bIns="0" anchor="ctr">
+            <a:noAutofit/>
+          </a:bodyPr>
+          <a:lstStyle/>
+          <a:p>
+            <a:pPr>
+              <a:tabLst>
+                <a:tab pos="4224528" algn="l"/>
+              </a:tabLst>
+            </a:pPr>
+            <a:r>
+              <a:rPr lang="en-US" sz="1100" b="0" i="0" dirty="0">
+                <a:solidFill>
+                  <a:srgbClr val="1F2328"/>
+                </a:solidFill>
+                <a:latin typeface="Consolas"/>
+                <a:cs typeface="Consolas"/>
+              </a:rPr>
+              <a:t xml:space="preserve">    </a:t>
+            </a:r>
+            <a:r>
+              <a:rPr lang="en-US" sz="1100" b="0" i="0" dirty="0">
+                <a:solidFill>
+                  <a:srgbClr val="1F2328"/>
+                </a:solidFill>
+                <a:latin typeface="Consolas"/>
+                <a:cs typeface="Consolas"/>
+              </a:rPr>
+              <a:t xml:space="preserve">hasPatientData</a:t>
+            </a:r>
+            <a:r>
+              <a:rPr lang="en-US" sz="1100" b="0" i="0" dirty="0">
+                <a:solidFill>
+                  <a:srgbClr val="1F2328"/>
+                </a:solidFill>
+                <a:latin typeface="Consolas"/>
+                <a:cs typeface="Consolas"/>
+              </a:rPr>
+              <a:t xml:space="preserve"> </a:t>
+            </a:r>
+            <a:r>
+              <a:rPr lang="en-US" sz="1100" b="1" i="0" dirty="0">
+                <a:solidFill>
+                  <a:srgbClr val="0B6E4F"/>
+                </a:solidFill>
+                <a:latin typeface="Consolas"/>
+                <a:cs typeface="Consolas"/>
+              </a:rPr>
+              <a:t xml:space="preserve">some</a:t>
+            </a:r>
+            <a:r>
+              <a:rPr lang="en-US" sz="1100" b="0" i="0" dirty="0">
+                <a:solidFill>
+                  <a:srgbClr val="1F2328"/>
+                </a:solidFill>
+                <a:latin typeface="Consolas"/>
+                <a:cs typeface="Consolas"/>
+              </a:rPr>
+              <a:t xml:space="preserve"> </a:t>
+            </a:r>
+            <a:r>
+              <a:rPr lang="en-US" sz="1100" b="0" i="0" dirty="0">
+                <a:solidFill>
+                  <a:srgbClr val="1F2328"/>
+                </a:solidFill>
+                <a:latin typeface="Consolas"/>
+                <a:cs typeface="Consolas"/>
+              </a:rPr>
+              <a:t xml:space="preserve">PatientData</a:t>
+            </a:r>
+            <a:r>
+              <a:rPr lang="en-US" sz="1100" b="0" i="0" dirty="0">
+                <a:solidFill>
+                  <a:srgbClr val="1F2328"/>
+                </a:solidFill>
+                <a:latin typeface="Consolas"/>
+                <a:cs typeface="Consolas"/>
+              </a:rPr>
+              <a:t xml:space="preserve">,</a:t>
+            </a:r>
+            <a:endParaRPr lang="en-US" sz="1100"/>
+          </a:p>
+        </p:txBody>
+      </p:sp>
+      <p:sp>
+        <p:nvSpPr>
+          <p:cNvPr id="73" name="Evidence tag"/>
+          <p:cNvSpPr/>
+          <p:nvPr/>
+        </p:nvSpPr>
+        <p:spPr>
+          <a:xfrm>
+            <a:off x="10177532" y="2819720"/>
+            <a:ext cx="987552" cy="144378"/>
           </a:xfrm>
           <a:prstGeom prst="roundRect">
             <a:avLst>
@@ -4879,14 +5828,14 @@
       </p:sp>
       <p:sp>
         <p:nvSpPr>
-          <p:cNvPr id="390" name="Code line 390"/>
+          <p:cNvPr id="74" name="Code line 74"/>
           <p:cNvSpPr txBox="1"/>
           <p:nvPr/>
         </p:nvSpPr>
         <p:spPr>
           <a:xfrm>
-            <a:off x="4937760" y="3153976"/>
-            <a:ext cx="4983480" cy="187100"/>
+            <a:off x="652054" y="2973243"/>
+            <a:ext cx="2903472" cy="162666"/>
           </a:xfrm>
           <a:prstGeom prst="rect">
             <a:avLst/>
@@ -4905,27 +5854,47 @@
               </a:tabLst>
             </a:pPr>
             <a:r>
-              <a:rPr lang="en-US" sz="1150" b="0" i="0" dirty="0">
+              <a:rPr lang="en-US" sz="1100" b="0" i="0" dirty="0">
                 <a:solidFill>
                   <a:srgbClr val="1F2328"/>
                 </a:solidFill>
                 <a:latin typeface="Consolas"/>
                 <a:cs typeface="Consolas"/>
               </a:rPr>
-              <a:t xml:space="preserve">  </a:t>
-            </a:r>
-            <a:r>
-              <a:rPr lang="en-US" sz="1150" b="1" i="0" dirty="0">
+              <a:t xml:space="preserve">    </a:t>
+            </a:r>
+            <a:r>
+              <a:rPr lang="en-US" sz="1100" b="0" i="0" dirty="0">
+                <a:solidFill>
+                  <a:srgbClr val="1F2328"/>
+                </a:solidFill>
+                <a:latin typeface="Consolas"/>
+                <a:cs typeface="Consolas"/>
+              </a:rPr>
+              <a:t xml:space="preserve">BM_DEP</a:t>
+            </a:r>
+            <a:r>
+              <a:rPr lang="en-US" sz="1100" b="0" i="0" dirty="0">
+                <a:solidFill>
+                  <a:srgbClr val="1F2328"/>
+                </a:solidFill>
+                <a:latin typeface="Consolas"/>
+                <a:cs typeface="Consolas"/>
+              </a:rPr>
+              <a:t xml:space="preserve"> </a:t>
+            </a:r>
+            <a:r>
+              <a:rPr lang="en-US" sz="1100" b="1" i="0" dirty="0">
                 <a:solidFill>
                   <a:srgbClr val="0B6E4F"/>
                 </a:solidFill>
                 <a:latin typeface="Consolas"/>
                 <a:cs typeface="Consolas"/>
               </a:rPr>
-              <a:t xml:space="preserve">DisjointWith:</a:t>
-            </a:r>
-            <a:r>
-              <a:rPr lang="en-US" sz="1150" b="0" i="0" dirty="0">
+              <a:t xml:space="preserve">only</a:t>
+            </a:r>
+            <a:r>
+              <a:rPr lang="en-US" sz="1100" b="0" i="0" dirty="0">
                 <a:solidFill>
                   <a:srgbClr val="1F2328"/>
                 </a:solidFill>
@@ -4935,29 +5904,455 @@
               <a:t xml:space="preserve"> </a:t>
             </a:r>
             <a:r>
-              <a:rPr lang="en-US" sz="1150" b="0" i="0" dirty="0">
+              <a:rPr lang="en-US" sz="1100" b="0" i="0" dirty="0">
+                <a:solidFill>
+                  <a:srgbClr val="6F42C1"/>
+                </a:solidFill>
+                <a:latin typeface="Consolas"/>
+                <a:cs typeface="Consolas"/>
+              </a:rPr>
+              <a:t xml:space="preserve">xsd:integer</a:t>
+            </a:r>
+            <a:r>
+              <a:rPr lang="en-US" sz="1100" b="0" i="0" dirty="0">
                 <a:solidFill>
                   <a:srgbClr val="1F2328"/>
                 </a:solidFill>
                 <a:latin typeface="Consolas"/>
                 <a:cs typeface="Consolas"/>
               </a:rPr>
-              <a:t xml:space="preserve">PatientData</a:t>
-            </a:r>
-            <a:endParaRPr lang="en-US" sz="1150"/>
+              <a:t xml:space="preserve">,</a:t>
+            </a:r>
+            <a:endParaRPr lang="en-US" sz="1100"/>
           </a:p>
         </p:txBody>
       </p:sp>
       <p:sp>
         <p:nvSpPr>
-          <p:cNvPr id="391" name="Evidence tag"/>
+          <p:cNvPr id="75" name="Code line 75"/>
+          <p:cNvSpPr txBox="1"/>
+          <p:nvPr/>
+        </p:nvSpPr>
+        <p:spPr>
+          <a:xfrm>
+            <a:off x="5038352" y="2973243"/>
+            <a:ext cx="5093460" cy="162666"/>
+          </a:xfrm>
+          <a:prstGeom prst="rect">
+            <a:avLst/>
+          </a:prstGeom>
+          <a:noFill/>
+        </p:spPr>
+        <p:txBody>
+          <a:bodyPr wrap="none" lIns="146304" tIns="0" rIns="0" bIns="0" anchor="ctr">
+            <a:noAutofit/>
+          </a:bodyPr>
+          <a:lstStyle/>
+          <a:p>
+            <a:pPr>
+              <a:tabLst>
+                <a:tab pos="4224528" algn="l"/>
+              </a:tabLst>
+            </a:pPr>
+            <a:r>
+              <a:rPr lang="en-US" sz="1100" b="0" i="0" dirty="0">
+                <a:solidFill>
+                  <a:srgbClr val="1F2328"/>
+                </a:solidFill>
+                <a:latin typeface="Consolas"/>
+                <a:cs typeface="Consolas"/>
+              </a:rPr>
+              <a:t xml:space="preserve">    </a:t>
+            </a:r>
+            <a:r>
+              <a:rPr lang="en-US" sz="1100" b="0" i="0" dirty="0">
+                <a:solidFill>
+                  <a:srgbClr val="1F2328"/>
+                </a:solidFill>
+                <a:latin typeface="Consolas"/>
+                <a:cs typeface="Consolas"/>
+              </a:rPr>
+              <a:t xml:space="preserve">BM_DEP</a:t>
+            </a:r>
+            <a:r>
+              <a:rPr lang="en-US" sz="1100" b="0" i="0" dirty="0">
+                <a:solidFill>
+                  <a:srgbClr val="1F2328"/>
+                </a:solidFill>
+                <a:latin typeface="Consolas"/>
+                <a:cs typeface="Consolas"/>
+              </a:rPr>
+              <a:t xml:space="preserve"> </a:t>
+            </a:r>
+            <a:r>
+              <a:rPr lang="en-US" sz="1100" b="1" i="0" dirty="0">
+                <a:solidFill>
+                  <a:srgbClr val="0B6E4F"/>
+                </a:solidFill>
+                <a:latin typeface="Consolas"/>
+                <a:cs typeface="Consolas"/>
+              </a:rPr>
+              <a:t xml:space="preserve">only</a:t>
+            </a:r>
+            <a:r>
+              <a:rPr lang="en-US" sz="1100" b="0" i="0" dirty="0">
+                <a:solidFill>
+                  <a:srgbClr val="1F2328"/>
+                </a:solidFill>
+                <a:latin typeface="Consolas"/>
+                <a:cs typeface="Consolas"/>
+              </a:rPr>
+              <a:t xml:space="preserve"> </a:t>
+            </a:r>
+            <a:r>
+              <a:rPr lang="en-US" sz="1100" b="0" i="0" dirty="0">
+                <a:solidFill>
+                  <a:srgbClr val="6F42C1"/>
+                </a:solidFill>
+                <a:latin typeface="Consolas"/>
+                <a:cs typeface="Consolas"/>
+              </a:rPr>
+              <a:t xml:space="preserve">xsd:integer</a:t>
+            </a:r>
+            <a:r>
+              <a:rPr lang="en-US" sz="1100" b="0" i="0" dirty="0">
+                <a:solidFill>
+                  <a:srgbClr val="1F2328"/>
+                </a:solidFill>
+                <a:latin typeface="Consolas"/>
+                <a:cs typeface="Consolas"/>
+              </a:rPr>
+              <a:t xml:space="preserve">,</a:t>
+            </a:r>
+            <a:endParaRPr lang="en-US" sz="1100"/>
+          </a:p>
+        </p:txBody>
+      </p:sp>
+      <p:sp>
+        <p:nvSpPr>
+          <p:cNvPr id="76" name="Code line 76"/>
+          <p:cNvSpPr txBox="1"/>
+          <p:nvPr/>
+        </p:nvSpPr>
+        <p:spPr>
+          <a:xfrm>
+            <a:off x="652054" y="3135910"/>
+            <a:ext cx="2903472" cy="162666"/>
+          </a:xfrm>
+          <a:prstGeom prst="rect">
+            <a:avLst/>
+          </a:prstGeom>
+          <a:noFill/>
+        </p:spPr>
+        <p:txBody>
+          <a:bodyPr wrap="none" lIns="146304" tIns="0" rIns="0" bIns="0" anchor="ctr">
+            <a:noAutofit/>
+          </a:bodyPr>
+          <a:lstStyle/>
+          <a:p>
+            <a:pPr>
+              <a:tabLst>
+                <a:tab pos="4224528" algn="l"/>
+              </a:tabLst>
+            </a:pPr>
+            <a:r>
+              <a:rPr lang="en-US" sz="1100" b="0" i="0" dirty="0">
+                <a:solidFill>
+                  <a:srgbClr val="1F2328"/>
+                </a:solidFill>
+                <a:latin typeface="Consolas"/>
+                <a:cs typeface="Consolas"/>
+              </a:rPr>
+              <a:t xml:space="preserve">    </a:t>
+            </a:r>
+            <a:r>
+              <a:rPr lang="en-US" sz="1100" b="0" i="0" dirty="0">
+                <a:solidFill>
+                  <a:srgbClr val="1F2328"/>
+                </a:solidFill>
+                <a:latin typeface="Consolas"/>
+                <a:cs typeface="Consolas"/>
+              </a:rPr>
+              <a:t xml:space="preserve">ecog_stage</a:t>
+            </a:r>
+            <a:r>
+              <a:rPr lang="en-US" sz="1100" b="0" i="0" dirty="0">
+                <a:solidFill>
+                  <a:srgbClr val="1F2328"/>
+                </a:solidFill>
+                <a:latin typeface="Consolas"/>
+                <a:cs typeface="Consolas"/>
+              </a:rPr>
+              <a:t xml:space="preserve"> </a:t>
+            </a:r>
+            <a:r>
+              <a:rPr lang="en-US" sz="1100" b="1" i="0" dirty="0">
+                <a:solidFill>
+                  <a:srgbClr val="0B6E4F"/>
+                </a:solidFill>
+                <a:latin typeface="Consolas"/>
+                <a:cs typeface="Consolas"/>
+              </a:rPr>
+              <a:t xml:space="preserve">only</a:t>
+            </a:r>
+            <a:r>
+              <a:rPr lang="en-US" sz="1100" b="0" i="0" dirty="0">
+                <a:solidFill>
+                  <a:srgbClr val="1F2328"/>
+                </a:solidFill>
+                <a:latin typeface="Consolas"/>
+                <a:cs typeface="Consolas"/>
+              </a:rPr>
+              <a:t xml:space="preserve"> </a:t>
+            </a:r>
+            <a:r>
+              <a:rPr lang="en-US" sz="1100" b="0" i="0" dirty="0">
+                <a:solidFill>
+                  <a:srgbClr val="6F42C1"/>
+                </a:solidFill>
+                <a:latin typeface="Consolas"/>
+                <a:cs typeface="Consolas"/>
+              </a:rPr>
+              <a:t xml:space="preserve">xsd:integer</a:t>
+            </a:r>
+            <a:endParaRPr lang="en-US" sz="1100"/>
+          </a:p>
+        </p:txBody>
+      </p:sp>
+      <p:sp>
+        <p:nvSpPr>
+          <p:cNvPr id="77" name="Code line 77"/>
+          <p:cNvSpPr txBox="1"/>
+          <p:nvPr/>
+        </p:nvSpPr>
+        <p:spPr>
+          <a:xfrm>
+            <a:off x="5038352" y="3135910"/>
+            <a:ext cx="5093460" cy="162666"/>
+          </a:xfrm>
+          <a:prstGeom prst="rect">
+            <a:avLst/>
+          </a:prstGeom>
+          <a:noFill/>
+        </p:spPr>
+        <p:txBody>
+          <a:bodyPr wrap="none" lIns="146304" tIns="0" rIns="0" bIns="0" anchor="ctr">
+            <a:noAutofit/>
+          </a:bodyPr>
+          <a:lstStyle/>
+          <a:p>
+            <a:pPr>
+              <a:tabLst>
+                <a:tab pos="4224528" algn="l"/>
+              </a:tabLst>
+            </a:pPr>
+            <a:r>
+              <a:rPr lang="en-US" sz="1100" b="0" i="0" dirty="0">
+                <a:solidFill>
+                  <a:srgbClr val="1F2328"/>
+                </a:solidFill>
+                <a:latin typeface="Consolas"/>
+                <a:cs typeface="Consolas"/>
+              </a:rPr>
+              <a:t xml:space="preserve">    </a:t>
+            </a:r>
+            <a:r>
+              <a:rPr lang="en-US" sz="1100" b="0" i="0" dirty="0">
+                <a:solidFill>
+                  <a:srgbClr val="1F2328"/>
+                </a:solidFill>
+                <a:latin typeface="Consolas"/>
+                <a:cs typeface="Consolas"/>
+              </a:rPr>
+              <a:t xml:space="preserve">ecog_stage</a:t>
+            </a:r>
+            <a:r>
+              <a:rPr lang="en-US" sz="1100" b="0" i="0" dirty="0">
+                <a:solidFill>
+                  <a:srgbClr val="1F2328"/>
+                </a:solidFill>
+                <a:latin typeface="Consolas"/>
+                <a:cs typeface="Consolas"/>
+              </a:rPr>
+              <a:t xml:space="preserve"> </a:t>
+            </a:r>
+            <a:r>
+              <a:rPr lang="en-US" sz="1100" b="1" i="0" dirty="0">
+                <a:solidFill>
+                  <a:srgbClr val="0B6E4F"/>
+                </a:solidFill>
+                <a:latin typeface="Consolas"/>
+                <a:cs typeface="Consolas"/>
+              </a:rPr>
+              <a:t xml:space="preserve">only</a:t>
+            </a:r>
+            <a:r>
+              <a:rPr lang="en-US" sz="1100" b="0" i="0" dirty="0">
+                <a:solidFill>
+                  <a:srgbClr val="1F2328"/>
+                </a:solidFill>
+                <a:latin typeface="Consolas"/>
+                <a:cs typeface="Consolas"/>
+              </a:rPr>
+              <a:t xml:space="preserve"> </a:t>
+            </a:r>
+            <a:r>
+              <a:rPr lang="en-US" sz="1100" b="0" i="0" dirty="0">
+                <a:solidFill>
+                  <a:srgbClr val="6F42C1"/>
+                </a:solidFill>
+                <a:latin typeface="Consolas"/>
+                <a:cs typeface="Consolas"/>
+              </a:rPr>
+              <a:t xml:space="preserve">xsd:integer</a:t>
+            </a:r>
+            <a:endParaRPr lang="en-US" sz="1100"/>
+          </a:p>
+        </p:txBody>
+      </p:sp>
+      <p:sp>
+        <p:nvSpPr>
+          <p:cNvPr id="78" name="Inserted row"/>
           <p:cNvSpPr/>
           <p:nvPr/>
         </p:nvSpPr>
         <p:spPr>
           <a:xfrm>
-            <a:off x="10040112" y="3160658"/>
-            <a:ext cx="987552" cy="173736"/>
+            <a:off x="5093216" y="3303149"/>
+            <a:ext cx="6126732" cy="153522"/>
+          </a:xfrm>
+          <a:prstGeom prst="rect">
+            <a:avLst/>
+          </a:prstGeom>
+          <a:solidFill>
+            <a:srgbClr val="DCF2E6"/>
+          </a:solidFill>
+          <a:ln>
+            <a:noFill/>
+          </a:ln>
+        </p:spPr>
+        <p:txBody>
+          <a:bodyPr wrap="square" lIns="0" tIns="0" rIns="0" bIns="0" anchor="ctr">
+            <a:noAutofit/>
+          </a:bodyPr>
+          <a:lstStyle/>
+          <a:p>
+            <a:endParaRPr lang="en-US"/>
+          </a:p>
+        </p:txBody>
+      </p:sp>
+      <p:sp>
+        <p:nvSpPr>
+          <p:cNvPr id="79" name="Insertion mark"/>
+          <p:cNvSpPr/>
+          <p:nvPr/>
+        </p:nvSpPr>
+        <p:spPr>
+          <a:xfrm>
+            <a:off x="5093216" y="3303149"/>
+            <a:ext cx="36576" cy="153522"/>
+          </a:xfrm>
+          <a:prstGeom prst="rect">
+            <a:avLst/>
+          </a:prstGeom>
+          <a:solidFill>
+            <a:srgbClr val="0B6E4F"/>
+          </a:solidFill>
+          <a:ln>
+            <a:noFill/>
+          </a:ln>
+        </p:spPr>
+        <p:txBody>
+          <a:bodyPr wrap="square" lIns="0" tIns="0" rIns="0" bIns="0" anchor="ctr">
+            <a:noAutofit/>
+          </a:bodyPr>
+          <a:lstStyle/>
+          <a:p>
+            <a:endParaRPr lang="en-US"/>
+          </a:p>
+        </p:txBody>
+      </p:sp>
+      <p:sp>
+        <p:nvSpPr>
+          <p:cNvPr id="80" name="Code line 80"/>
+          <p:cNvSpPr txBox="1"/>
+          <p:nvPr/>
+        </p:nvSpPr>
+        <p:spPr>
+          <a:xfrm>
+            <a:off x="5038352" y="3298577"/>
+            <a:ext cx="5093460" cy="162666"/>
+          </a:xfrm>
+          <a:prstGeom prst="rect">
+            <a:avLst/>
+          </a:prstGeom>
+          <a:noFill/>
+        </p:spPr>
+        <p:txBody>
+          <a:bodyPr wrap="none" lIns="146304" tIns="0" rIns="0" bIns="0" anchor="ctr">
+            <a:noAutofit/>
+          </a:bodyPr>
+          <a:lstStyle/>
+          <a:p>
+            <a:pPr>
+              <a:tabLst>
+                <a:tab pos="4224528" algn="l"/>
+              </a:tabLst>
+            </a:pPr>
+            <a:r>
+              <a:rPr lang="en-US" sz="1100" b="0" i="0" dirty="0">
+                <a:solidFill>
+                  <a:srgbClr val="1F2328"/>
+                </a:solidFill>
+                <a:latin typeface="Consolas"/>
+                <a:cs typeface="Consolas"/>
+              </a:rPr>
+              <a:t xml:space="preserve">  </a:t>
+            </a:r>
+            <a:r>
+              <a:rPr lang="en-US" sz="1100" b="1" i="0" dirty="0">
+                <a:solidFill>
+                  <a:srgbClr val="0B6E4F"/>
+                </a:solidFill>
+                <a:latin typeface="Consolas"/>
+                <a:cs typeface="Consolas"/>
+              </a:rPr>
+              <a:t xml:space="preserve">DisjointWith:</a:t>
+            </a:r>
+            <a:r>
+              <a:rPr lang="en-US" sz="1100" b="0" i="0" dirty="0">
+                <a:solidFill>
+                  <a:srgbClr val="1F2328"/>
+                </a:solidFill>
+                <a:latin typeface="Consolas"/>
+                <a:cs typeface="Consolas"/>
+              </a:rPr>
+              <a:t xml:space="preserve"> </a:t>
+            </a:r>
+            <a:r>
+              <a:rPr lang="en-US" sz="1100" b="0" i="0" dirty="0">
+                <a:solidFill>
+                  <a:srgbClr val="1F2328"/>
+                </a:solidFill>
+                <a:latin typeface="Consolas"/>
+                <a:cs typeface="Consolas"/>
+              </a:rPr>
+              <a:t xml:space="preserve">PatientData</a:t>
+            </a:r>
+            <a:endParaRPr lang="en-US" sz="1100"/>
+          </a:p>
+        </p:txBody>
+      </p:sp>
+      <p:sp>
+        <p:nvSpPr>
+          <p:cNvPr id="81" name="Evidence tag"/>
+          <p:cNvSpPr/>
+          <p:nvPr/>
+        </p:nvSpPr>
+        <p:spPr>
+          <a:xfrm>
+            <a:off x="10177532" y="3307721"/>
+            <a:ext cx="987552" cy="144378"/>
           </a:xfrm>
           <a:prstGeom prst="roundRect">
             <a:avLst>
@@ -4999,14 +6394,14 @@
       </p:sp>
       <p:sp>
         <p:nvSpPr>
-          <p:cNvPr id="392" name="Code line 392"/>
+          <p:cNvPr id="82" name="Code line 82"/>
           <p:cNvSpPr txBox="1"/>
           <p:nvPr/>
         </p:nvSpPr>
         <p:spPr>
           <a:xfrm>
-            <a:off x="4937760" y="3432516"/>
-            <a:ext cx="4983480" cy="187100"/>
+            <a:off x="652054" y="3461244"/>
+            <a:ext cx="2903472" cy="162666"/>
           </a:xfrm>
           <a:prstGeom prst="rect">
             <a:avLst/>
@@ -5025,7 +6420,7 @@
               </a:tabLst>
             </a:pPr>
             <a:r>
-              <a:rPr lang="en-US" sz="1150" b="1" i="0" dirty="0">
+              <a:rPr lang="en-US" sz="1100" b="1" i="0" dirty="0">
                 <a:solidFill>
                   <a:srgbClr val="0B6E4F"/>
                 </a:solidFill>
@@ -5035,7 +6430,7 @@
               <a:t xml:space="preserve">DataProperty:</a:t>
             </a:r>
             <a:r>
-              <a:rPr lang="en-US" sz="1150" b="0" i="0" dirty="0">
+              <a:rPr lang="en-US" sz="1100" b="0" i="0" dirty="0">
                 <a:solidFill>
                   <a:srgbClr val="1F2328"/>
                 </a:solidFill>
@@ -5045,29 +6440,29 @@
               <a:t xml:space="preserve"> </a:t>
             </a:r>
             <a:r>
-              <a:rPr lang="en-US" sz="1150" b="0" i="0" dirty="0">
+              <a:rPr lang="en-US" sz="1100" b="0" i="0" dirty="0">
                 <a:solidFill>
                   <a:srgbClr val="1F2328"/>
                 </a:solidFill>
                 <a:latin typeface="Consolas"/>
                 <a:cs typeface="Consolas"/>
               </a:rPr>
-              <a:t xml:space="preserve">BM_DEP</a:t>
-            </a:r>
-            <a:endParaRPr lang="en-US" sz="1150"/>
+              <a:t xml:space="preserve">admission_id</a:t>
+            </a:r>
+            <a:endParaRPr lang="en-US" sz="1100"/>
           </a:p>
         </p:txBody>
       </p:sp>
       <p:sp>
         <p:nvSpPr>
-          <p:cNvPr id="393" name="Code line 393"/>
+          <p:cNvPr id="83" name="Code line 83"/>
           <p:cNvSpPr txBox="1"/>
           <p:nvPr/>
         </p:nvSpPr>
         <p:spPr>
           <a:xfrm>
-            <a:off x="4937760" y="3619617"/>
-            <a:ext cx="4983480" cy="187100"/>
+            <a:off x="5038352" y="3461244"/>
+            <a:ext cx="5093460" cy="162666"/>
           </a:xfrm>
           <a:prstGeom prst="rect">
             <a:avLst/>
@@ -5086,39 +6481,49 @@
               </a:tabLst>
             </a:pPr>
             <a:r>
-              <a:rPr lang="en-US" sz="1150" b="0" i="0" dirty="0">
+              <a:rPr lang="en-US" sz="1100" b="1" i="0" dirty="0">
+                <a:solidFill>
+                  <a:srgbClr val="0B6E4F"/>
+                </a:solidFill>
+                <a:latin typeface="Consolas"/>
+                <a:cs typeface="Consolas"/>
+              </a:rPr>
+              <a:t xml:space="preserve">DataProperty:</a:t>
+            </a:r>
+            <a:r>
+              <a:rPr lang="en-US" sz="1100" b="0" i="0" dirty="0">
                 <a:solidFill>
                   <a:srgbClr val="1F2328"/>
                 </a:solidFill>
                 <a:latin typeface="Consolas"/>
                 <a:cs typeface="Consolas"/>
               </a:rPr>
-              <a:t xml:space="preserve">  </a:t>
-            </a:r>
-            <a:r>
-              <a:rPr lang="en-US" sz="1150" b="1" i="0" dirty="0">
-                <a:solidFill>
-                  <a:srgbClr val="0B6E4F"/>
-                </a:solidFill>
-                <a:latin typeface="Consolas"/>
-                <a:cs typeface="Consolas"/>
-              </a:rPr>
-              <a:t xml:space="preserve">Annotations:</a:t>
-            </a:r>
-            <a:endParaRPr lang="en-US" sz="1150"/>
+              <a:t xml:space="preserve"> </a:t>
+            </a:r>
+            <a:r>
+              <a:rPr lang="en-US" sz="1100" b="0" i="0" dirty="0">
+                <a:solidFill>
+                  <a:srgbClr val="1F2328"/>
+                </a:solidFill>
+                <a:latin typeface="Consolas"/>
+                <a:cs typeface="Consolas"/>
+              </a:rPr>
+              <a:t xml:space="preserve">admission_id</a:t>
+            </a:r>
+            <a:endParaRPr lang="en-US" sz="1100"/>
           </a:p>
         </p:txBody>
       </p:sp>
       <p:sp>
         <p:nvSpPr>
-          <p:cNvPr id="394" name="Code line 394"/>
+          <p:cNvPr id="84" name="Code line 84"/>
           <p:cNvSpPr txBox="1"/>
           <p:nvPr/>
         </p:nvSpPr>
         <p:spPr>
           <a:xfrm>
-            <a:off x="4937760" y="3806717"/>
-            <a:ext cx="4983480" cy="187100"/>
+            <a:off x="652054" y="3623911"/>
+            <a:ext cx="2903472" cy="162666"/>
           </a:xfrm>
           <a:prstGeom prst="rect">
             <a:avLst/>
@@ -5137,69 +6542,568 @@
               </a:tabLst>
             </a:pPr>
             <a:r>
-              <a:rPr lang="en-US" sz="1150" b="0" i="0" dirty="0">
+              <a:rPr lang="en-US" sz="1100" b="1" i="0" dirty="0">
+                <a:solidFill>
+                  <a:srgbClr val="0B6E4F"/>
+                </a:solidFill>
+                <a:latin typeface="Consolas"/>
+                <a:cs typeface="Consolas"/>
+              </a:rPr>
+              <a:t xml:space="preserve">ObjectProperty:</a:t>
+            </a:r>
+            <a:r>
+              <a:rPr lang="en-US" sz="1100" b="0" i="0" dirty="0">
                 <a:solidFill>
                   <a:srgbClr val="1F2328"/>
                 </a:solidFill>
                 <a:latin typeface="Consolas"/>
                 <a:cs typeface="Consolas"/>
               </a:rPr>
-              <a:t xml:space="preserve">    </a:t>
-            </a:r>
-            <a:r>
-              <a:rPr lang="en-US" sz="1150" b="0" i="0" dirty="0">
-                <a:solidFill>
-                  <a:srgbClr val="5B6770"/>
-                </a:solidFill>
-                <a:latin typeface="Consolas"/>
-                <a:cs typeface="Consolas"/>
-              </a:rPr>
-              <a:t xml:space="preserve">rdfs:label</a:t>
-            </a:r>
-            <a:r>
-              <a:rPr lang="en-US" sz="1150" b="0" i="0" dirty="0">
+              <a:t xml:space="preserve"> </a:t>
+            </a:r>
+            <a:r>
+              <a:rPr lang="en-US" sz="1100" b="0" i="0" dirty="0">
                 <a:solidFill>
                   <a:srgbClr val="1F2328"/>
                 </a:solidFill>
                 <a:latin typeface="Consolas"/>
                 <a:cs typeface="Consolas"/>
               </a:rPr>
-              <a:t xml:space="preserve"> </a:t>
-            </a:r>
-            <a:r>
-              <a:rPr lang="en-US" sz="1150" b="0" i="0" dirty="0">
-                <a:solidFill>
-                  <a:srgbClr val="A3401E"/>
-                </a:solidFill>
-                <a:latin typeface="Consolas"/>
-                <a:cs typeface="Consolas"/>
-              </a:rPr>
-              <a:t xml:space="preserve">"Bone Marrow Depression"@en</a:t>
-            </a:r>
-            <a:r>
-              <a:rPr lang="en-US" sz="1150" b="0" i="0" dirty="0">
-                <a:solidFill>
-                  <a:srgbClr val="1F2328"/>
-                </a:solidFill>
-                <a:latin typeface="Consolas"/>
-                <a:cs typeface="Consolas"/>
-              </a:rPr>
-              <a:t xml:space="preserve">,</a:t>
-            </a:r>
-            <a:endParaRPr lang="en-US" sz="1150"/>
+              <a:t xml:space="preserve">patient_id</a:t>
+            </a:r>
+            <a:endParaRPr lang="en-US" sz="1100"/>
           </a:p>
         </p:txBody>
       </p:sp>
       <p:sp>
         <p:nvSpPr>
-          <p:cNvPr id="395" name="Evidence tag"/>
+          <p:cNvPr id="85" name="Renamed name"/>
           <p:cNvSpPr/>
           <p:nvPr/>
         </p:nvSpPr>
         <p:spPr>
           <a:xfrm>
-            <a:off x="10040112" y="3813399"/>
-            <a:ext cx="987552" cy="173736"/>
+            <a:off x="6386136" y="3628483"/>
+            <a:ext cx="1130162" cy="153522"/>
+          </a:xfrm>
+          <a:prstGeom prst="rect">
+            <a:avLst/>
+          </a:prstGeom>
+          <a:solidFill>
+            <a:srgbClr val="DCF2E6"/>
+          </a:solidFill>
+          <a:ln>
+            <a:noFill/>
+          </a:ln>
+        </p:spPr>
+        <p:txBody>
+          <a:bodyPr wrap="square" lIns="0" tIns="0" rIns="0" bIns="0" anchor="ctr">
+            <a:noAutofit/>
+          </a:bodyPr>
+          <a:lstStyle/>
+          <a:p>
+            <a:endParaRPr lang="en-US"/>
+          </a:p>
+        </p:txBody>
+      </p:sp>
+      <p:sp>
+        <p:nvSpPr>
+          <p:cNvPr id="86" name="Code line 86"/>
+          <p:cNvSpPr txBox="1"/>
+          <p:nvPr/>
+        </p:nvSpPr>
+        <p:spPr>
+          <a:xfrm>
+            <a:off x="5038352" y="3623911"/>
+            <a:ext cx="5093460" cy="162666"/>
+          </a:xfrm>
+          <a:prstGeom prst="rect">
+            <a:avLst/>
+          </a:prstGeom>
+          <a:noFill/>
+        </p:spPr>
+        <p:txBody>
+          <a:bodyPr wrap="none" lIns="146304" tIns="0" rIns="0" bIns="0" anchor="ctr">
+            <a:noAutofit/>
+          </a:bodyPr>
+          <a:lstStyle/>
+          <a:p>
+            <a:pPr>
+              <a:tabLst>
+                <a:tab pos="4224528" algn="l"/>
+              </a:tabLst>
+            </a:pPr>
+            <a:r>
+              <a:rPr lang="en-US" sz="1100" b="1" i="0" dirty="0">
+                <a:solidFill>
+                  <a:srgbClr val="0B6E4F"/>
+                </a:solidFill>
+                <a:latin typeface="Consolas"/>
+                <a:cs typeface="Consolas"/>
+              </a:rPr>
+              <a:t xml:space="preserve">ObjectProperty:</a:t>
+            </a:r>
+            <a:r>
+              <a:rPr lang="en-US" sz="1100" b="0" i="0" dirty="0">
+                <a:solidFill>
+                  <a:srgbClr val="1F2328"/>
+                </a:solidFill>
+                <a:latin typeface="Consolas"/>
+                <a:cs typeface="Consolas"/>
+              </a:rPr>
+              <a:t xml:space="preserve"> </a:t>
+            </a:r>
+            <a:r>
+              <a:rPr lang="en-US" sz="1100" b="0" i="0" dirty="0">
+                <a:solidFill>
+                  <a:srgbClr val="1F2328"/>
+                </a:solidFill>
+                <a:latin typeface="Consolas"/>
+                <a:cs typeface="Consolas"/>
+              </a:rPr>
+              <a:t xml:space="preserve">hasPatientData</a:t>
+            </a:r>
+            <a:endParaRPr lang="en-US" sz="1100"/>
+          </a:p>
+        </p:txBody>
+      </p:sp>
+      <p:sp>
+        <p:nvSpPr>
+          <p:cNvPr id="87" name="Evidence tag"/>
+          <p:cNvSpPr/>
+          <p:nvPr/>
+        </p:nvSpPr>
+        <p:spPr>
+          <a:xfrm>
+            <a:off x="10177532" y="3633055"/>
+            <a:ext cx="987552" cy="144378"/>
+          </a:xfrm>
+          <a:prstGeom prst="roundRect">
+            <a:avLst>
+              <a:gd name="adj" fmla="val 9000"/>
+            </a:avLst>
+          </a:prstGeom>
+          <a:solidFill>
+            <a:srgbClr val="FFFFFF"/>
+          </a:solidFill>
+          <a:ln w="9525">
+            <a:solidFill>
+              <a:srgbClr val="5B6770"/>
+            </a:solidFill>
+          </a:ln>
+        </p:spPr>
+        <p:txBody>
+          <a:bodyPr wrap="square" lIns="0" tIns="0" rIns="0" bIns="0" anchor="ctr">
+            <a:noAutofit/>
+          </a:bodyPr>
+          <a:lstStyle/>
+          <a:p>
+            <a:pPr algn="ctr">
+              <a:spcAft>
+                <a:spcPts val="0"/>
+              </a:spcAft>
+            </a:pPr>
+            <a:r>
+              <a:rPr lang="en-US" sz="850" b="1" i="0" dirty="0">
+                <a:solidFill>
+                  <a:srgbClr val="5B6770"/>
+                </a:solidFill>
+                <a:latin typeface="Consolas"/>
+                <a:cs typeface="Consolas"/>
+              </a:rPr>
+              <a:t xml:space="preserve">SCHEMA</a:t>
+            </a:r>
+          </a:p>
+        </p:txBody>
+      </p:sp>
+      <p:sp>
+        <p:nvSpPr>
+          <p:cNvPr id="88" name="Code line 88"/>
+          <p:cNvSpPr txBox="1"/>
+          <p:nvPr/>
+        </p:nvSpPr>
+        <p:spPr>
+          <a:xfrm>
+            <a:off x="652054" y="3786578"/>
+            <a:ext cx="2903472" cy="162666"/>
+          </a:xfrm>
+          <a:prstGeom prst="rect">
+            <a:avLst/>
+          </a:prstGeom>
+          <a:noFill/>
+        </p:spPr>
+        <p:txBody>
+          <a:bodyPr wrap="none" lIns="146304" tIns="0" rIns="0" bIns="0" anchor="ctr">
+            <a:noAutofit/>
+          </a:bodyPr>
+          <a:lstStyle/>
+          <a:p>
+            <a:pPr>
+              <a:tabLst>
+                <a:tab pos="4224528" algn="l"/>
+              </a:tabLst>
+            </a:pPr>
+            <a:r>
+              <a:rPr lang="en-US" sz="1100" b="1" i="0" dirty="0">
+                <a:solidFill>
+                  <a:srgbClr val="0B6E4F"/>
+                </a:solidFill>
+                <a:latin typeface="Consolas"/>
+                <a:cs typeface="Consolas"/>
+              </a:rPr>
+              <a:t xml:space="preserve">DataProperty:</a:t>
+            </a:r>
+            <a:r>
+              <a:rPr lang="en-US" sz="1100" b="0" i="0" dirty="0">
+                <a:solidFill>
+                  <a:srgbClr val="1F2328"/>
+                </a:solidFill>
+                <a:latin typeface="Consolas"/>
+                <a:cs typeface="Consolas"/>
+              </a:rPr>
+              <a:t xml:space="preserve"> </a:t>
+            </a:r>
+            <a:r>
+              <a:rPr lang="en-US" sz="1100" b="0" i="0" dirty="0">
+                <a:solidFill>
+                  <a:srgbClr val="1F2328"/>
+                </a:solidFill>
+                <a:latin typeface="Consolas"/>
+                <a:cs typeface="Consolas"/>
+              </a:rPr>
+              <a:t xml:space="preserve">BM_DEP</a:t>
+            </a:r>
+            <a:endParaRPr lang="en-US" sz="1100"/>
+          </a:p>
+        </p:txBody>
+      </p:sp>
+      <p:sp>
+        <p:nvSpPr>
+          <p:cNvPr id="89" name="Code line 89"/>
+          <p:cNvSpPr txBox="1"/>
+          <p:nvPr/>
+        </p:nvSpPr>
+        <p:spPr>
+          <a:xfrm>
+            <a:off x="5038352" y="3786578"/>
+            <a:ext cx="5093460" cy="162666"/>
+          </a:xfrm>
+          <a:prstGeom prst="rect">
+            <a:avLst/>
+          </a:prstGeom>
+          <a:noFill/>
+        </p:spPr>
+        <p:txBody>
+          <a:bodyPr wrap="none" lIns="146304" tIns="0" rIns="0" bIns="0" anchor="ctr">
+            <a:noAutofit/>
+          </a:bodyPr>
+          <a:lstStyle/>
+          <a:p>
+            <a:pPr>
+              <a:tabLst>
+                <a:tab pos="4224528" algn="l"/>
+              </a:tabLst>
+            </a:pPr>
+            <a:r>
+              <a:rPr lang="en-US" sz="1100" b="1" i="0" dirty="0">
+                <a:solidFill>
+                  <a:srgbClr val="0B6E4F"/>
+                </a:solidFill>
+                <a:latin typeface="Consolas"/>
+                <a:cs typeface="Consolas"/>
+              </a:rPr>
+              <a:t xml:space="preserve">DataProperty:</a:t>
+            </a:r>
+            <a:r>
+              <a:rPr lang="en-US" sz="1100" b="0" i="0" dirty="0">
+                <a:solidFill>
+                  <a:srgbClr val="1F2328"/>
+                </a:solidFill>
+                <a:latin typeface="Consolas"/>
+                <a:cs typeface="Consolas"/>
+              </a:rPr>
+              <a:t xml:space="preserve"> </a:t>
+            </a:r>
+            <a:r>
+              <a:rPr lang="en-US" sz="1100" b="0" i="0" dirty="0">
+                <a:solidFill>
+                  <a:srgbClr val="1F2328"/>
+                </a:solidFill>
+                <a:latin typeface="Consolas"/>
+                <a:cs typeface="Consolas"/>
+              </a:rPr>
+              <a:t xml:space="preserve">BM_DEP</a:t>
+            </a:r>
+            <a:endParaRPr lang="en-US" sz="1100"/>
+          </a:p>
+        </p:txBody>
+      </p:sp>
+      <p:sp>
+        <p:nvSpPr>
+          <p:cNvPr id="90" name="Inserted row"/>
+          <p:cNvSpPr/>
+          <p:nvPr/>
+        </p:nvSpPr>
+        <p:spPr>
+          <a:xfrm>
+            <a:off x="5093216" y="3953817"/>
+            <a:ext cx="6126732" cy="153522"/>
+          </a:xfrm>
+          <a:prstGeom prst="rect">
+            <a:avLst/>
+          </a:prstGeom>
+          <a:solidFill>
+            <a:srgbClr val="DCF2E6"/>
+          </a:solidFill>
+          <a:ln>
+            <a:noFill/>
+          </a:ln>
+        </p:spPr>
+        <p:txBody>
+          <a:bodyPr wrap="square" lIns="0" tIns="0" rIns="0" bIns="0" anchor="ctr">
+            <a:noAutofit/>
+          </a:bodyPr>
+          <a:lstStyle/>
+          <a:p>
+            <a:endParaRPr lang="en-US"/>
+          </a:p>
+        </p:txBody>
+      </p:sp>
+      <p:sp>
+        <p:nvSpPr>
+          <p:cNvPr id="91" name="Insertion mark"/>
+          <p:cNvSpPr/>
+          <p:nvPr/>
+        </p:nvSpPr>
+        <p:spPr>
+          <a:xfrm>
+            <a:off x="5093216" y="3953817"/>
+            <a:ext cx="36576" cy="153522"/>
+          </a:xfrm>
+          <a:prstGeom prst="rect">
+            <a:avLst/>
+          </a:prstGeom>
+          <a:solidFill>
+            <a:srgbClr val="0B6E4F"/>
+          </a:solidFill>
+          <a:ln>
+            <a:noFill/>
+          </a:ln>
+        </p:spPr>
+        <p:txBody>
+          <a:bodyPr wrap="square" lIns="0" tIns="0" rIns="0" bIns="0" anchor="ctr">
+            <a:noAutofit/>
+          </a:bodyPr>
+          <a:lstStyle/>
+          <a:p>
+            <a:endParaRPr lang="en-US"/>
+          </a:p>
+        </p:txBody>
+      </p:sp>
+      <p:sp>
+        <p:nvSpPr>
+          <p:cNvPr id="92" name="Code line 92"/>
+          <p:cNvSpPr txBox="1"/>
+          <p:nvPr/>
+        </p:nvSpPr>
+        <p:spPr>
+          <a:xfrm>
+            <a:off x="5038352" y="3949245"/>
+            <a:ext cx="5093460" cy="162666"/>
+          </a:xfrm>
+          <a:prstGeom prst="rect">
+            <a:avLst/>
+          </a:prstGeom>
+          <a:noFill/>
+        </p:spPr>
+        <p:txBody>
+          <a:bodyPr wrap="none" lIns="146304" tIns="0" rIns="0" bIns="0" anchor="ctr">
+            <a:noAutofit/>
+          </a:bodyPr>
+          <a:lstStyle/>
+          <a:p>
+            <a:pPr>
+              <a:tabLst>
+                <a:tab pos="4224528" algn="l"/>
+              </a:tabLst>
+            </a:pPr>
+            <a:r>
+              <a:rPr lang="en-US" sz="1100" b="0" i="0" dirty="0">
+                <a:solidFill>
+                  <a:srgbClr val="1F2328"/>
+                </a:solidFill>
+                <a:latin typeface="Consolas"/>
+                <a:cs typeface="Consolas"/>
+              </a:rPr>
+              <a:t xml:space="preserve">  </a:t>
+            </a:r>
+            <a:r>
+              <a:rPr lang="en-US" sz="1100" b="1" i="0" dirty="0">
+                <a:solidFill>
+                  <a:srgbClr val="0B6E4F"/>
+                </a:solidFill>
+                <a:latin typeface="Consolas"/>
+                <a:cs typeface="Consolas"/>
+              </a:rPr>
+              <a:t xml:space="preserve">Annotations:</a:t>
+            </a:r>
+            <a:endParaRPr lang="en-US" sz="1100"/>
+          </a:p>
+        </p:txBody>
+      </p:sp>
+      <p:sp>
+        <p:nvSpPr>
+          <p:cNvPr id="93" name="Inserted row"/>
+          <p:cNvSpPr/>
+          <p:nvPr/>
+        </p:nvSpPr>
+        <p:spPr>
+          <a:xfrm>
+            <a:off x="5093216" y="4116484"/>
+            <a:ext cx="6126732" cy="153522"/>
+          </a:xfrm>
+          <a:prstGeom prst="rect">
+            <a:avLst/>
+          </a:prstGeom>
+          <a:solidFill>
+            <a:srgbClr val="DCF2E6"/>
+          </a:solidFill>
+          <a:ln>
+            <a:noFill/>
+          </a:ln>
+        </p:spPr>
+        <p:txBody>
+          <a:bodyPr wrap="square" lIns="0" tIns="0" rIns="0" bIns="0" anchor="ctr">
+            <a:noAutofit/>
+          </a:bodyPr>
+          <a:lstStyle/>
+          <a:p>
+            <a:endParaRPr lang="en-US"/>
+          </a:p>
+        </p:txBody>
+      </p:sp>
+      <p:sp>
+        <p:nvSpPr>
+          <p:cNvPr id="94" name="Insertion mark"/>
+          <p:cNvSpPr/>
+          <p:nvPr/>
+        </p:nvSpPr>
+        <p:spPr>
+          <a:xfrm>
+            <a:off x="5093216" y="4116484"/>
+            <a:ext cx="36576" cy="153522"/>
+          </a:xfrm>
+          <a:prstGeom prst="rect">
+            <a:avLst/>
+          </a:prstGeom>
+          <a:solidFill>
+            <a:srgbClr val="0B6E4F"/>
+          </a:solidFill>
+          <a:ln>
+            <a:noFill/>
+          </a:ln>
+        </p:spPr>
+        <p:txBody>
+          <a:bodyPr wrap="square" lIns="0" tIns="0" rIns="0" bIns="0" anchor="ctr">
+            <a:noAutofit/>
+          </a:bodyPr>
+          <a:lstStyle/>
+          <a:p>
+            <a:endParaRPr lang="en-US"/>
+          </a:p>
+        </p:txBody>
+      </p:sp>
+      <p:sp>
+        <p:nvSpPr>
+          <p:cNvPr id="95" name="Code line 95"/>
+          <p:cNvSpPr txBox="1"/>
+          <p:nvPr/>
+        </p:nvSpPr>
+        <p:spPr>
+          <a:xfrm>
+            <a:off x="5038352" y="4111912"/>
+            <a:ext cx="5093460" cy="162666"/>
+          </a:xfrm>
+          <a:prstGeom prst="rect">
+            <a:avLst/>
+          </a:prstGeom>
+          <a:noFill/>
+        </p:spPr>
+        <p:txBody>
+          <a:bodyPr wrap="none" lIns="146304" tIns="0" rIns="0" bIns="0" anchor="ctr">
+            <a:noAutofit/>
+          </a:bodyPr>
+          <a:lstStyle/>
+          <a:p>
+            <a:pPr>
+              <a:tabLst>
+                <a:tab pos="4224528" algn="l"/>
+              </a:tabLst>
+            </a:pPr>
+            <a:r>
+              <a:rPr lang="en-US" sz="1100" b="0" i="0" dirty="0">
+                <a:solidFill>
+                  <a:srgbClr val="1F2328"/>
+                </a:solidFill>
+                <a:latin typeface="Consolas"/>
+                <a:cs typeface="Consolas"/>
+              </a:rPr>
+              <a:t xml:space="preserve">    </a:t>
+            </a:r>
+            <a:r>
+              <a:rPr lang="en-US" sz="1100" b="0" i="0" dirty="0">
+                <a:solidFill>
+                  <a:srgbClr val="5B6770"/>
+                </a:solidFill>
+                <a:latin typeface="Consolas"/>
+                <a:cs typeface="Consolas"/>
+              </a:rPr>
+              <a:t xml:space="preserve">rdfs:label</a:t>
+            </a:r>
+            <a:r>
+              <a:rPr lang="en-US" sz="1100" b="0" i="0" dirty="0">
+                <a:solidFill>
+                  <a:srgbClr val="1F2328"/>
+                </a:solidFill>
+                <a:latin typeface="Consolas"/>
+                <a:cs typeface="Consolas"/>
+              </a:rPr>
+              <a:t xml:space="preserve"> </a:t>
+            </a:r>
+            <a:r>
+              <a:rPr lang="en-US" sz="1100" b="0" i="0" dirty="0">
+                <a:solidFill>
+                  <a:srgbClr val="A3401E"/>
+                </a:solidFill>
+                <a:latin typeface="Consolas"/>
+                <a:cs typeface="Consolas"/>
+              </a:rPr>
+              <a:t xml:space="preserve">"Bone Marrow Depression"@en</a:t>
+            </a:r>
+            <a:r>
+              <a:rPr lang="en-US" sz="1100" b="0" i="0" dirty="0">
+                <a:solidFill>
+                  <a:srgbClr val="1F2328"/>
+                </a:solidFill>
+                <a:latin typeface="Consolas"/>
+                <a:cs typeface="Consolas"/>
+              </a:rPr>
+              <a:t xml:space="preserve">,</a:t>
+            </a:r>
+            <a:endParaRPr lang="en-US" sz="1100"/>
+          </a:p>
+        </p:txBody>
+      </p:sp>
+      <p:sp>
+        <p:nvSpPr>
+          <p:cNvPr id="96" name="Evidence tag"/>
+          <p:cNvSpPr/>
+          <p:nvPr/>
+        </p:nvSpPr>
+        <p:spPr>
+          <a:xfrm>
+            <a:off x="10177532" y="4121056"/>
+            <a:ext cx="987552" cy="144378"/>
           </a:xfrm>
           <a:prstGeom prst="roundRect">
             <a:avLst>
@@ -5241,14 +7145,76 @@
       </p:sp>
       <p:sp>
         <p:nvSpPr>
-          <p:cNvPr id="396" name="Code line 396"/>
+          <p:cNvPr id="97" name="Inserted row"/>
+          <p:cNvSpPr/>
+          <p:nvPr/>
+        </p:nvSpPr>
+        <p:spPr>
+          <a:xfrm>
+            <a:off x="5093216" y="4279151"/>
+            <a:ext cx="6126732" cy="153522"/>
+          </a:xfrm>
+          <a:prstGeom prst="rect">
+            <a:avLst/>
+          </a:prstGeom>
+          <a:solidFill>
+            <a:srgbClr val="DCF2E6"/>
+          </a:solidFill>
+          <a:ln>
+            <a:noFill/>
+          </a:ln>
+        </p:spPr>
+        <p:txBody>
+          <a:bodyPr wrap="square" lIns="0" tIns="0" rIns="0" bIns="0" anchor="ctr">
+            <a:noAutofit/>
+          </a:bodyPr>
+          <a:lstStyle/>
+          <a:p>
+            <a:endParaRPr lang="en-US"/>
+          </a:p>
+        </p:txBody>
+      </p:sp>
+      <p:sp>
+        <p:nvSpPr>
+          <p:cNvPr id="98" name="Insertion mark"/>
+          <p:cNvSpPr/>
+          <p:nvPr/>
+        </p:nvSpPr>
+        <p:spPr>
+          <a:xfrm>
+            <a:off x="5093216" y="4279151"/>
+            <a:ext cx="36576" cy="153522"/>
+          </a:xfrm>
+          <a:prstGeom prst="rect">
+            <a:avLst/>
+          </a:prstGeom>
+          <a:solidFill>
+            <a:srgbClr val="0B6E4F"/>
+          </a:solidFill>
+          <a:ln>
+            <a:noFill/>
+          </a:ln>
+        </p:spPr>
+        <p:txBody>
+          <a:bodyPr wrap="square" lIns="0" tIns="0" rIns="0" bIns="0" anchor="ctr">
+            <a:noAutofit/>
+          </a:bodyPr>
+          <a:lstStyle/>
+          <a:p>
+            <a:endParaRPr lang="en-US"/>
+          </a:p>
+        </p:txBody>
+      </p:sp>
+      <p:sp>
+        <p:nvSpPr>
+          <p:cNvPr id="99" name="Code line 99"/>
           <p:cNvSpPr txBox="1"/>
           <p:nvPr/>
         </p:nvSpPr>
         <p:spPr>
           <a:xfrm>
-            <a:off x="4937760" y="3993817"/>
-            <a:ext cx="4983480" cy="187100"/>
+            <a:off x="5038352" y="4274579"/>
+            <a:ext cx="5093460" cy="162666"/>
           </a:xfrm>
           <a:prstGeom prst="rect">
             <a:avLst/>
@@ -5267,7 +7233,7 @@
               </a:tabLst>
             </a:pPr>
             <a:r>
-              <a:rPr lang="en-US" sz="1150" b="0" i="0" dirty="0">
+              <a:rPr lang="en-US" sz="1100" b="0" i="0" dirty="0">
                 <a:solidFill>
                   <a:srgbClr val="1F2328"/>
                 </a:solidFill>
@@ -5277,7 +7243,7 @@
               <a:t xml:space="preserve">    </a:t>
             </a:r>
             <a:r>
-              <a:rPr lang="en-US" sz="1150" b="0" i="0" dirty="0">
+              <a:rPr lang="en-US" sz="1100" b="0" i="0" dirty="0">
                 <a:solidFill>
                   <a:srgbClr val="5B6770"/>
                 </a:solidFill>
@@ -5287,7 +7253,7 @@
               <a:t xml:space="preserve">skos:relatedMatch</a:t>
             </a:r>
             <a:r>
-              <a:rPr lang="en-US" sz="1150" b="0" i="0" dirty="0">
+              <a:rPr lang="en-US" sz="1100" b="0" i="0" dirty="0">
                 <a:solidFill>
                   <a:srgbClr val="1F2328"/>
                 </a:solidFill>
@@ -5297,7 +7263,7 @@
               <a:t xml:space="preserve"> </a:t>
             </a:r>
             <a:r>
-              <a:rPr lang="en-US" sz="1150" b="0" i="0" dirty="0">
+              <a:rPr lang="en-US" sz="1100" b="0" i="0" dirty="0">
                 <a:solidFill>
                   <a:srgbClr val="2F6B78"/>
                 </a:solidFill>
@@ -5307,7 +7273,7 @@
               <a:t xml:space="preserve">obo:DOID_4961</a:t>
             </a:r>
             <a:r>
-              <a:rPr lang="en-US" sz="1150" b="0" i="0" dirty="0">
+              <a:rPr lang="en-US" sz="1100" b="0" i="0" dirty="0">
                 <a:solidFill>
                   <a:srgbClr val="1F2328"/>
                 </a:solidFill>
@@ -5316,20 +7282,20 @@
               </a:rPr>
               <a:t xml:space="preserve">,</a:t>
             </a:r>
-            <a:endParaRPr lang="en-US" sz="1150"/>
+            <a:endParaRPr lang="en-US" sz="1100"/>
           </a:p>
         </p:txBody>
       </p:sp>
       <p:sp>
         <p:nvSpPr>
-          <p:cNvPr id="397" name="Evidence tag"/>
+          <p:cNvPr id="100" name="Evidence tag"/>
           <p:cNvSpPr/>
           <p:nvPr/>
         </p:nvSpPr>
         <p:spPr>
           <a:xfrm>
-            <a:off x="10040112" y="4000499"/>
-            <a:ext cx="987552" cy="173736"/>
+            <a:off x="10177532" y="4283723"/>
+            <a:ext cx="987552" cy="144378"/>
           </a:xfrm>
           <a:prstGeom prst="roundRect">
             <a:avLst>
@@ -5371,14 +7337,76 @@
       </p:sp>
       <p:sp>
         <p:nvSpPr>
-          <p:cNvPr id="398" name="Code line 398"/>
+          <p:cNvPr id="101" name="Inserted row"/>
+          <p:cNvSpPr/>
+          <p:nvPr/>
+        </p:nvSpPr>
+        <p:spPr>
+          <a:xfrm>
+            <a:off x="5093216" y="4441818"/>
+            <a:ext cx="6126732" cy="153522"/>
+          </a:xfrm>
+          <a:prstGeom prst="rect">
+            <a:avLst/>
+          </a:prstGeom>
+          <a:solidFill>
+            <a:srgbClr val="DCF2E6"/>
+          </a:solidFill>
+          <a:ln>
+            <a:noFill/>
+          </a:ln>
+        </p:spPr>
+        <p:txBody>
+          <a:bodyPr wrap="square" lIns="0" tIns="0" rIns="0" bIns="0" anchor="ctr">
+            <a:noAutofit/>
+          </a:bodyPr>
+          <a:lstStyle/>
+          <a:p>
+            <a:endParaRPr lang="en-US"/>
+          </a:p>
+        </p:txBody>
+      </p:sp>
+      <p:sp>
+        <p:nvSpPr>
+          <p:cNvPr id="102" name="Insertion mark"/>
+          <p:cNvSpPr/>
+          <p:nvPr/>
+        </p:nvSpPr>
+        <p:spPr>
+          <a:xfrm>
+            <a:off x="5093216" y="4441818"/>
+            <a:ext cx="36576" cy="153522"/>
+          </a:xfrm>
+          <a:prstGeom prst="rect">
+            <a:avLst/>
+          </a:prstGeom>
+          <a:solidFill>
+            <a:srgbClr val="0B6E4F"/>
+          </a:solidFill>
+          <a:ln>
+            <a:noFill/>
+          </a:ln>
+        </p:spPr>
+        <p:txBody>
+          <a:bodyPr wrap="square" lIns="0" tIns="0" rIns="0" bIns="0" anchor="ctr">
+            <a:noAutofit/>
+          </a:bodyPr>
+          <a:lstStyle/>
+          <a:p>
+            <a:endParaRPr lang="en-US"/>
+          </a:p>
+        </p:txBody>
+      </p:sp>
+      <p:sp>
+        <p:nvSpPr>
+          <p:cNvPr id="103" name="Code line 103"/>
           <p:cNvSpPr txBox="1"/>
           <p:nvPr/>
         </p:nvSpPr>
         <p:spPr>
           <a:xfrm>
-            <a:off x="4937760" y="4180918"/>
-            <a:ext cx="4983480" cy="187100"/>
+            <a:off x="5038352" y="4437246"/>
+            <a:ext cx="5093460" cy="162666"/>
           </a:xfrm>
           <a:prstGeom prst="rect">
             <a:avLst/>
@@ -5397,7 +7425,7 @@
               </a:tabLst>
             </a:pPr>
             <a:r>
-              <a:rPr lang="en-US" sz="1150" b="0" i="0" dirty="0">
+              <a:rPr lang="en-US" sz="1100" b="0" i="0" dirty="0">
                 <a:solidFill>
                   <a:srgbClr val="1F2328"/>
                 </a:solidFill>
@@ -5407,7 +7435,7 @@
               <a:t xml:space="preserve">    </a:t>
             </a:r>
             <a:r>
-              <a:rPr lang="en-US" sz="1150" b="0" i="0" dirty="0">
+              <a:rPr lang="en-US" sz="1100" b="0" i="0" dirty="0">
                 <a:solidFill>
                   <a:srgbClr val="5B6770"/>
                 </a:solidFill>
@@ -5417,7 +7445,7 @@
               <a:t xml:space="preserve">prov:wasDerivedFrom</a:t>
             </a:r>
             <a:r>
-              <a:rPr lang="en-US" sz="1150" b="0" i="0" dirty="0">
+              <a:rPr lang="en-US" sz="1100" b="0" i="0" dirty="0">
                 <a:solidFill>
                   <a:srgbClr val="1F2328"/>
                 </a:solidFill>
@@ -5427,7 +7455,7 @@
               <a:t xml:space="preserve"> </a:t>
             </a:r>
             <a:r>
-              <a:rPr lang="en-US" sz="1150" b="0" i="0" dirty="0">
+              <a:rPr lang="en-US" sz="1100" b="0" i="0" dirty="0">
                 <a:solidFill>
                   <a:srgbClr val="2F6B78"/>
                 </a:solidFill>
@@ -5436,20 +7464,20 @@
               </a:rPr>
               <a:t xml:space="preserve">admission:BM_DEP</a:t>
             </a:r>
-            <a:endParaRPr lang="en-US" sz="1150"/>
+            <a:endParaRPr lang="en-US" sz="1100"/>
           </a:p>
         </p:txBody>
       </p:sp>
       <p:sp>
         <p:nvSpPr>
-          <p:cNvPr id="399" name="Evidence tag"/>
+          <p:cNvPr id="104" name="Evidence tag"/>
           <p:cNvSpPr/>
           <p:nvPr/>
         </p:nvSpPr>
         <p:spPr>
           <a:xfrm>
-            <a:off x="10040112" y="4187600"/>
-            <a:ext cx="987552" cy="173736"/>
+            <a:off x="10177532" y="4446390"/>
+            <a:ext cx="987552" cy="144378"/>
           </a:xfrm>
           <a:prstGeom prst="roundRect">
             <a:avLst>
@@ -5491,14 +7519,14 @@
       </p:sp>
       <p:sp>
         <p:nvSpPr>
-          <p:cNvPr id="400" name="Code line 400"/>
+          <p:cNvPr id="105" name="Code line 105"/>
           <p:cNvSpPr txBox="1"/>
           <p:nvPr/>
         </p:nvSpPr>
         <p:spPr>
           <a:xfrm>
-            <a:off x="4937760" y="4459458"/>
-            <a:ext cx="4983480" cy="187100"/>
+            <a:off x="652054" y="4599913"/>
+            <a:ext cx="2903472" cy="162666"/>
           </a:xfrm>
           <a:prstGeom prst="rect">
             <a:avLst/>
@@ -5517,7 +7545,7 @@
               </a:tabLst>
             </a:pPr>
             <a:r>
-              <a:rPr lang="en-US" sz="1150" b="1" i="0" dirty="0">
+              <a:rPr lang="en-US" sz="1100" b="1" i="0" dirty="0">
                 <a:solidFill>
                   <a:srgbClr val="0B6E4F"/>
                 </a:solidFill>
@@ -5527,7 +7555,7 @@
               <a:t xml:space="preserve">DataProperty:</a:t>
             </a:r>
             <a:r>
-              <a:rPr lang="en-US" sz="1150" b="0" i="0" dirty="0">
+              <a:rPr lang="en-US" sz="1100" b="0" i="0" dirty="0">
                 <a:solidFill>
                   <a:srgbClr val="1F2328"/>
                 </a:solidFill>
@@ -5537,7 +7565,7 @@
               <a:t xml:space="preserve"> </a:t>
             </a:r>
             <a:r>
-              <a:rPr lang="en-US" sz="1150" b="0" i="0" dirty="0">
+              <a:rPr lang="en-US" sz="1100" b="0" i="0" dirty="0">
                 <a:solidFill>
                   <a:srgbClr val="1F2328"/>
                 </a:solidFill>
@@ -5546,20 +7574,20 @@
               </a:rPr>
               <a:t xml:space="preserve">ecog_stage</a:t>
             </a:r>
-            <a:endParaRPr lang="en-US" sz="1150"/>
+            <a:endParaRPr lang="en-US" sz="1100"/>
           </a:p>
         </p:txBody>
       </p:sp>
       <p:sp>
         <p:nvSpPr>
-          <p:cNvPr id="401" name="Code line 401"/>
+          <p:cNvPr id="106" name="Code line 106"/>
           <p:cNvSpPr txBox="1"/>
           <p:nvPr/>
         </p:nvSpPr>
         <p:spPr>
           <a:xfrm>
-            <a:off x="4937760" y="4646558"/>
-            <a:ext cx="4983480" cy="187100"/>
+            <a:off x="5038352" y="4599913"/>
+            <a:ext cx="5093460" cy="162666"/>
           </a:xfrm>
           <a:prstGeom prst="rect">
             <a:avLst/>
@@ -5578,39 +7606,111 @@
               </a:tabLst>
             </a:pPr>
             <a:r>
-              <a:rPr lang="en-US" sz="1150" b="0" i="0" dirty="0">
+              <a:rPr lang="en-US" sz="1100" b="1" i="0" dirty="0">
+                <a:solidFill>
+                  <a:srgbClr val="0B6E4F"/>
+                </a:solidFill>
+                <a:latin typeface="Consolas"/>
+                <a:cs typeface="Consolas"/>
+              </a:rPr>
+              <a:t xml:space="preserve">DataProperty:</a:t>
+            </a:r>
+            <a:r>
+              <a:rPr lang="en-US" sz="1100" b="0" i="0" dirty="0">
                 <a:solidFill>
                   <a:srgbClr val="1F2328"/>
                 </a:solidFill>
                 <a:latin typeface="Consolas"/>
                 <a:cs typeface="Consolas"/>
               </a:rPr>
-              <a:t xml:space="preserve">  </a:t>
-            </a:r>
-            <a:r>
-              <a:rPr lang="en-US" sz="1150" b="1" i="0" dirty="0">
-                <a:solidFill>
-                  <a:srgbClr val="0B6E4F"/>
-                </a:solidFill>
-                <a:latin typeface="Consolas"/>
-                <a:cs typeface="Consolas"/>
-              </a:rPr>
-              <a:t xml:space="preserve">Annotations:</a:t>
-            </a:r>
-            <a:endParaRPr lang="en-US" sz="1150"/>
+              <a:t xml:space="preserve"> </a:t>
+            </a:r>
+            <a:r>
+              <a:rPr lang="en-US" sz="1100" b="0" i="0" dirty="0">
+                <a:solidFill>
+                  <a:srgbClr val="1F2328"/>
+                </a:solidFill>
+                <a:latin typeface="Consolas"/>
+                <a:cs typeface="Consolas"/>
+              </a:rPr>
+              <a:t xml:space="preserve">ecog_stage</a:t>
+            </a:r>
+            <a:endParaRPr lang="en-US" sz="1100"/>
           </a:p>
         </p:txBody>
       </p:sp>
       <p:sp>
         <p:nvSpPr>
-          <p:cNvPr id="402" name="Code line 402"/>
+          <p:cNvPr id="107" name="Inserted row"/>
+          <p:cNvSpPr/>
+          <p:nvPr/>
+        </p:nvSpPr>
+        <p:spPr>
+          <a:xfrm>
+            <a:off x="5093216" y="4767152"/>
+            <a:ext cx="6126732" cy="153522"/>
+          </a:xfrm>
+          <a:prstGeom prst="rect">
+            <a:avLst/>
+          </a:prstGeom>
+          <a:solidFill>
+            <a:srgbClr val="DCF2E6"/>
+          </a:solidFill>
+          <a:ln>
+            <a:noFill/>
+          </a:ln>
+        </p:spPr>
+        <p:txBody>
+          <a:bodyPr wrap="square" lIns="0" tIns="0" rIns="0" bIns="0" anchor="ctr">
+            <a:noAutofit/>
+          </a:bodyPr>
+          <a:lstStyle/>
+          <a:p>
+            <a:endParaRPr lang="en-US"/>
+          </a:p>
+        </p:txBody>
+      </p:sp>
+      <p:sp>
+        <p:nvSpPr>
+          <p:cNvPr id="108" name="Insertion mark"/>
+          <p:cNvSpPr/>
+          <p:nvPr/>
+        </p:nvSpPr>
+        <p:spPr>
+          <a:xfrm>
+            <a:off x="5093216" y="4767152"/>
+            <a:ext cx="36576" cy="153522"/>
+          </a:xfrm>
+          <a:prstGeom prst="rect">
+            <a:avLst/>
+          </a:prstGeom>
+          <a:solidFill>
+            <a:srgbClr val="0B6E4F"/>
+          </a:solidFill>
+          <a:ln>
+            <a:noFill/>
+          </a:ln>
+        </p:spPr>
+        <p:txBody>
+          <a:bodyPr wrap="square" lIns="0" tIns="0" rIns="0" bIns="0" anchor="ctr">
+            <a:noAutofit/>
+          </a:bodyPr>
+          <a:lstStyle/>
+          <a:p>
+            <a:endParaRPr lang="en-US"/>
+          </a:p>
+        </p:txBody>
+      </p:sp>
+      <p:sp>
+        <p:nvSpPr>
+          <p:cNvPr id="109" name="Code line 109"/>
           <p:cNvSpPr txBox="1"/>
           <p:nvPr/>
         </p:nvSpPr>
         <p:spPr>
           <a:xfrm>
-            <a:off x="4937760" y="4833659"/>
-            <a:ext cx="4983480" cy="187100"/>
+            <a:off x="5038352" y="4762580"/>
+            <a:ext cx="5093460" cy="162666"/>
           </a:xfrm>
           <a:prstGeom prst="rect">
             <a:avLst/>
@@ -5629,69 +7729,182 @@
               </a:tabLst>
             </a:pPr>
             <a:r>
-              <a:rPr lang="en-US" sz="1150" b="0" i="0" dirty="0">
+              <a:rPr lang="en-US" sz="1100" b="0" i="0" dirty="0">
                 <a:solidFill>
                   <a:srgbClr val="1F2328"/>
                 </a:solidFill>
                 <a:latin typeface="Consolas"/>
                 <a:cs typeface="Consolas"/>
               </a:rPr>
-              <a:t xml:space="preserve">    </a:t>
-            </a:r>
-            <a:r>
-              <a:rPr lang="en-US" sz="1150" b="0" i="0" dirty="0">
-                <a:solidFill>
-                  <a:srgbClr val="5B6770"/>
-                </a:solidFill>
-                <a:latin typeface="Consolas"/>
-                <a:cs typeface="Consolas"/>
-              </a:rPr>
-              <a:t xml:space="preserve">rdfs:label</a:t>
-            </a:r>
-            <a:r>
-              <a:rPr lang="en-US" sz="1150" b="0" i="0" dirty="0">
-                <a:solidFill>
-                  <a:srgbClr val="1F2328"/>
-                </a:solidFill>
-                <a:latin typeface="Consolas"/>
-                <a:cs typeface="Consolas"/>
-              </a:rPr>
-              <a:t xml:space="preserve"> </a:t>
-            </a:r>
-            <a:r>
-              <a:rPr lang="en-US" sz="1150" b="0" i="0" dirty="0">
-                <a:solidFill>
-                  <a:srgbClr val="A3401E"/>
-                </a:solidFill>
-                <a:latin typeface="Consolas"/>
-                <a:cs typeface="Consolas"/>
-              </a:rPr>
-              <a:t xml:space="preserve">"ECOG Performance Status"@en</a:t>
-            </a:r>
-            <a:r>
-              <a:rPr lang="en-US" sz="1150" b="0" i="0" dirty="0">
-                <a:solidFill>
-                  <a:srgbClr val="1F2328"/>
-                </a:solidFill>
-                <a:latin typeface="Consolas"/>
-                <a:cs typeface="Consolas"/>
-              </a:rPr>
-              <a:t xml:space="preserve">,</a:t>
-            </a:r>
-            <a:endParaRPr lang="en-US" sz="1150"/>
+              <a:t xml:space="preserve">  </a:t>
+            </a:r>
+            <a:r>
+              <a:rPr lang="en-US" sz="1100" b="1" i="0" dirty="0">
+                <a:solidFill>
+                  <a:srgbClr val="0B6E4F"/>
+                </a:solidFill>
+                <a:latin typeface="Consolas"/>
+                <a:cs typeface="Consolas"/>
+              </a:rPr>
+              <a:t xml:space="preserve">Annotations:</a:t>
+            </a:r>
+            <a:endParaRPr lang="en-US" sz="1100"/>
           </a:p>
         </p:txBody>
       </p:sp>
       <p:sp>
         <p:nvSpPr>
-          <p:cNvPr id="403" name="Evidence tag"/>
+          <p:cNvPr id="110" name="Inserted row"/>
           <p:cNvSpPr/>
           <p:nvPr/>
         </p:nvSpPr>
         <p:spPr>
           <a:xfrm>
-            <a:off x="10040112" y="4840341"/>
-            <a:ext cx="987552" cy="173736"/>
+            <a:off x="5093216" y="4929819"/>
+            <a:ext cx="6126732" cy="153522"/>
+          </a:xfrm>
+          <a:prstGeom prst="rect">
+            <a:avLst/>
+          </a:prstGeom>
+          <a:solidFill>
+            <a:srgbClr val="DCF2E6"/>
+          </a:solidFill>
+          <a:ln>
+            <a:noFill/>
+          </a:ln>
+        </p:spPr>
+        <p:txBody>
+          <a:bodyPr wrap="square" lIns="0" tIns="0" rIns="0" bIns="0" anchor="ctr">
+            <a:noAutofit/>
+          </a:bodyPr>
+          <a:lstStyle/>
+          <a:p>
+            <a:endParaRPr lang="en-US"/>
+          </a:p>
+        </p:txBody>
+      </p:sp>
+      <p:sp>
+        <p:nvSpPr>
+          <p:cNvPr id="111" name="Insertion mark"/>
+          <p:cNvSpPr/>
+          <p:nvPr/>
+        </p:nvSpPr>
+        <p:spPr>
+          <a:xfrm>
+            <a:off x="5093216" y="4929819"/>
+            <a:ext cx="36576" cy="153522"/>
+          </a:xfrm>
+          <a:prstGeom prst="rect">
+            <a:avLst/>
+          </a:prstGeom>
+          <a:solidFill>
+            <a:srgbClr val="0B6E4F"/>
+          </a:solidFill>
+          <a:ln>
+            <a:noFill/>
+          </a:ln>
+        </p:spPr>
+        <p:txBody>
+          <a:bodyPr wrap="square" lIns="0" tIns="0" rIns="0" bIns="0" anchor="ctr">
+            <a:noAutofit/>
+          </a:bodyPr>
+          <a:lstStyle/>
+          <a:p>
+            <a:endParaRPr lang="en-US"/>
+          </a:p>
+        </p:txBody>
+      </p:sp>
+      <p:sp>
+        <p:nvSpPr>
+          <p:cNvPr id="112" name="Code line 112"/>
+          <p:cNvSpPr txBox="1"/>
+          <p:nvPr/>
+        </p:nvSpPr>
+        <p:spPr>
+          <a:xfrm>
+            <a:off x="5038352" y="4925247"/>
+            <a:ext cx="5093460" cy="162666"/>
+          </a:xfrm>
+          <a:prstGeom prst="rect">
+            <a:avLst/>
+          </a:prstGeom>
+          <a:noFill/>
+        </p:spPr>
+        <p:txBody>
+          <a:bodyPr wrap="none" lIns="146304" tIns="0" rIns="0" bIns="0" anchor="ctr">
+            <a:noAutofit/>
+          </a:bodyPr>
+          <a:lstStyle/>
+          <a:p>
+            <a:pPr>
+              <a:tabLst>
+                <a:tab pos="4224528" algn="l"/>
+              </a:tabLst>
+            </a:pPr>
+            <a:r>
+              <a:rPr lang="en-US" sz="1100" b="0" i="0" dirty="0">
+                <a:solidFill>
+                  <a:srgbClr val="1F2328"/>
+                </a:solidFill>
+                <a:latin typeface="Consolas"/>
+                <a:cs typeface="Consolas"/>
+              </a:rPr>
+              <a:t xml:space="preserve">    </a:t>
+            </a:r>
+            <a:r>
+              <a:rPr lang="en-US" sz="1100" b="0" i="0" dirty="0">
+                <a:solidFill>
+                  <a:srgbClr val="5B6770"/>
+                </a:solidFill>
+                <a:latin typeface="Consolas"/>
+                <a:cs typeface="Consolas"/>
+              </a:rPr>
+              <a:t xml:space="preserve">rdfs:label</a:t>
+            </a:r>
+            <a:r>
+              <a:rPr lang="en-US" sz="1100" b="0" i="0" dirty="0">
+                <a:solidFill>
+                  <a:srgbClr val="1F2328"/>
+                </a:solidFill>
+                <a:latin typeface="Consolas"/>
+                <a:cs typeface="Consolas"/>
+              </a:rPr>
+              <a:t xml:space="preserve"> </a:t>
+            </a:r>
+            <a:r>
+              <a:rPr lang="en-US" sz="1100" b="0" i="0" dirty="0">
+                <a:solidFill>
+                  <a:srgbClr val="A3401E"/>
+                </a:solidFill>
+                <a:latin typeface="Consolas"/>
+                <a:cs typeface="Consolas"/>
+              </a:rPr>
+              <a:t xml:space="preserve">"ECOG Performance Status"@en</a:t>
+            </a:r>
+            <a:r>
+              <a:rPr lang="en-US" sz="1100" b="0" i="0" dirty="0">
+                <a:solidFill>
+                  <a:srgbClr val="1F2328"/>
+                </a:solidFill>
+                <a:latin typeface="Consolas"/>
+                <a:cs typeface="Consolas"/>
+              </a:rPr>
+              <a:t xml:space="preserve">,</a:t>
+            </a:r>
+            <a:endParaRPr lang="en-US" sz="1100"/>
+          </a:p>
+        </p:txBody>
+      </p:sp>
+      <p:sp>
+        <p:nvSpPr>
+          <p:cNvPr id="113" name="Evidence tag"/>
+          <p:cNvSpPr/>
+          <p:nvPr/>
+        </p:nvSpPr>
+        <p:spPr>
+          <a:xfrm>
+            <a:off x="10177532" y="4934391"/>
+            <a:ext cx="987552" cy="144378"/>
           </a:xfrm>
           <a:prstGeom prst="roundRect">
             <a:avLst>
@@ -5733,14 +7946,76 @@
       </p:sp>
       <p:sp>
         <p:nvSpPr>
-          <p:cNvPr id="404" name="Code line 404"/>
+          <p:cNvPr id="114" name="Inserted row"/>
+          <p:cNvSpPr/>
+          <p:nvPr/>
+        </p:nvSpPr>
+        <p:spPr>
+          <a:xfrm>
+            <a:off x="5093216" y="5092486"/>
+            <a:ext cx="6126732" cy="153522"/>
+          </a:xfrm>
+          <a:prstGeom prst="rect">
+            <a:avLst/>
+          </a:prstGeom>
+          <a:solidFill>
+            <a:srgbClr val="DCF2E6"/>
+          </a:solidFill>
+          <a:ln>
+            <a:noFill/>
+          </a:ln>
+        </p:spPr>
+        <p:txBody>
+          <a:bodyPr wrap="square" lIns="0" tIns="0" rIns="0" bIns="0" anchor="ctr">
+            <a:noAutofit/>
+          </a:bodyPr>
+          <a:lstStyle/>
+          <a:p>
+            <a:endParaRPr lang="en-US"/>
+          </a:p>
+        </p:txBody>
+      </p:sp>
+      <p:sp>
+        <p:nvSpPr>
+          <p:cNvPr id="115" name="Insertion mark"/>
+          <p:cNvSpPr/>
+          <p:nvPr/>
+        </p:nvSpPr>
+        <p:spPr>
+          <a:xfrm>
+            <a:off x="5093216" y="5092486"/>
+            <a:ext cx="36576" cy="153522"/>
+          </a:xfrm>
+          <a:prstGeom prst="rect">
+            <a:avLst/>
+          </a:prstGeom>
+          <a:solidFill>
+            <a:srgbClr val="0B6E4F"/>
+          </a:solidFill>
+          <a:ln>
+            <a:noFill/>
+          </a:ln>
+        </p:spPr>
+        <p:txBody>
+          <a:bodyPr wrap="square" lIns="0" tIns="0" rIns="0" bIns="0" anchor="ctr">
+            <a:noAutofit/>
+          </a:bodyPr>
+          <a:lstStyle/>
+          <a:p>
+            <a:endParaRPr lang="en-US"/>
+          </a:p>
+        </p:txBody>
+      </p:sp>
+      <p:sp>
+        <p:nvSpPr>
+          <p:cNvPr id="116" name="Code line 116"/>
           <p:cNvSpPr txBox="1"/>
           <p:nvPr/>
         </p:nvSpPr>
         <p:spPr>
           <a:xfrm>
-            <a:off x="4937760" y="5020759"/>
-            <a:ext cx="4983480" cy="187100"/>
+            <a:off x="5038352" y="5087914"/>
+            <a:ext cx="5093460" cy="162666"/>
           </a:xfrm>
           <a:prstGeom prst="rect">
             <a:avLst/>
@@ -5759,7 +8034,7 @@
               </a:tabLst>
             </a:pPr>
             <a:r>
-              <a:rPr lang="en-US" sz="1150" b="0" i="0" dirty="0">
+              <a:rPr lang="en-US" sz="1100" b="0" i="0" dirty="0">
                 <a:solidFill>
                   <a:srgbClr val="1F2328"/>
                 </a:solidFill>
@@ -5769,7 +8044,7 @@
               <a:t xml:space="preserve">    </a:t>
             </a:r>
             <a:r>
-              <a:rPr lang="en-US" sz="1150" b="0" i="0" dirty="0">
+              <a:rPr lang="en-US" sz="1100" b="0" i="0" dirty="0">
                 <a:solidFill>
                   <a:srgbClr val="5B6770"/>
                 </a:solidFill>
@@ -5779,7 +8054,7 @@
               <a:t xml:space="preserve">rdfs:comment</a:t>
             </a:r>
             <a:r>
-              <a:rPr lang="en-US" sz="1150" b="0" i="0" dirty="0">
+              <a:rPr lang="en-US" sz="1100" b="0" i="0" dirty="0">
                 <a:solidFill>
                   <a:srgbClr val="1F2328"/>
                 </a:solidFill>
@@ -5789,7 +8064,7 @@
               <a:t xml:space="preserve"> </a:t>
             </a:r>
             <a:r>
-              <a:rPr lang="en-US" sz="1150" b="0" i="0" dirty="0">
+              <a:rPr lang="en-US" sz="1100" b="0" i="0" dirty="0">
                 <a:solidFill>
                   <a:srgbClr val="A3401E"/>
                 </a:solidFill>
@@ -5799,7 +8074,7 @@
               <a:t xml:space="preserve">"0 = fully active … 5 = dead"@en</a:t>
             </a:r>
             <a:r>
-              <a:rPr lang="en-US" sz="1150" b="0" i="0" dirty="0">
+              <a:rPr lang="en-US" sz="1100" b="0" i="0" dirty="0">
                 <a:solidFill>
                   <a:srgbClr val="1F2328"/>
                 </a:solidFill>
@@ -5808,20 +8083,20 @@
               </a:rPr>
               <a:t xml:space="preserve">,</a:t>
             </a:r>
-            <a:endParaRPr lang="en-US" sz="1150"/>
+            <a:endParaRPr lang="en-US" sz="1100"/>
           </a:p>
         </p:txBody>
       </p:sp>
       <p:sp>
         <p:nvSpPr>
-          <p:cNvPr id="405" name="Evidence tag"/>
+          <p:cNvPr id="117" name="Evidence tag"/>
           <p:cNvSpPr/>
           <p:nvPr/>
         </p:nvSpPr>
         <p:spPr>
           <a:xfrm>
-            <a:off x="10040112" y="5027441"/>
-            <a:ext cx="987552" cy="173736"/>
+            <a:off x="10177532" y="5097058"/>
+            <a:ext cx="987552" cy="144378"/>
           </a:xfrm>
           <a:prstGeom prst="roundRect">
             <a:avLst>
@@ -5863,14 +8138,76 @@
       </p:sp>
       <p:sp>
         <p:nvSpPr>
-          <p:cNvPr id="406" name="Code line 406"/>
+          <p:cNvPr id="118" name="Inserted row"/>
+          <p:cNvSpPr/>
+          <p:nvPr/>
+        </p:nvSpPr>
+        <p:spPr>
+          <a:xfrm>
+            <a:off x="5093216" y="5255153"/>
+            <a:ext cx="6126732" cy="153522"/>
+          </a:xfrm>
+          <a:prstGeom prst="rect">
+            <a:avLst/>
+          </a:prstGeom>
+          <a:solidFill>
+            <a:srgbClr val="DCF2E6"/>
+          </a:solidFill>
+          <a:ln>
+            <a:noFill/>
+          </a:ln>
+        </p:spPr>
+        <p:txBody>
+          <a:bodyPr wrap="square" lIns="0" tIns="0" rIns="0" bIns="0" anchor="ctr">
+            <a:noAutofit/>
+          </a:bodyPr>
+          <a:lstStyle/>
+          <a:p>
+            <a:endParaRPr lang="en-US"/>
+          </a:p>
+        </p:txBody>
+      </p:sp>
+      <p:sp>
+        <p:nvSpPr>
+          <p:cNvPr id="119" name="Insertion mark"/>
+          <p:cNvSpPr/>
+          <p:nvPr/>
+        </p:nvSpPr>
+        <p:spPr>
+          <a:xfrm>
+            <a:off x="5093216" y="5255153"/>
+            <a:ext cx="36576" cy="153522"/>
+          </a:xfrm>
+          <a:prstGeom prst="rect">
+            <a:avLst/>
+          </a:prstGeom>
+          <a:solidFill>
+            <a:srgbClr val="0B6E4F"/>
+          </a:solidFill>
+          <a:ln>
+            <a:noFill/>
+          </a:ln>
+        </p:spPr>
+        <p:txBody>
+          <a:bodyPr wrap="square" lIns="0" tIns="0" rIns="0" bIns="0" anchor="ctr">
+            <a:noAutofit/>
+          </a:bodyPr>
+          <a:lstStyle/>
+          <a:p>
+            <a:endParaRPr lang="en-US"/>
+          </a:p>
+        </p:txBody>
+      </p:sp>
+      <p:sp>
+        <p:nvSpPr>
+          <p:cNvPr id="120" name="Code line 120"/>
           <p:cNvSpPr txBox="1"/>
           <p:nvPr/>
         </p:nvSpPr>
         <p:spPr>
           <a:xfrm>
-            <a:off x="4937760" y="5207859"/>
-            <a:ext cx="4983480" cy="187100"/>
+            <a:off x="5038352" y="5250581"/>
+            <a:ext cx="5093460" cy="162666"/>
           </a:xfrm>
           <a:prstGeom prst="rect">
             <a:avLst/>
@@ -5889,7 +8226,7 @@
               </a:tabLst>
             </a:pPr>
             <a:r>
-              <a:rPr lang="en-US" sz="1150" b="0" i="0" dirty="0">
+              <a:rPr lang="en-US" sz="1100" b="0" i="0" dirty="0">
                 <a:solidFill>
                   <a:srgbClr val="1F2328"/>
                 </a:solidFill>
@@ -5899,7 +8236,7 @@
               <a:t xml:space="preserve">    </a:t>
             </a:r>
             <a:r>
-              <a:rPr lang="en-US" sz="1150" b="0" i="0" dirty="0">
+              <a:rPr lang="en-US" sz="1100" b="0" i="0" dirty="0">
                 <a:solidFill>
                   <a:srgbClr val="5B6770"/>
                 </a:solidFill>
@@ -5909,7 +8246,7 @@
               <a:t xml:space="preserve">prov:wasDerivedFrom</a:t>
             </a:r>
             <a:r>
-              <a:rPr lang="en-US" sz="1150" b="0" i="0" dirty="0">
+              <a:rPr lang="en-US" sz="1100" b="0" i="0" dirty="0">
                 <a:solidFill>
                   <a:srgbClr val="1F2328"/>
                 </a:solidFill>
@@ -5919,7 +8256,7 @@
               <a:t xml:space="preserve"> </a:t>
             </a:r>
             <a:r>
-              <a:rPr lang="en-US" sz="1150" b="0" i="0" dirty="0">
+              <a:rPr lang="en-US" sz="1100" b="0" i="0" dirty="0">
                 <a:solidFill>
                   <a:srgbClr val="2F6B78"/>
                 </a:solidFill>
@@ -5928,20 +8265,20 @@
               </a:rPr>
               <a:t xml:space="preserve">admission:ecog_stage</a:t>
             </a:r>
-            <a:endParaRPr lang="en-US" sz="1150"/>
+            <a:endParaRPr lang="en-US" sz="1100"/>
           </a:p>
         </p:txBody>
       </p:sp>
       <p:sp>
         <p:nvSpPr>
-          <p:cNvPr id="407" name="Evidence tag"/>
+          <p:cNvPr id="121" name="Evidence tag"/>
           <p:cNvSpPr/>
           <p:nvPr/>
         </p:nvSpPr>
         <p:spPr>
           <a:xfrm>
-            <a:off x="10040112" y="5214541"/>
-            <a:ext cx="987552" cy="173736"/>
+            <a:off x="10177532" y="5259725"/>
+            <a:ext cx="987552" cy="144378"/>
           </a:xfrm>
           <a:prstGeom prst="roundRect">
             <a:avLst>
@@ -6032,7 +8369,7 @@
     </a:clrScheme>
     <a:fontScheme name="Office">
       <a:majorFont>
-        <a:latin typeface="Cambria"/>
+        <a:latin typeface="Arial"/>
         <a:ea typeface=""/>
         <a:cs typeface=""/>
         <a:font script="Jpan" typeface="ＭＳ Ｐゴシック"/>
@@ -6067,7 +8404,7 @@
         <a:font script="Geor" typeface="Sylfaen"/>
       </a:majorFont>
       <a:minorFont>
-        <a:latin typeface="Calibri"/>
+        <a:latin typeface="Arial"/>
         <a:ea typeface=""/>
         <a:cs typeface=""/>
         <a:font script="Jpan" typeface="ＭＳ Ｐゴシック"/>
@@ -6311,7 +8648,7 @@
     </a:clrScheme>
     <a:fontScheme name="Office">
       <a:majorFont>
-        <a:latin typeface="Cambria"/>
+        <a:latin typeface="Arial"/>
         <a:ea typeface=""/>
         <a:cs typeface=""/>
         <a:font script="Jpan" typeface="ＭＳ Ｐゴシック"/>
@@ -6346,7 +8683,7 @@
         <a:font script="Geor" typeface="Sylfaen"/>
       </a:majorFont>
       <a:minorFont>
-        <a:latin typeface="Calibri"/>
+        <a:latin typeface="Arial"/>
         <a:ea typeface=""/>
         <a:cs typeface=""/>
         <a:font script="Jpan" typeface="ＭＳ Ｐゴシック"/>
